--- a/TORIHADA_第2週_研修資料.pptx
+++ b/TORIHADA_第2週_研修資料.pptx
@@ -5301,9 +5301,105 @@
           </a:p>
         </p:txBody>
       </p:sp>
-      <p:sp>
-        <p:nvSpPr>
-          <p:cNvPr id="53" name="Rectangle 52"/>
+      <p:pic>
+        <p:nvPicPr>
+          <p:cNvPr id="53" name="Picture 52" descr="image.png"/>
+          <p:cNvPicPr>
+            <a:picLocks noChangeAspect="1"/>
+          </p:cNvPicPr>
+          <p:nvPr/>
+        </p:nvPicPr>
+        <p:blipFill>
+          <a:blip r:embed="rId2"/>
+          <a:stretch>
+            <a:fillRect/>
+          </a:stretch>
+        </p:blipFill>
+        <p:spPr>
+          <a:xfrm>
+            <a:off x="182880" y="182880"/>
+            <a:ext cx="1005840" cy="1005840"/>
+          </a:xfrm>
+          <a:prstGeom prst="rect">
+            <a:avLst/>
+          </a:prstGeom>
+        </p:spPr>
+      </p:pic>
+      <p:pic>
+        <p:nvPicPr>
+          <p:cNvPr id="54" name="Picture 53" descr="image.png"/>
+          <p:cNvPicPr>
+            <a:picLocks noChangeAspect="1"/>
+          </p:cNvPicPr>
+          <p:nvPr/>
+        </p:nvPicPr>
+        <p:blipFill>
+          <a:blip r:embed="rId3"/>
+          <a:stretch>
+            <a:fillRect/>
+          </a:stretch>
+        </p:blipFill>
+        <p:spPr>
+          <a:xfrm>
+            <a:off x="7863840" y="274320"/>
+            <a:ext cx="822960" cy="822960"/>
+          </a:xfrm>
+          <a:prstGeom prst="rect">
+            <a:avLst/>
+          </a:prstGeom>
+        </p:spPr>
+      </p:pic>
+      <p:pic>
+        <p:nvPicPr>
+          <p:cNvPr id="55" name="Picture 54" descr="image.png"/>
+          <p:cNvPicPr>
+            <a:picLocks noChangeAspect="1"/>
+          </p:cNvPicPr>
+          <p:nvPr/>
+        </p:nvPicPr>
+        <p:blipFill>
+          <a:blip r:embed="rId4"/>
+          <a:stretch>
+            <a:fillRect/>
+          </a:stretch>
+        </p:blipFill>
+        <p:spPr>
+          <a:xfrm>
+            <a:off x="91440" y="3749039"/>
+            <a:ext cx="1005840" cy="1005840"/>
+          </a:xfrm>
+          <a:prstGeom prst="rect">
+            <a:avLst/>
+          </a:prstGeom>
+        </p:spPr>
+      </p:pic>
+      <p:pic>
+        <p:nvPicPr>
+          <p:cNvPr id="56" name="Picture 55" descr="image.png"/>
+          <p:cNvPicPr>
+            <a:picLocks noChangeAspect="1"/>
+          </p:cNvPicPr>
+          <p:nvPr/>
+        </p:nvPicPr>
+        <p:blipFill>
+          <a:blip r:embed="rId5"/>
+          <a:stretch>
+            <a:fillRect/>
+          </a:stretch>
+        </p:blipFill>
+        <p:spPr>
+          <a:xfrm>
+            <a:off x="7863840" y="3840480"/>
+            <a:ext cx="914400" cy="914400"/>
+          </a:xfrm>
+          <a:prstGeom prst="rect">
+            <a:avLst/>
+          </a:prstGeom>
+        </p:spPr>
+      </p:pic>
+      <p:sp>
+        <p:nvSpPr>
+          <p:cNvPr id="57" name="Rectangle 56"/>
           <p:cNvSpPr/>
           <p:nvPr/>
         </p:nvSpPr>
@@ -5346,7 +5442,7 @@
       </p:sp>
       <p:sp>
         <p:nvSpPr>
-          <p:cNvPr id="54" name="TextBox 53"/>
+          <p:cNvPr id="58" name="TextBox 57"/>
           <p:cNvSpPr txBox="1"/>
           <p:nvPr/>
         </p:nvSpPr>
@@ -7473,9 +7569,7 @@
             <a:ext cx="2743200" cy="3977639"/>
           </a:xfrm>
           <a:prstGeom prst="roundRect">
-            <a:avLst>
-              <a:gd name="adj" fmla="val 20000"/>
-            </a:avLst>
+            <a:avLst/>
           </a:prstGeom>
           <a:solidFill>
             <a:srgbClr val="FFFFFF"/>
@@ -7508,9 +7602,33 @@
           </a:p>
         </p:txBody>
       </p:sp>
-      <p:sp>
-        <p:nvSpPr>
-          <p:cNvPr id="51" name="Rounded Rectangle 50"/>
+      <p:pic>
+        <p:nvPicPr>
+          <p:cNvPr id="51" name="Picture 50" descr="image.png"/>
+          <p:cNvPicPr>
+            <a:picLocks noChangeAspect="1"/>
+          </p:cNvPicPr>
+          <p:nvPr/>
+        </p:nvPicPr>
+        <p:blipFill>
+          <a:blip r:embed="rId2"/>
+          <a:stretch>
+            <a:fillRect/>
+          </a:stretch>
+        </p:blipFill>
+        <p:spPr>
+          <a:xfrm>
+            <a:off x="1005840" y="1097280"/>
+            <a:ext cx="1188720" cy="1188720"/>
+          </a:xfrm>
+          <a:prstGeom prst="rect">
+            <a:avLst/>
+          </a:prstGeom>
+        </p:spPr>
+      </p:pic>
+      <p:sp>
+        <p:nvSpPr>
+          <p:cNvPr id="52" name="Rounded Rectangle 51"/>
           <p:cNvSpPr/>
           <p:nvPr/>
         </p:nvSpPr>
@@ -7520,9 +7638,7 @@
             <a:ext cx="640080" cy="640080"/>
           </a:xfrm>
           <a:prstGeom prst="roundRect">
-            <a:avLst>
-              <a:gd name="adj" fmla="val 20000"/>
-            </a:avLst>
+            <a:avLst/>
           </a:prstGeom>
           <a:solidFill>
             <a:srgbClr val="FF3999"/>
@@ -7555,7 +7671,7 @@
       </p:sp>
       <p:sp>
         <p:nvSpPr>
-          <p:cNvPr id="52" name="TextBox 51"/>
+          <p:cNvPr id="53" name="TextBox 52"/>
           <p:cNvSpPr txBox="1"/>
           <p:nvPr/>
         </p:nvSpPr>
@@ -7590,7 +7706,7 @@
       </p:sp>
       <p:sp>
         <p:nvSpPr>
-          <p:cNvPr id="53" name="TextBox 52"/>
+          <p:cNvPr id="54" name="TextBox 53"/>
           <p:cNvSpPr txBox="1"/>
           <p:nvPr/>
         </p:nvSpPr>
@@ -7625,7 +7741,7 @@
       </p:sp>
       <p:sp>
         <p:nvSpPr>
-          <p:cNvPr id="54" name="TextBox 53"/>
+          <p:cNvPr id="55" name="TextBox 54"/>
           <p:cNvSpPr txBox="1"/>
           <p:nvPr/>
         </p:nvSpPr>
@@ -7660,7 +7776,7 @@
       </p:sp>
       <p:sp>
         <p:nvSpPr>
-          <p:cNvPr id="55" name="Rounded Rectangle 54"/>
+          <p:cNvPr id="56" name="Rounded Rectangle 55"/>
           <p:cNvSpPr/>
           <p:nvPr/>
         </p:nvSpPr>
@@ -7670,9 +7786,7 @@
             <a:ext cx="2743200" cy="3977639"/>
           </a:xfrm>
           <a:prstGeom prst="roundRect">
-            <a:avLst>
-              <a:gd name="adj" fmla="val 20000"/>
-            </a:avLst>
+            <a:avLst/>
           </a:prstGeom>
           <a:solidFill>
             <a:srgbClr val="FFFFFF"/>
@@ -7705,9 +7819,33 @@
           </a:p>
         </p:txBody>
       </p:sp>
-      <p:sp>
-        <p:nvSpPr>
-          <p:cNvPr id="56" name="Rounded Rectangle 55"/>
+      <p:pic>
+        <p:nvPicPr>
+          <p:cNvPr id="57" name="Picture 56" descr="image.png"/>
+          <p:cNvPicPr>
+            <a:picLocks noChangeAspect="1"/>
+          </p:cNvPicPr>
+          <p:nvPr/>
+        </p:nvPicPr>
+        <p:blipFill>
+          <a:blip r:embed="rId3"/>
+          <a:stretch>
+            <a:fillRect/>
+          </a:stretch>
+        </p:blipFill>
+        <p:spPr>
+          <a:xfrm>
+            <a:off x="3977639" y="1097280"/>
+            <a:ext cx="1188720" cy="1188720"/>
+          </a:xfrm>
+          <a:prstGeom prst="rect">
+            <a:avLst/>
+          </a:prstGeom>
+        </p:spPr>
+      </p:pic>
+      <p:sp>
+        <p:nvSpPr>
+          <p:cNvPr id="58" name="Rounded Rectangle 57"/>
           <p:cNvSpPr/>
           <p:nvPr/>
         </p:nvSpPr>
@@ -7717,9 +7855,7 @@
             <a:ext cx="640080" cy="640080"/>
           </a:xfrm>
           <a:prstGeom prst="roundRect">
-            <a:avLst>
-              <a:gd name="adj" fmla="val 20000"/>
-            </a:avLst>
+            <a:avLst/>
           </a:prstGeom>
           <a:solidFill>
             <a:srgbClr val="FF3999"/>
@@ -7752,7 +7888,7 @@
       </p:sp>
       <p:sp>
         <p:nvSpPr>
-          <p:cNvPr id="57" name="TextBox 56"/>
+          <p:cNvPr id="59" name="TextBox 58"/>
           <p:cNvSpPr txBox="1"/>
           <p:nvPr/>
         </p:nvSpPr>
@@ -7787,7 +7923,7 @@
       </p:sp>
       <p:sp>
         <p:nvSpPr>
-          <p:cNvPr id="58" name="TextBox 57"/>
+          <p:cNvPr id="60" name="TextBox 59"/>
           <p:cNvSpPr txBox="1"/>
           <p:nvPr/>
         </p:nvSpPr>
@@ -7822,7 +7958,7 @@
       </p:sp>
       <p:sp>
         <p:nvSpPr>
-          <p:cNvPr id="59" name="TextBox 58"/>
+          <p:cNvPr id="61" name="TextBox 60"/>
           <p:cNvSpPr txBox="1"/>
           <p:nvPr/>
         </p:nvSpPr>
@@ -7857,7 +7993,7 @@
       </p:sp>
       <p:sp>
         <p:nvSpPr>
-          <p:cNvPr id="60" name="Rounded Rectangle 59"/>
+          <p:cNvPr id="62" name="Rounded Rectangle 61"/>
           <p:cNvSpPr/>
           <p:nvPr/>
         </p:nvSpPr>
@@ -7867,9 +8003,7 @@
             <a:ext cx="2743200" cy="3977639"/>
           </a:xfrm>
           <a:prstGeom prst="roundRect">
-            <a:avLst>
-              <a:gd name="adj" fmla="val 20000"/>
-            </a:avLst>
+            <a:avLst/>
           </a:prstGeom>
           <a:solidFill>
             <a:srgbClr val="FFFFFF"/>
@@ -7902,9 +8036,33 @@
           </a:p>
         </p:txBody>
       </p:sp>
-      <p:sp>
-        <p:nvSpPr>
-          <p:cNvPr id="61" name="Rounded Rectangle 60"/>
+      <p:pic>
+        <p:nvPicPr>
+          <p:cNvPr id="63" name="Picture 62" descr="image.png"/>
+          <p:cNvPicPr>
+            <a:picLocks noChangeAspect="1"/>
+          </p:cNvPicPr>
+          <p:nvPr/>
+        </p:nvPicPr>
+        <p:blipFill>
+          <a:blip r:embed="rId4"/>
+          <a:stretch>
+            <a:fillRect/>
+          </a:stretch>
+        </p:blipFill>
+        <p:spPr>
+          <a:xfrm>
+            <a:off x="6949440" y="1097280"/>
+            <a:ext cx="1188720" cy="1188720"/>
+          </a:xfrm>
+          <a:prstGeom prst="rect">
+            <a:avLst/>
+          </a:prstGeom>
+        </p:spPr>
+      </p:pic>
+      <p:sp>
+        <p:nvSpPr>
+          <p:cNvPr id="64" name="Rounded Rectangle 63"/>
           <p:cNvSpPr/>
           <p:nvPr/>
         </p:nvSpPr>
@@ -7914,9 +8072,7 @@
             <a:ext cx="640080" cy="640080"/>
           </a:xfrm>
           <a:prstGeom prst="roundRect">
-            <a:avLst>
-              <a:gd name="adj" fmla="val 20000"/>
-            </a:avLst>
+            <a:avLst/>
           </a:prstGeom>
           <a:solidFill>
             <a:srgbClr val="FF3999"/>
@@ -7949,7 +8105,7 @@
       </p:sp>
       <p:sp>
         <p:nvSpPr>
-          <p:cNvPr id="62" name="TextBox 61"/>
+          <p:cNvPr id="65" name="TextBox 64"/>
           <p:cNvSpPr txBox="1"/>
           <p:nvPr/>
         </p:nvSpPr>
@@ -7984,7 +8140,7 @@
       </p:sp>
       <p:sp>
         <p:nvSpPr>
-          <p:cNvPr id="63" name="TextBox 62"/>
+          <p:cNvPr id="66" name="TextBox 65"/>
           <p:cNvSpPr txBox="1"/>
           <p:nvPr/>
         </p:nvSpPr>
@@ -8019,7 +8175,7 @@
       </p:sp>
       <p:sp>
         <p:nvSpPr>
-          <p:cNvPr id="64" name="TextBox 63"/>
+          <p:cNvPr id="67" name="TextBox 66"/>
           <p:cNvSpPr txBox="1"/>
           <p:nvPr/>
         </p:nvSpPr>
@@ -10143,12 +10299,10 @@
         <p:spPr>
           <a:xfrm>
             <a:off x="274320" y="914400"/>
-            <a:ext cx="8595360" cy="1417320"/>
+            <a:ext cx="5943600" cy="1417320"/>
           </a:xfrm>
           <a:prstGeom prst="roundRect">
-            <a:avLst>
-              <a:gd name="adj" fmla="val 20000"/>
-            </a:avLst>
+            <a:avLst/>
           </a:prstGeom>
           <a:solidFill>
             <a:srgbClr val="FFFFFF"/>
@@ -10190,7 +10344,7 @@
         <p:spPr>
           <a:xfrm>
             <a:off x="438912" y="1078992"/>
-            <a:ext cx="8321040" cy="1143000"/>
+            <a:ext cx="5669280" cy="1143000"/>
           </a:xfrm>
           <a:prstGeom prst="rect">
             <a:avLst/>
@@ -10270,9 +10424,102 @@
           </a:p>
         </p:txBody>
       </p:sp>
-      <p:sp>
-        <p:nvSpPr>
-          <p:cNvPr id="52" name="Rounded Rectangle 51"/>
+      <p:pic>
+        <p:nvPicPr>
+          <p:cNvPr id="52" name="Picture 51" descr="image.png"/>
+          <p:cNvPicPr>
+            <a:picLocks noChangeAspect="1"/>
+          </p:cNvPicPr>
+          <p:nvPr/>
+        </p:nvPicPr>
+        <p:blipFill>
+          <a:blip r:embed="rId2"/>
+          <a:stretch>
+            <a:fillRect/>
+          </a:stretch>
+        </p:blipFill>
+        <p:spPr>
+          <a:xfrm>
+            <a:off x="6400800" y="1005840"/>
+            <a:ext cx="1188720" cy="1188720"/>
+          </a:xfrm>
+          <a:prstGeom prst="rect">
+            <a:avLst/>
+          </a:prstGeom>
+        </p:spPr>
+      </p:pic>
+      <p:sp>
+        <p:nvSpPr>
+          <p:cNvPr id="53" name="Rounded Rectangle 52"/>
+          <p:cNvSpPr/>
+          <p:nvPr/>
+        </p:nvSpPr>
+        <p:spPr>
+          <a:xfrm>
+            <a:off x="6126480" y="914400"/>
+            <a:ext cx="2743200" cy="1417320"/>
+          </a:xfrm>
+          <a:prstGeom prst="roundRect">
+            <a:avLst/>
+          </a:prstGeom>
+          <a:solidFill>
+            <a:srgbClr val="FFECF5"/>
+          </a:solidFill>
+          <a:ln w="15240">
+            <a:solidFill>
+              <a:srgbClr val="FFD6EC"/>
+            </a:solidFill>
+          </a:ln>
+        </p:spPr>
+        <p:style>
+          <a:lnRef idx="1">
+            <a:schemeClr val="accent1"/>
+          </a:lnRef>
+          <a:fillRef idx="3">
+            <a:schemeClr val="accent1"/>
+          </a:fillRef>
+          <a:effectRef idx="2">
+            <a:schemeClr val="accent1"/>
+          </a:effectRef>
+          <a:fontRef idx="minor">
+            <a:schemeClr val="lt1"/>
+          </a:fontRef>
+        </p:style>
+        <p:txBody>
+          <a:bodyPr rtlCol="0" anchor="ctr"/>
+          <a:lstStyle/>
+          <a:p>
+            <a:pPr algn="ctr"/>
+          </a:p>
+        </p:txBody>
+      </p:sp>
+      <p:pic>
+        <p:nvPicPr>
+          <p:cNvPr id="54" name="Picture 53" descr="image.png"/>
+          <p:cNvPicPr>
+            <a:picLocks noChangeAspect="1"/>
+          </p:cNvPicPr>
+          <p:nvPr/>
+        </p:nvPicPr>
+        <p:blipFill>
+          <a:blip r:embed="rId2"/>
+          <a:stretch>
+            <a:fillRect/>
+          </a:stretch>
+        </p:blipFill>
+        <p:spPr>
+          <a:xfrm>
+            <a:off x="6903720" y="1005840"/>
+            <a:ext cx="1188720" cy="1188720"/>
+          </a:xfrm>
+          <a:prstGeom prst="rect">
+            <a:avLst/>
+          </a:prstGeom>
+        </p:spPr>
+      </p:pic>
+      <p:sp>
+        <p:nvSpPr>
+          <p:cNvPr id="55" name="Rounded Rectangle 54"/>
           <p:cNvSpPr/>
           <p:nvPr/>
         </p:nvSpPr>
@@ -10282,9 +10529,7 @@
             <a:ext cx="8595360" cy="914400"/>
           </a:xfrm>
           <a:prstGeom prst="roundRect">
-            <a:avLst>
-              <a:gd name="adj" fmla="val 20000"/>
-            </a:avLst>
+            <a:avLst/>
           </a:prstGeom>
           <a:solidFill>
             <a:srgbClr val="FFFFFF"/>
@@ -10319,7 +10564,7 @@
       </p:sp>
       <p:sp>
         <p:nvSpPr>
-          <p:cNvPr id="53" name="TextBox 52"/>
+          <p:cNvPr id="56" name="TextBox 55"/>
           <p:cNvSpPr txBox="1"/>
           <p:nvPr/>
         </p:nvSpPr>
@@ -10376,14 +10621,38 @@
                 </a:solidFill>
                 <a:latin typeface="Hiragino Kaku Gothic ProN"/>
               </a:rPr>
-              <a:t>•  弊社では字コンテで1回・動画で1回、計2回外部弁護士によるチェックを実施</a:t>
+              <a:t>•  弊社では字コンテ・動画の2回、外部弁護士によるチェックを実施</a:t>
             </a:r>
           </a:p>
         </p:txBody>
       </p:sp>
-      <p:sp>
-        <p:nvSpPr>
-          <p:cNvPr id="54" name="Rounded Rectangle 53"/>
+      <p:pic>
+        <p:nvPicPr>
+          <p:cNvPr id="57" name="Picture 56" descr="image.png"/>
+          <p:cNvPicPr>
+            <a:picLocks noChangeAspect="1"/>
+          </p:cNvPicPr>
+          <p:nvPr/>
+        </p:nvPicPr>
+        <p:blipFill>
+          <a:blip r:embed="rId3"/>
+          <a:stretch>
+            <a:fillRect/>
+          </a:stretch>
+        </p:blipFill>
+        <p:spPr>
+          <a:xfrm>
+            <a:off x="8138160" y="2468880"/>
+            <a:ext cx="731520" cy="731520"/>
+          </a:xfrm>
+          <a:prstGeom prst="rect">
+            <a:avLst/>
+          </a:prstGeom>
+        </p:spPr>
+      </p:pic>
+      <p:sp>
+        <p:nvSpPr>
+          <p:cNvPr id="58" name="Rounded Rectangle 57"/>
           <p:cNvSpPr/>
           <p:nvPr/>
         </p:nvSpPr>
@@ -10393,9 +10662,7 @@
             <a:ext cx="8595360" cy="658368"/>
           </a:xfrm>
           <a:prstGeom prst="roundRect">
-            <a:avLst>
-              <a:gd name="adj" fmla="val 20000"/>
-            </a:avLst>
+            <a:avLst/>
           </a:prstGeom>
           <a:solidFill>
             <a:srgbClr val="FFECF5"/>
@@ -10430,7 +10697,7 @@
       </p:sp>
       <p:sp>
         <p:nvSpPr>
-          <p:cNvPr id="55" name="TextBox 54"/>
+          <p:cNvPr id="59" name="TextBox 58"/>
           <p:cNvSpPr txBox="1"/>
           <p:nvPr/>
         </p:nvSpPr>
@@ -10458,7 +10725,7 @@
                 </a:solidFill>
                 <a:latin typeface="Hiragino Kaku Gothic ProN"/>
               </a:rPr>
-              <a:t>修正指示は「意地悪」ではありません。企業とクリエイター双方を守る「絶対の防衛線」と理解してください。</a:t>
+              <a:t>修正指示は企業とクリエイター双方を守る「絶対の防衛線」です。</a:t>
             </a:r>
           </a:p>
         </p:txBody>
@@ -12557,9 +12824,7 @@
             <a:ext cx="8595360" cy="1097280"/>
           </a:xfrm>
           <a:prstGeom prst="roundRect">
-            <a:avLst>
-              <a:gd name="adj" fmla="val 20000"/>
-            </a:avLst>
+            <a:avLst/>
           </a:prstGeom>
           <a:solidFill>
             <a:srgbClr val="FFFFFF"/>
@@ -12640,9 +12905,33 @@
           </a:p>
         </p:txBody>
       </p:sp>
-      <p:sp>
-        <p:nvSpPr>
-          <p:cNvPr id="52" name="Rounded Rectangle 51"/>
+      <p:pic>
+        <p:nvPicPr>
+          <p:cNvPr id="52" name="Picture 51" descr="image.png"/>
+          <p:cNvPicPr>
+            <a:picLocks noChangeAspect="1"/>
+          </p:cNvPicPr>
+          <p:nvPr/>
+        </p:nvPicPr>
+        <p:blipFill>
+          <a:blip r:embed="rId2"/>
+          <a:stretch>
+            <a:fillRect/>
+          </a:stretch>
+        </p:blipFill>
+        <p:spPr>
+          <a:xfrm>
+            <a:off x="8138160" y="914400"/>
+            <a:ext cx="914400" cy="914400"/>
+          </a:xfrm>
+          <a:prstGeom prst="rect">
+            <a:avLst/>
+          </a:prstGeom>
+        </p:spPr>
+      </p:pic>
+      <p:sp>
+        <p:nvSpPr>
+          <p:cNvPr id="53" name="Rounded Rectangle 52"/>
           <p:cNvSpPr/>
           <p:nvPr/>
         </p:nvSpPr>
@@ -12652,9 +12941,7 @@
             <a:ext cx="4023360" cy="2103120"/>
           </a:xfrm>
           <a:prstGeom prst="roundRect">
-            <a:avLst>
-              <a:gd name="adj" fmla="val 20000"/>
-            </a:avLst>
+            <a:avLst/>
           </a:prstGeom>
           <a:solidFill>
             <a:srgbClr val="FFFFFF"/>
@@ -12689,7 +12976,7 @@
       </p:sp>
       <p:sp>
         <p:nvSpPr>
-          <p:cNvPr id="53" name="Rectangle 52"/>
+          <p:cNvPr id="54" name="Rectangle 53"/>
           <p:cNvSpPr/>
           <p:nvPr/>
         </p:nvSpPr>
@@ -12732,7 +13019,7 @@
       </p:sp>
       <p:sp>
         <p:nvSpPr>
-          <p:cNvPr id="54" name="TextBox 53"/>
+          <p:cNvPr id="55" name="TextBox 54"/>
           <p:cNvSpPr txBox="1"/>
           <p:nvPr/>
         </p:nvSpPr>
@@ -12767,7 +13054,7 @@
       </p:sp>
       <p:sp>
         <p:nvSpPr>
-          <p:cNvPr id="55" name="TextBox 54"/>
+          <p:cNvPr id="56" name="TextBox 55"/>
           <p:cNvSpPr txBox="1"/>
           <p:nvPr/>
         </p:nvSpPr>
@@ -12815,14 +13102,14 @@
                 </a:solidFill>
                 <a:latin typeface="Hiragino Kaku Gothic ProN"/>
               </a:rPr>
-              <a:t>　　→  「日本一潤う！」→ 公的調査データなどの証拠を同時に表示が必要</a:t>
+              <a:t>　　→  「日本一潤う！」→ 公的調査データ等の証拠が必要</a:t>
             </a:r>
           </a:p>
         </p:txBody>
       </p:sp>
       <p:sp>
         <p:nvSpPr>
-          <p:cNvPr id="56" name="Rounded Rectangle 55"/>
+          <p:cNvPr id="57" name="Rounded Rectangle 56"/>
           <p:cNvSpPr/>
           <p:nvPr/>
         </p:nvSpPr>
@@ -12832,9 +13119,7 @@
             <a:ext cx="4297680" cy="2103120"/>
           </a:xfrm>
           <a:prstGeom prst="roundRect">
-            <a:avLst>
-              <a:gd name="adj" fmla="val 20000"/>
-            </a:avLst>
+            <a:avLst/>
           </a:prstGeom>
           <a:solidFill>
             <a:srgbClr val="FFFFFF"/>
@@ -12869,7 +13154,7 @@
       </p:sp>
       <p:sp>
         <p:nvSpPr>
-          <p:cNvPr id="57" name="Rectangle 56"/>
+          <p:cNvPr id="58" name="Rectangle 57"/>
           <p:cNvSpPr/>
           <p:nvPr/>
         </p:nvSpPr>
@@ -12912,7 +13197,7 @@
       </p:sp>
       <p:sp>
         <p:nvSpPr>
-          <p:cNvPr id="58" name="TextBox 57"/>
+          <p:cNvPr id="59" name="TextBox 58"/>
           <p:cNvSpPr txBox="1"/>
           <p:nvPr/>
         </p:nvSpPr>
@@ -12947,7 +13232,7 @@
       </p:sp>
       <p:sp>
         <p:nvSpPr>
-          <p:cNvPr id="59" name="TextBox 58"/>
+          <p:cNvPr id="60" name="TextBox 59"/>
           <p:cNvSpPr txBox="1"/>
           <p:nvPr/>
         </p:nvSpPr>
@@ -13034,6 +13319,30 @@
           </a:p>
         </p:txBody>
       </p:sp>
+      <p:pic>
+        <p:nvPicPr>
+          <p:cNvPr id="61" name="Picture 60" descr="image.png"/>
+          <p:cNvPicPr>
+            <a:picLocks noChangeAspect="1"/>
+          </p:cNvPicPr>
+          <p:nvPr/>
+        </p:nvPicPr>
+        <p:blipFill>
+          <a:blip r:embed="rId3"/>
+          <a:stretch>
+            <a:fillRect/>
+          </a:stretch>
+        </p:blipFill>
+        <p:spPr>
+          <a:xfrm>
+            <a:off x="8138160" y="3200400"/>
+            <a:ext cx="731520" cy="731520"/>
+          </a:xfrm>
+          <a:prstGeom prst="rect">
+            <a:avLst/>
+          </a:prstGeom>
+        </p:spPr>
+      </p:pic>
     </p:spTree>
   </p:cSld>
   <p:clrMapOvr>
@@ -15128,9 +15437,7 @@
             <a:ext cx="8595360" cy="1371600"/>
           </a:xfrm>
           <a:prstGeom prst="roundRect">
-            <a:avLst>
-              <a:gd name="adj" fmla="val 20000"/>
-            </a:avLst>
+            <a:avLst/>
           </a:prstGeom>
           <a:solidFill>
             <a:srgbClr val="FFFFFF"/>
@@ -15273,9 +15580,7 @@
             <a:ext cx="8595360" cy="1188720"/>
           </a:xfrm>
           <a:prstGeom prst="roundRect">
-            <a:avLst>
-              <a:gd name="adj" fmla="val 20000"/>
-            </a:avLst>
+            <a:avLst/>
           </a:prstGeom>
           <a:solidFill>
             <a:srgbClr val="FFFFFF"/>
@@ -15342,7 +15647,7 @@
                 </a:solidFill>
                 <a:latin typeface="Hiragino Kaku Gothic ProN"/>
               </a:rPr>
-              <a:t>•  不当な比較は景表法違反になるだけでなく他社に対する名誉毀損・営業妨害に直結</a:t>
+              <a:t>•  不当な比較は景表法違反＋他社への名誉毀損・営業妨害に直結</a:t>
             </a:r>
           </a:p>
           <a:p>
@@ -15358,14 +15663,38 @@
                 </a:solidFill>
                 <a:latin typeface="Hiragino Kaku Gothic ProN"/>
               </a:rPr>
-              <a:t>•  SNSのガイドラインで誹謗中傷としてアカウント停止の対象にもなり得る</a:t>
+              <a:t>•  SNSガイドラインで誹謗中傷としてアカウント停止の対象にもなり得る</a:t>
             </a:r>
           </a:p>
         </p:txBody>
       </p:sp>
-      <p:sp>
-        <p:nvSpPr>
-          <p:cNvPr id="54" name="Rounded Rectangle 53"/>
+      <p:pic>
+        <p:nvPicPr>
+          <p:cNvPr id="54" name="Picture 53" descr="image.png"/>
+          <p:cNvPicPr>
+            <a:picLocks noChangeAspect="1"/>
+          </p:cNvPicPr>
+          <p:nvPr/>
+        </p:nvPicPr>
+        <p:blipFill>
+          <a:blip r:embed="rId2"/>
+          <a:stretch>
+            <a:fillRect/>
+          </a:stretch>
+        </p:blipFill>
+        <p:spPr>
+          <a:xfrm>
+            <a:off x="8138160" y="2423160"/>
+            <a:ext cx="731520" cy="731520"/>
+          </a:xfrm>
+          <a:prstGeom prst="rect">
+            <a:avLst/>
+          </a:prstGeom>
+        </p:spPr>
+      </p:pic>
+      <p:sp>
+        <p:nvSpPr>
+          <p:cNvPr id="55" name="Rounded Rectangle 54"/>
           <p:cNvSpPr/>
           <p:nvPr/>
         </p:nvSpPr>
@@ -15375,9 +15704,7 @@
             <a:ext cx="8595360" cy="621792"/>
           </a:xfrm>
           <a:prstGeom prst="roundRect">
-            <a:avLst>
-              <a:gd name="adj" fmla="val 20000"/>
-            </a:avLst>
+            <a:avLst/>
           </a:prstGeom>
           <a:solidFill>
             <a:srgbClr val="FFECF5"/>
@@ -15412,7 +15739,7 @@
       </p:sp>
       <p:sp>
         <p:nvSpPr>
-          <p:cNvPr id="55" name="TextBox 54"/>
+          <p:cNvPr id="56" name="TextBox 55"/>
           <p:cNvSpPr txBox="1"/>
           <p:nvPr/>
         </p:nvSpPr>
@@ -15440,7 +15767,7 @@
                 </a:solidFill>
                 <a:latin typeface="Hiragino Kaku Gothic ProN"/>
               </a:rPr>
-              <a:t>PRする際は他を下げるのではなく「その商品自体の魅力」だけをまっすぐに伝えることに集中しましょう。</a:t>
+              <a:t>PRする際は他を下げるのではなく「その商品自体の魅力」だけを真っすぐ伝えることに集中しましょう。</a:t>
             </a:r>
           </a:p>
         </p:txBody>
@@ -17539,9 +17866,7 @@
             <a:ext cx="8595360" cy="1005840"/>
           </a:xfrm>
           <a:prstGeom prst="roundRect">
-            <a:avLst>
-              <a:gd name="adj" fmla="val 20000"/>
-            </a:avLst>
+            <a:avLst/>
           </a:prstGeom>
           <a:solidFill>
             <a:srgbClr val="FFFFFF"/>
@@ -17629,9 +17954,33 @@
           </a:p>
         </p:txBody>
       </p:sp>
-      <p:sp>
-        <p:nvSpPr>
-          <p:cNvPr id="52" name="Rounded Rectangle 51"/>
+      <p:pic>
+        <p:nvPicPr>
+          <p:cNvPr id="52" name="Picture 51" descr="image.png"/>
+          <p:cNvPicPr>
+            <a:picLocks noChangeAspect="1"/>
+          </p:cNvPicPr>
+          <p:nvPr/>
+        </p:nvPicPr>
+        <p:blipFill>
+          <a:blip r:embed="rId2"/>
+          <a:stretch>
+            <a:fillRect/>
+          </a:stretch>
+        </p:blipFill>
+        <p:spPr>
+          <a:xfrm>
+            <a:off x="8138160" y="868680"/>
+            <a:ext cx="731520" cy="731520"/>
+          </a:xfrm>
+          <a:prstGeom prst="rect">
+            <a:avLst/>
+          </a:prstGeom>
+        </p:spPr>
+      </p:pic>
+      <p:sp>
+        <p:nvSpPr>
+          <p:cNvPr id="53" name="Rounded Rectangle 52"/>
           <p:cNvSpPr/>
           <p:nvPr/>
         </p:nvSpPr>
@@ -17641,9 +17990,7 @@
             <a:ext cx="4023360" cy="2194560"/>
           </a:xfrm>
           <a:prstGeom prst="roundRect">
-            <a:avLst>
-              <a:gd name="adj" fmla="val 20000"/>
-            </a:avLst>
+            <a:avLst/>
           </a:prstGeom>
           <a:solidFill>
             <a:srgbClr val="FFFFFF"/>
@@ -17678,7 +18025,7 @@
       </p:sp>
       <p:sp>
         <p:nvSpPr>
-          <p:cNvPr id="53" name="Rectangle 52"/>
+          <p:cNvPr id="54" name="Rectangle 53"/>
           <p:cNvSpPr/>
           <p:nvPr/>
         </p:nvSpPr>
@@ -17721,7 +18068,7 @@
       </p:sp>
       <p:sp>
         <p:nvSpPr>
-          <p:cNvPr id="54" name="TextBox 53"/>
+          <p:cNvPr id="55" name="TextBox 54"/>
           <p:cNvSpPr txBox="1"/>
           <p:nvPr/>
         </p:nvSpPr>
@@ -17756,7 +18103,7 @@
       </p:sp>
       <p:sp>
         <p:nvSpPr>
-          <p:cNvPr id="55" name="TextBox 54"/>
+          <p:cNvPr id="56" name="TextBox 55"/>
           <p:cNvSpPr txBox="1"/>
           <p:nvPr/>
         </p:nvSpPr>
@@ -17854,7 +18201,7 @@
       </p:sp>
       <p:sp>
         <p:nvSpPr>
-          <p:cNvPr id="56" name="Rounded Rectangle 55"/>
+          <p:cNvPr id="57" name="Rounded Rectangle 56"/>
           <p:cNvSpPr/>
           <p:nvPr/>
         </p:nvSpPr>
@@ -17864,9 +18211,7 @@
             <a:ext cx="4297680" cy="2194560"/>
           </a:xfrm>
           <a:prstGeom prst="roundRect">
-            <a:avLst>
-              <a:gd name="adj" fmla="val 20000"/>
-            </a:avLst>
+            <a:avLst/>
           </a:prstGeom>
           <a:solidFill>
             <a:srgbClr val="FFFFFF"/>
@@ -17901,7 +18246,7 @@
       </p:sp>
       <p:sp>
         <p:nvSpPr>
-          <p:cNvPr id="57" name="Rectangle 56"/>
+          <p:cNvPr id="58" name="Rectangle 57"/>
           <p:cNvSpPr/>
           <p:nvPr/>
         </p:nvSpPr>
@@ -17944,7 +18289,7 @@
       </p:sp>
       <p:sp>
         <p:nvSpPr>
-          <p:cNvPr id="58" name="TextBox 57"/>
+          <p:cNvPr id="59" name="TextBox 58"/>
           <p:cNvSpPr txBox="1"/>
           <p:nvPr/>
         </p:nvSpPr>
@@ -17979,7 +18324,7 @@
       </p:sp>
       <p:sp>
         <p:nvSpPr>
-          <p:cNvPr id="59" name="TextBox 58"/>
+          <p:cNvPr id="60" name="TextBox 59"/>
           <p:cNvSpPr txBox="1"/>
           <p:nvPr/>
         </p:nvSpPr>
@@ -18072,6 +18417,30 @@
           </a:p>
         </p:txBody>
       </p:sp>
+      <p:pic>
+        <p:nvPicPr>
+          <p:cNvPr id="61" name="Picture 60" descr="image.png"/>
+          <p:cNvPicPr>
+            <a:picLocks noChangeAspect="1"/>
+          </p:cNvPicPr>
+          <p:nvPr/>
+        </p:nvPicPr>
+        <p:blipFill>
+          <a:blip r:embed="rId3"/>
+          <a:stretch>
+            <a:fillRect/>
+          </a:stretch>
+        </p:blipFill>
+        <p:spPr>
+          <a:xfrm>
+            <a:off x="8092440" y="3108960"/>
+            <a:ext cx="777240" cy="777240"/>
+          </a:xfrm>
+          <a:prstGeom prst="rect">
+            <a:avLst/>
+          </a:prstGeom>
+        </p:spPr>
+      </p:pic>
     </p:spTree>
   </p:cSld>
   <p:clrMapOvr>
@@ -20166,9 +20535,7 @@
             <a:ext cx="8138160" cy="868680"/>
           </a:xfrm>
           <a:prstGeom prst="roundRect">
-            <a:avLst>
-              <a:gd name="adj" fmla="val 20000"/>
-            </a:avLst>
+            <a:avLst/>
           </a:prstGeom>
           <a:solidFill>
             <a:srgbClr val="FFECF5"/>
@@ -20213,9 +20580,7 @@
             <a:ext cx="640080" cy="640080"/>
           </a:xfrm>
           <a:prstGeom prst="roundRect">
-            <a:avLst>
-              <a:gd name="adj" fmla="val 20000"/>
-            </a:avLst>
+            <a:avLst/>
           </a:prstGeom>
           <a:solidFill>
             <a:srgbClr val="FF3999"/>
@@ -20328,9 +20693,7 @@
             <a:ext cx="8138160" cy="868680"/>
           </a:xfrm>
           <a:prstGeom prst="roundRect">
-            <a:avLst>
-              <a:gd name="adj" fmla="val 20000"/>
-            </a:avLst>
+            <a:avLst/>
           </a:prstGeom>
           <a:solidFill>
             <a:srgbClr val="FFECF5"/>
@@ -20375,9 +20738,7 @@
             <a:ext cx="640080" cy="640080"/>
           </a:xfrm>
           <a:prstGeom prst="roundRect">
-            <a:avLst>
-              <a:gd name="adj" fmla="val 20000"/>
-            </a:avLst>
+            <a:avLst/>
           </a:prstGeom>
           <a:solidFill>
             <a:srgbClr val="FF3999"/>
@@ -20490,9 +20851,7 @@
             <a:ext cx="8138160" cy="868680"/>
           </a:xfrm>
           <a:prstGeom prst="roundRect">
-            <a:avLst>
-              <a:gd name="adj" fmla="val 20000"/>
-            </a:avLst>
+            <a:avLst/>
           </a:prstGeom>
           <a:solidFill>
             <a:srgbClr val="FFECF5"/>
@@ -20537,9 +20896,7 @@
             <a:ext cx="640080" cy="640080"/>
           </a:xfrm>
           <a:prstGeom prst="roundRect">
-            <a:avLst>
-              <a:gd name="adj" fmla="val 20000"/>
-            </a:avLst>
+            <a:avLst/>
           </a:prstGeom>
           <a:solidFill>
             <a:srgbClr val="FF3999"/>
@@ -20652,9 +21009,7 @@
             <a:ext cx="8503920" cy="685800"/>
           </a:xfrm>
           <a:prstGeom prst="roundRect">
-            <a:avLst>
-              <a:gd name="adj" fmla="val 20000"/>
-            </a:avLst>
+            <a:avLst/>
           </a:prstGeom>
           <a:solidFill>
             <a:srgbClr val="FFECF5"/>
@@ -20795,9 +21150,7 @@
             <a:ext cx="5669280" cy="2560320"/>
           </a:xfrm>
           <a:prstGeom prst="roundRect">
-            <a:avLst>
-              <a:gd name="adj" fmla="val 20000"/>
-            </a:avLst>
+            <a:avLst/>
           </a:prstGeom>
           <a:solidFill>
             <a:srgbClr val="FFFFFF"/>
@@ -20900,6 +21253,30 @@
           </a:p>
         </p:txBody>
       </p:sp>
+      <p:pic>
+        <p:nvPicPr>
+          <p:cNvPr id="6" name="Picture 5" descr="image.png"/>
+          <p:cNvPicPr>
+            <a:picLocks noChangeAspect="1"/>
+          </p:cNvPicPr>
+          <p:nvPr/>
+        </p:nvPicPr>
+        <p:blipFill>
+          <a:blip r:embed="rId2"/>
+          <a:stretch>
+            <a:fillRect/>
+          </a:stretch>
+        </p:blipFill>
+        <p:spPr>
+          <a:xfrm>
+            <a:off x="7772400" y="3291840"/>
+            <a:ext cx="1097280" cy="1097280"/>
+          </a:xfrm>
+          <a:prstGeom prst="rect">
+            <a:avLst/>
+          </a:prstGeom>
+        </p:spPr>
+      </p:pic>
     </p:spTree>
   </p:cSld>
   <p:clrMapOvr>
@@ -22994,9 +23371,7 @@
             <a:ext cx="2743200" cy="3977639"/>
           </a:xfrm>
           <a:prstGeom prst="roundRect">
-            <a:avLst>
-              <a:gd name="adj" fmla="val 20000"/>
-            </a:avLst>
+            <a:avLst/>
           </a:prstGeom>
           <a:solidFill>
             <a:srgbClr val="FFFFFF"/>
@@ -23029,9 +23404,33 @@
           </a:p>
         </p:txBody>
       </p:sp>
-      <p:sp>
-        <p:nvSpPr>
-          <p:cNvPr id="51" name="Rounded Rectangle 50"/>
+      <p:pic>
+        <p:nvPicPr>
+          <p:cNvPr id="51" name="Picture 50" descr="image.png"/>
+          <p:cNvPicPr>
+            <a:picLocks noChangeAspect="1"/>
+          </p:cNvPicPr>
+          <p:nvPr/>
+        </p:nvPicPr>
+        <p:blipFill>
+          <a:blip r:embed="rId2"/>
+          <a:stretch>
+            <a:fillRect/>
+          </a:stretch>
+        </p:blipFill>
+        <p:spPr>
+          <a:xfrm>
+            <a:off x="1005840" y="1097280"/>
+            <a:ext cx="1188720" cy="1188720"/>
+          </a:xfrm>
+          <a:prstGeom prst="rect">
+            <a:avLst/>
+          </a:prstGeom>
+        </p:spPr>
+      </p:pic>
+      <p:sp>
+        <p:nvSpPr>
+          <p:cNvPr id="52" name="Rounded Rectangle 51"/>
           <p:cNvSpPr/>
           <p:nvPr/>
         </p:nvSpPr>
@@ -23041,9 +23440,7 @@
             <a:ext cx="640080" cy="640080"/>
           </a:xfrm>
           <a:prstGeom prst="roundRect">
-            <a:avLst>
-              <a:gd name="adj" fmla="val 20000"/>
-            </a:avLst>
+            <a:avLst/>
           </a:prstGeom>
           <a:solidFill>
             <a:srgbClr val="FF3999"/>
@@ -23076,7 +23473,7 @@
       </p:sp>
       <p:sp>
         <p:nvSpPr>
-          <p:cNvPr id="52" name="TextBox 51"/>
+          <p:cNvPr id="53" name="TextBox 52"/>
           <p:cNvSpPr txBox="1"/>
           <p:nvPr/>
         </p:nvSpPr>
@@ -23111,7 +23508,7 @@
       </p:sp>
       <p:sp>
         <p:nvSpPr>
-          <p:cNvPr id="53" name="TextBox 52"/>
+          <p:cNvPr id="54" name="TextBox 53"/>
           <p:cNvSpPr txBox="1"/>
           <p:nvPr/>
         </p:nvSpPr>
@@ -23146,7 +23543,7 @@
       </p:sp>
       <p:sp>
         <p:nvSpPr>
-          <p:cNvPr id="54" name="TextBox 53"/>
+          <p:cNvPr id="55" name="TextBox 54"/>
           <p:cNvSpPr txBox="1"/>
           <p:nvPr/>
         </p:nvSpPr>
@@ -23181,7 +23578,7 @@
       </p:sp>
       <p:sp>
         <p:nvSpPr>
-          <p:cNvPr id="55" name="Rounded Rectangle 54"/>
+          <p:cNvPr id="56" name="Rounded Rectangle 55"/>
           <p:cNvSpPr/>
           <p:nvPr/>
         </p:nvSpPr>
@@ -23191,9 +23588,7 @@
             <a:ext cx="2743200" cy="3977639"/>
           </a:xfrm>
           <a:prstGeom prst="roundRect">
-            <a:avLst>
-              <a:gd name="adj" fmla="val 20000"/>
-            </a:avLst>
+            <a:avLst/>
           </a:prstGeom>
           <a:solidFill>
             <a:srgbClr val="FFFFFF"/>
@@ -23226,9 +23621,33 @@
           </a:p>
         </p:txBody>
       </p:sp>
-      <p:sp>
-        <p:nvSpPr>
-          <p:cNvPr id="56" name="Rounded Rectangle 55"/>
+      <p:pic>
+        <p:nvPicPr>
+          <p:cNvPr id="57" name="Picture 56" descr="image.png"/>
+          <p:cNvPicPr>
+            <a:picLocks noChangeAspect="1"/>
+          </p:cNvPicPr>
+          <p:nvPr/>
+        </p:nvPicPr>
+        <p:blipFill>
+          <a:blip r:embed="rId3"/>
+          <a:stretch>
+            <a:fillRect/>
+          </a:stretch>
+        </p:blipFill>
+        <p:spPr>
+          <a:xfrm>
+            <a:off x="3977639" y="1097280"/>
+            <a:ext cx="1188720" cy="1188720"/>
+          </a:xfrm>
+          <a:prstGeom prst="rect">
+            <a:avLst/>
+          </a:prstGeom>
+        </p:spPr>
+      </p:pic>
+      <p:sp>
+        <p:nvSpPr>
+          <p:cNvPr id="58" name="Rounded Rectangle 57"/>
           <p:cNvSpPr/>
           <p:nvPr/>
         </p:nvSpPr>
@@ -23238,9 +23657,7 @@
             <a:ext cx="640080" cy="640080"/>
           </a:xfrm>
           <a:prstGeom prst="roundRect">
-            <a:avLst>
-              <a:gd name="adj" fmla="val 20000"/>
-            </a:avLst>
+            <a:avLst/>
           </a:prstGeom>
           <a:solidFill>
             <a:srgbClr val="FF3999"/>
@@ -23273,7 +23690,7 @@
       </p:sp>
       <p:sp>
         <p:nvSpPr>
-          <p:cNvPr id="57" name="TextBox 56"/>
+          <p:cNvPr id="59" name="TextBox 58"/>
           <p:cNvSpPr txBox="1"/>
           <p:nvPr/>
         </p:nvSpPr>
@@ -23308,7 +23725,7 @@
       </p:sp>
       <p:sp>
         <p:nvSpPr>
-          <p:cNvPr id="58" name="TextBox 57"/>
+          <p:cNvPr id="60" name="TextBox 59"/>
           <p:cNvSpPr txBox="1"/>
           <p:nvPr/>
         </p:nvSpPr>
@@ -23343,7 +23760,7 @@
       </p:sp>
       <p:sp>
         <p:nvSpPr>
-          <p:cNvPr id="59" name="TextBox 58"/>
+          <p:cNvPr id="61" name="TextBox 60"/>
           <p:cNvSpPr txBox="1"/>
           <p:nvPr/>
         </p:nvSpPr>
@@ -23378,7 +23795,7 @@
       </p:sp>
       <p:sp>
         <p:nvSpPr>
-          <p:cNvPr id="60" name="Rounded Rectangle 59"/>
+          <p:cNvPr id="62" name="Rounded Rectangle 61"/>
           <p:cNvSpPr/>
           <p:nvPr/>
         </p:nvSpPr>
@@ -23388,9 +23805,7 @@
             <a:ext cx="2743200" cy="3977639"/>
           </a:xfrm>
           <a:prstGeom prst="roundRect">
-            <a:avLst>
-              <a:gd name="adj" fmla="val 20000"/>
-            </a:avLst>
+            <a:avLst/>
           </a:prstGeom>
           <a:solidFill>
             <a:srgbClr val="FFFFFF"/>
@@ -23423,9 +23838,33 @@
           </a:p>
         </p:txBody>
       </p:sp>
-      <p:sp>
-        <p:nvSpPr>
-          <p:cNvPr id="61" name="Rounded Rectangle 60"/>
+      <p:pic>
+        <p:nvPicPr>
+          <p:cNvPr id="63" name="Picture 62" descr="image.png"/>
+          <p:cNvPicPr>
+            <a:picLocks noChangeAspect="1"/>
+          </p:cNvPicPr>
+          <p:nvPr/>
+        </p:nvPicPr>
+        <p:blipFill>
+          <a:blip r:embed="rId4"/>
+          <a:stretch>
+            <a:fillRect/>
+          </a:stretch>
+        </p:blipFill>
+        <p:spPr>
+          <a:xfrm>
+            <a:off x="6949440" y="1097280"/>
+            <a:ext cx="1188720" cy="1188720"/>
+          </a:xfrm>
+          <a:prstGeom prst="rect">
+            <a:avLst/>
+          </a:prstGeom>
+        </p:spPr>
+      </p:pic>
+      <p:sp>
+        <p:nvSpPr>
+          <p:cNvPr id="64" name="Rounded Rectangle 63"/>
           <p:cNvSpPr/>
           <p:nvPr/>
         </p:nvSpPr>
@@ -23435,9 +23874,7 @@
             <a:ext cx="640080" cy="640080"/>
           </a:xfrm>
           <a:prstGeom prst="roundRect">
-            <a:avLst>
-              <a:gd name="adj" fmla="val 20000"/>
-            </a:avLst>
+            <a:avLst/>
           </a:prstGeom>
           <a:solidFill>
             <a:srgbClr val="FF3999"/>
@@ -23470,7 +23907,7 @@
       </p:sp>
       <p:sp>
         <p:nvSpPr>
-          <p:cNvPr id="62" name="TextBox 61"/>
+          <p:cNvPr id="65" name="TextBox 64"/>
           <p:cNvSpPr txBox="1"/>
           <p:nvPr/>
         </p:nvSpPr>
@@ -23505,7 +23942,7 @@
       </p:sp>
       <p:sp>
         <p:nvSpPr>
-          <p:cNvPr id="63" name="TextBox 62"/>
+          <p:cNvPr id="66" name="TextBox 65"/>
           <p:cNvSpPr txBox="1"/>
           <p:nvPr/>
         </p:nvSpPr>
@@ -23540,7 +23977,7 @@
       </p:sp>
       <p:sp>
         <p:nvSpPr>
-          <p:cNvPr id="64" name="TextBox 63"/>
+          <p:cNvPr id="67" name="TextBox 66"/>
           <p:cNvSpPr txBox="1"/>
           <p:nvPr/>
         </p:nvSpPr>
@@ -25667,9 +26104,7 @@
             <a:ext cx="8595360" cy="868680"/>
           </a:xfrm>
           <a:prstGeom prst="roundRect">
-            <a:avLst>
-              <a:gd name="adj" fmla="val 20000"/>
-            </a:avLst>
+            <a:avLst/>
           </a:prstGeom>
           <a:solidFill>
             <a:srgbClr val="FFFFFF"/>
@@ -25753,9 +26188,7 @@
             <a:ext cx="8595360" cy="1554480"/>
           </a:xfrm>
           <a:prstGeom prst="roundRect">
-            <a:avLst>
-              <a:gd name="adj" fmla="val 20000"/>
-            </a:avLst>
+            <a:avLst/>
           </a:prstGeom>
           <a:solidFill>
             <a:srgbClr val="FFFFFF"/>
@@ -25909,7 +26342,7 @@
                 </a:solidFill>
                 <a:latin typeface="Hiragino Kaku Gothic ProN"/>
               </a:rPr>
-              <a:t>テレビ画面・アニメキャラグッズ・自宅のブランドロゴ・着用物のロゴ（小物・バッグ・靴等）</a:t>
+              <a:t>テレビ画面・アニメキャラグッズ・自宅のブランドロゴ・着用物のロゴ（バッグ・靴等）</a:t>
             </a:r>
           </a:p>
           <a:p>
@@ -25934,7 +26367,7 @@
                 </a:solidFill>
                 <a:latin typeface="Hiragino Kaku Gothic ProN"/>
               </a:rPr>
-              <a:t>許可なし他人の顔の写り込み・東京タワー等場所を特定できるものの写り込み</a:t>
+              <a:t>許可なし他人の顔・東京タワー等場所を特定できるものの写り込み</a:t>
             </a:r>
           </a:p>
           <a:p>
@@ -25961,9 +26394,33 @@
           </a:p>
         </p:txBody>
       </p:sp>
-      <p:sp>
-        <p:nvSpPr>
-          <p:cNvPr id="56" name="Rounded Rectangle 55"/>
+      <p:pic>
+        <p:nvPicPr>
+          <p:cNvPr id="56" name="Picture 55" descr="image.png"/>
+          <p:cNvPicPr>
+            <a:picLocks noChangeAspect="1"/>
+          </p:cNvPicPr>
+          <p:nvPr/>
+        </p:nvPicPr>
+        <p:blipFill>
+          <a:blip r:embed="rId2"/>
+          <a:stretch>
+            <a:fillRect/>
+          </a:stretch>
+        </p:blipFill>
+        <p:spPr>
+          <a:xfrm>
+            <a:off x="8138160" y="1920240"/>
+            <a:ext cx="777240" cy="777240"/>
+          </a:xfrm>
+          <a:prstGeom prst="rect">
+            <a:avLst/>
+          </a:prstGeom>
+        </p:spPr>
+      </p:pic>
+      <p:sp>
+        <p:nvSpPr>
+          <p:cNvPr id="57" name="Rounded Rectangle 56"/>
           <p:cNvSpPr/>
           <p:nvPr/>
         </p:nvSpPr>
@@ -25973,9 +26430,7 @@
             <a:ext cx="8595360" cy="658368"/>
           </a:xfrm>
           <a:prstGeom prst="roundRect">
-            <a:avLst>
-              <a:gd name="adj" fmla="val 20000"/>
-            </a:avLst>
+            <a:avLst/>
           </a:prstGeom>
           <a:solidFill>
             <a:srgbClr val="FFECF5"/>
@@ -26010,7 +26465,7 @@
       </p:sp>
       <p:sp>
         <p:nvSpPr>
-          <p:cNvPr id="57" name="TextBox 56"/>
+          <p:cNvPr id="58" name="TextBox 57"/>
           <p:cNvSpPr txBox="1"/>
           <p:nvPr/>
         </p:nvSpPr>
@@ -28137,9 +28592,7 @@
             <a:ext cx="8595360" cy="1005840"/>
           </a:xfrm>
           <a:prstGeom prst="roundRect">
-            <a:avLst>
-              <a:gd name="adj" fmla="val 20000"/>
-            </a:avLst>
+            <a:avLst/>
           </a:prstGeom>
           <a:solidFill>
             <a:srgbClr val="FFFFFF"/>
@@ -28236,9 +28689,33 @@
           </a:p>
         </p:txBody>
       </p:sp>
-      <p:sp>
-        <p:nvSpPr>
-          <p:cNvPr id="52" name="Rounded Rectangle 51"/>
+      <p:pic>
+        <p:nvPicPr>
+          <p:cNvPr id="52" name="Picture 51" descr="image.png"/>
+          <p:cNvPicPr>
+            <a:picLocks noChangeAspect="1"/>
+          </p:cNvPicPr>
+          <p:nvPr/>
+        </p:nvPicPr>
+        <p:blipFill>
+          <a:blip r:embed="rId2"/>
+          <a:stretch>
+            <a:fillRect/>
+          </a:stretch>
+        </p:blipFill>
+        <p:spPr>
+          <a:xfrm>
+            <a:off x="8138160" y="868680"/>
+            <a:ext cx="777240" cy="777240"/>
+          </a:xfrm>
+          <a:prstGeom prst="rect">
+            <a:avLst/>
+          </a:prstGeom>
+        </p:spPr>
+      </p:pic>
+      <p:sp>
+        <p:nvSpPr>
+          <p:cNvPr id="53" name="Rounded Rectangle 52"/>
           <p:cNvSpPr/>
           <p:nvPr/>
         </p:nvSpPr>
@@ -28248,9 +28725,7 @@
             <a:ext cx="4114800" cy="2194560"/>
           </a:xfrm>
           <a:prstGeom prst="roundRect">
-            <a:avLst>
-              <a:gd name="adj" fmla="val 20000"/>
-            </a:avLst>
+            <a:avLst/>
           </a:prstGeom>
           <a:solidFill>
             <a:srgbClr val="FFFFFF"/>
@@ -28285,7 +28760,7 @@
       </p:sp>
       <p:sp>
         <p:nvSpPr>
-          <p:cNvPr id="53" name="Rectangle 52"/>
+          <p:cNvPr id="54" name="Rectangle 53"/>
           <p:cNvSpPr/>
           <p:nvPr/>
         </p:nvSpPr>
@@ -28328,7 +28803,7 @@
       </p:sp>
       <p:sp>
         <p:nvSpPr>
-          <p:cNvPr id="54" name="TextBox 53"/>
+          <p:cNvPr id="55" name="TextBox 54"/>
           <p:cNvSpPr txBox="1"/>
           <p:nvPr/>
         </p:nvSpPr>
@@ -28363,7 +28838,7 @@
       </p:sp>
       <p:sp>
         <p:nvSpPr>
-          <p:cNvPr id="55" name="TextBox 54"/>
+          <p:cNvPr id="56" name="TextBox 55"/>
           <p:cNvSpPr txBox="1"/>
           <p:nvPr/>
         </p:nvSpPr>
@@ -28436,7 +28911,7 @@
       </p:sp>
       <p:sp>
         <p:nvSpPr>
-          <p:cNvPr id="56" name="Rounded Rectangle 55"/>
+          <p:cNvPr id="57" name="Rounded Rectangle 56"/>
           <p:cNvSpPr/>
           <p:nvPr/>
         </p:nvSpPr>
@@ -28446,9 +28921,7 @@
             <a:ext cx="4206240" cy="2194560"/>
           </a:xfrm>
           <a:prstGeom prst="roundRect">
-            <a:avLst>
-              <a:gd name="adj" fmla="val 20000"/>
-            </a:avLst>
+            <a:avLst/>
           </a:prstGeom>
           <a:solidFill>
             <a:srgbClr val="FFFFFF"/>
@@ -28483,7 +28956,7 @@
       </p:sp>
       <p:sp>
         <p:nvSpPr>
-          <p:cNvPr id="57" name="Rectangle 56"/>
+          <p:cNvPr id="58" name="Rectangle 57"/>
           <p:cNvSpPr/>
           <p:nvPr/>
         </p:nvSpPr>
@@ -28526,7 +28999,7 @@
       </p:sp>
       <p:sp>
         <p:nvSpPr>
-          <p:cNvPr id="58" name="TextBox 57"/>
+          <p:cNvPr id="59" name="TextBox 58"/>
           <p:cNvSpPr txBox="1"/>
           <p:nvPr/>
         </p:nvSpPr>
@@ -28561,7 +29034,7 @@
       </p:sp>
       <p:sp>
         <p:nvSpPr>
-          <p:cNvPr id="59" name="TextBox 58"/>
+          <p:cNvPr id="60" name="TextBox 59"/>
           <p:cNvSpPr txBox="1"/>
           <p:nvPr/>
         </p:nvSpPr>
@@ -28645,6 +29118,30 @@
           </a:p>
         </p:txBody>
       </p:sp>
+      <p:pic>
+        <p:nvPicPr>
+          <p:cNvPr id="61" name="Picture 60" descr="image.png"/>
+          <p:cNvPicPr>
+            <a:picLocks noChangeAspect="1"/>
+          </p:cNvPicPr>
+          <p:nvPr/>
+        </p:nvPicPr>
+        <p:blipFill>
+          <a:blip r:embed="rId3"/>
+          <a:stretch>
+            <a:fillRect/>
+          </a:stretch>
+        </p:blipFill>
+        <p:spPr>
+          <a:xfrm>
+            <a:off x="8092440" y="3200400"/>
+            <a:ext cx="777240" cy="777240"/>
+          </a:xfrm>
+          <a:prstGeom prst="rect">
+            <a:avLst/>
+          </a:prstGeom>
+        </p:spPr>
+      </p:pic>
     </p:spTree>
   </p:cSld>
   <p:clrMapOvr>
@@ -28718,9 +29215,7 @@
             <a:ext cx="5669280" cy="2560320"/>
           </a:xfrm>
           <a:prstGeom prst="roundRect">
-            <a:avLst>
-              <a:gd name="adj" fmla="val 20000"/>
-            </a:avLst>
+            <a:avLst/>
           </a:prstGeom>
           <a:solidFill>
             <a:srgbClr val="FFFFFF"/>
@@ -28823,6 +29318,30 @@
           </a:p>
         </p:txBody>
       </p:sp>
+      <p:pic>
+        <p:nvPicPr>
+          <p:cNvPr id="6" name="Picture 5" descr="image.png"/>
+          <p:cNvPicPr>
+            <a:picLocks noChangeAspect="1"/>
+          </p:cNvPicPr>
+          <p:nvPr/>
+        </p:nvPicPr>
+        <p:blipFill>
+          <a:blip r:embed="rId2"/>
+          <a:stretch>
+            <a:fillRect/>
+          </a:stretch>
+        </p:blipFill>
+        <p:spPr>
+          <a:xfrm>
+            <a:off x="7772400" y="3291840"/>
+            <a:ext cx="1097280" cy="1097280"/>
+          </a:xfrm>
+          <a:prstGeom prst="rect">
+            <a:avLst/>
+          </a:prstGeom>
+        </p:spPr>
+      </p:pic>
     </p:spTree>
   </p:cSld>
   <p:clrMapOvr>
@@ -30917,9 +31436,7 @@
             <a:ext cx="8595360" cy="1005840"/>
           </a:xfrm>
           <a:prstGeom prst="roundRect">
-            <a:avLst>
-              <a:gd name="adj" fmla="val 20000"/>
-            </a:avLst>
+            <a:avLst/>
           </a:prstGeom>
           <a:solidFill>
             <a:srgbClr val="FFFFFF"/>
@@ -31013,9 +31530,33 @@
           </a:p>
         </p:txBody>
       </p:sp>
-      <p:sp>
-        <p:nvSpPr>
-          <p:cNvPr id="52" name="Rounded Rectangle 51"/>
+      <p:pic>
+        <p:nvPicPr>
+          <p:cNvPr id="52" name="Picture 51" descr="image.png"/>
+          <p:cNvPicPr>
+            <a:picLocks noChangeAspect="1"/>
+          </p:cNvPicPr>
+          <p:nvPr/>
+        </p:nvPicPr>
+        <p:blipFill>
+          <a:blip r:embed="rId2"/>
+          <a:stretch>
+            <a:fillRect/>
+          </a:stretch>
+        </p:blipFill>
+        <p:spPr>
+          <a:xfrm>
+            <a:off x="8138160" y="868680"/>
+            <a:ext cx="777240" cy="777240"/>
+          </a:xfrm>
+          <a:prstGeom prst="rect">
+            <a:avLst/>
+          </a:prstGeom>
+        </p:spPr>
+      </p:pic>
+      <p:sp>
+        <p:nvSpPr>
+          <p:cNvPr id="53" name="Rounded Rectangle 52"/>
           <p:cNvSpPr/>
           <p:nvPr/>
         </p:nvSpPr>
@@ -31025,9 +31566,7 @@
             <a:ext cx="8595360" cy="1234440"/>
           </a:xfrm>
           <a:prstGeom prst="roundRect">
-            <a:avLst>
-              <a:gd name="adj" fmla="val 20000"/>
-            </a:avLst>
+            <a:avLst/>
           </a:prstGeom>
           <a:solidFill>
             <a:srgbClr val="FFFFFF"/>
@@ -31062,7 +31601,7 @@
       </p:sp>
       <p:sp>
         <p:nvSpPr>
-          <p:cNvPr id="53" name="Rectangle 52"/>
+          <p:cNvPr id="54" name="Rectangle 53"/>
           <p:cNvSpPr/>
           <p:nvPr/>
         </p:nvSpPr>
@@ -31105,7 +31644,7 @@
       </p:sp>
       <p:sp>
         <p:nvSpPr>
-          <p:cNvPr id="54" name="TextBox 53"/>
+          <p:cNvPr id="55" name="TextBox 54"/>
           <p:cNvSpPr txBox="1"/>
           <p:nvPr/>
         </p:nvSpPr>
@@ -31140,7 +31679,7 @@
       </p:sp>
       <p:sp>
         <p:nvSpPr>
-          <p:cNvPr id="55" name="TextBox 54"/>
+          <p:cNvPr id="56" name="TextBox 55"/>
           <p:cNvSpPr txBox="1"/>
           <p:nvPr/>
         </p:nvSpPr>
@@ -31213,7 +31752,7 @@
       </p:sp>
       <p:sp>
         <p:nvSpPr>
-          <p:cNvPr id="56" name="Rounded Rectangle 55"/>
+          <p:cNvPr id="57" name="Rounded Rectangle 56"/>
           <p:cNvSpPr/>
           <p:nvPr/>
         </p:nvSpPr>
@@ -31223,9 +31762,7 @@
             <a:ext cx="8595360" cy="658368"/>
           </a:xfrm>
           <a:prstGeom prst="roundRect">
-            <a:avLst>
-              <a:gd name="adj" fmla="val 20000"/>
-            </a:avLst>
+            <a:avLst/>
           </a:prstGeom>
           <a:solidFill>
             <a:srgbClr val="FFECF5"/>
@@ -31260,7 +31797,7 @@
       </p:sp>
       <p:sp>
         <p:nvSpPr>
-          <p:cNvPr id="57" name="TextBox 56"/>
+          <p:cNvPr id="58" name="TextBox 57"/>
           <p:cNvSpPr txBox="1"/>
           <p:nvPr/>
         </p:nvSpPr>
@@ -33387,9 +33924,7 @@
             <a:ext cx="8595360" cy="914400"/>
           </a:xfrm>
           <a:prstGeom prst="roundRect">
-            <a:avLst>
-              <a:gd name="adj" fmla="val 20000"/>
-            </a:avLst>
+            <a:avLst/>
           </a:prstGeom>
           <a:solidFill>
             <a:srgbClr val="FFFFFF"/>
@@ -33479,9 +34014,7 @@
             <a:ext cx="8595360" cy="2240280"/>
           </a:xfrm>
           <a:prstGeom prst="roundRect">
-            <a:avLst>
-              <a:gd name="adj" fmla="val 20000"/>
-            </a:avLst>
+            <a:avLst/>
           </a:prstGeom>
           <a:solidFill>
             <a:srgbClr val="FFFFFF"/>
@@ -33715,9 +34248,33 @@
           </a:p>
         </p:txBody>
       </p:sp>
-      <p:sp>
-        <p:nvSpPr>
-          <p:cNvPr id="56" name="Rounded Rectangle 55"/>
+      <p:pic>
+        <p:nvPicPr>
+          <p:cNvPr id="56" name="Picture 55" descr="image.png"/>
+          <p:cNvPicPr>
+            <a:picLocks noChangeAspect="1"/>
+          </p:cNvPicPr>
+          <p:nvPr/>
+        </p:nvPicPr>
+        <p:blipFill>
+          <a:blip r:embed="rId2"/>
+          <a:stretch>
+            <a:fillRect/>
+          </a:stretch>
+        </p:blipFill>
+        <p:spPr>
+          <a:xfrm>
+            <a:off x="8138160" y="1965960"/>
+            <a:ext cx="777240" cy="777240"/>
+          </a:xfrm>
+          <a:prstGeom prst="rect">
+            <a:avLst/>
+          </a:prstGeom>
+        </p:spPr>
+      </p:pic>
+      <p:sp>
+        <p:nvSpPr>
+          <p:cNvPr id="57" name="Rounded Rectangle 56"/>
           <p:cNvSpPr/>
           <p:nvPr/>
         </p:nvSpPr>
@@ -33727,9 +34284,7 @@
             <a:ext cx="8595360" cy="594360"/>
           </a:xfrm>
           <a:prstGeom prst="roundRect">
-            <a:avLst>
-              <a:gd name="adj" fmla="val 20000"/>
-            </a:avLst>
+            <a:avLst/>
           </a:prstGeom>
           <a:solidFill>
             <a:srgbClr val="FFECF5"/>
@@ -33764,7 +34319,7 @@
       </p:sp>
       <p:sp>
         <p:nvSpPr>
-          <p:cNvPr id="57" name="TextBox 56"/>
+          <p:cNvPr id="58" name="TextBox 57"/>
           <p:cNvSpPr txBox="1"/>
           <p:nvPr/>
         </p:nvSpPr>
@@ -33792,7 +34347,7 @@
                 </a:solidFill>
                 <a:latin typeface="Hiragino Kaku Gothic ProN"/>
               </a:rPr>
-              <a:t>PRの目的は「商品を魅力的かつ安全に伝えること」。クレームリスクのある表現は全て修正対象と考えてください。</a:t>
+              <a:t>PRの目的は「商品を魅力的かつ安全に伝えること」。クレームリスクのある表現は全て修正対象です。</a:t>
             </a:r>
           </a:p>
         </p:txBody>
@@ -35891,9 +36446,7 @@
             <a:ext cx="8138160" cy="868680"/>
           </a:xfrm>
           <a:prstGeom prst="roundRect">
-            <a:avLst>
-              <a:gd name="adj" fmla="val 20000"/>
-            </a:avLst>
+            <a:avLst/>
           </a:prstGeom>
           <a:solidFill>
             <a:srgbClr val="FFECF5"/>
@@ -35938,9 +36491,7 @@
             <a:ext cx="640080" cy="640080"/>
           </a:xfrm>
           <a:prstGeom prst="roundRect">
-            <a:avLst>
-              <a:gd name="adj" fmla="val 20000"/>
-            </a:avLst>
+            <a:avLst/>
           </a:prstGeom>
           <a:solidFill>
             <a:srgbClr val="FF3999"/>
@@ -36053,9 +36604,7 @@
             <a:ext cx="8138160" cy="868680"/>
           </a:xfrm>
           <a:prstGeom prst="roundRect">
-            <a:avLst>
-              <a:gd name="adj" fmla="val 20000"/>
-            </a:avLst>
+            <a:avLst/>
           </a:prstGeom>
           <a:solidFill>
             <a:srgbClr val="FFECF5"/>
@@ -36100,9 +36649,7 @@
             <a:ext cx="640080" cy="640080"/>
           </a:xfrm>
           <a:prstGeom prst="roundRect">
-            <a:avLst>
-              <a:gd name="adj" fmla="val 20000"/>
-            </a:avLst>
+            <a:avLst/>
           </a:prstGeom>
           <a:solidFill>
             <a:srgbClr val="FF3999"/>
@@ -36215,9 +36762,7 @@
             <a:ext cx="8138160" cy="868680"/>
           </a:xfrm>
           <a:prstGeom prst="roundRect">
-            <a:avLst>
-              <a:gd name="adj" fmla="val 20000"/>
-            </a:avLst>
+            <a:avLst/>
           </a:prstGeom>
           <a:solidFill>
             <a:srgbClr val="FFECF5"/>
@@ -36262,9 +36807,7 @@
             <a:ext cx="640080" cy="640080"/>
           </a:xfrm>
           <a:prstGeom prst="roundRect">
-            <a:avLst>
-              <a:gd name="adj" fmla="val 20000"/>
-            </a:avLst>
+            <a:avLst/>
           </a:prstGeom>
           <a:solidFill>
             <a:srgbClr val="FF3999"/>
@@ -36377,9 +36920,7 @@
             <a:ext cx="8503920" cy="685800"/>
           </a:xfrm>
           <a:prstGeom prst="roundRect">
-            <a:avLst>
-              <a:gd name="adj" fmla="val 20000"/>
-            </a:avLst>
+            <a:avLst/>
           </a:prstGeom>
           <a:solidFill>
             <a:srgbClr val="FFECF5"/>
@@ -36520,9 +37061,7 @@
             <a:ext cx="5669280" cy="2560320"/>
           </a:xfrm>
           <a:prstGeom prst="roundRect">
-            <a:avLst>
-              <a:gd name="adj" fmla="val 20000"/>
-            </a:avLst>
+            <a:avLst/>
           </a:prstGeom>
           <a:solidFill>
             <a:srgbClr val="FFFFFF"/>
@@ -36625,6 +37164,30 @@
           </a:p>
         </p:txBody>
       </p:sp>
+      <p:pic>
+        <p:nvPicPr>
+          <p:cNvPr id="6" name="Picture 5" descr="image.png"/>
+          <p:cNvPicPr>
+            <a:picLocks noChangeAspect="1"/>
+          </p:cNvPicPr>
+          <p:nvPr/>
+        </p:nvPicPr>
+        <p:blipFill>
+          <a:blip r:embed="rId2"/>
+          <a:stretch>
+            <a:fillRect/>
+          </a:stretch>
+        </p:blipFill>
+        <p:spPr>
+          <a:xfrm>
+            <a:off x="7772400" y="3291840"/>
+            <a:ext cx="1097280" cy="1097280"/>
+          </a:xfrm>
+          <a:prstGeom prst="rect">
+            <a:avLst/>
+          </a:prstGeom>
+        </p:spPr>
+      </p:pic>
     </p:spTree>
   </p:cSld>
   <p:clrMapOvr>
@@ -38719,9 +39282,7 @@
             <a:ext cx="2743200" cy="3977639"/>
           </a:xfrm>
           <a:prstGeom prst="roundRect">
-            <a:avLst>
-              <a:gd name="adj" fmla="val 20000"/>
-            </a:avLst>
+            <a:avLst/>
           </a:prstGeom>
           <a:solidFill>
             <a:srgbClr val="FFFFFF"/>
@@ -38754,9 +39315,33 @@
           </a:p>
         </p:txBody>
       </p:sp>
-      <p:sp>
-        <p:nvSpPr>
-          <p:cNvPr id="51" name="Rounded Rectangle 50"/>
+      <p:pic>
+        <p:nvPicPr>
+          <p:cNvPr id="51" name="Picture 50" descr="image.png"/>
+          <p:cNvPicPr>
+            <a:picLocks noChangeAspect="1"/>
+          </p:cNvPicPr>
+          <p:nvPr/>
+        </p:nvPicPr>
+        <p:blipFill>
+          <a:blip r:embed="rId2"/>
+          <a:stretch>
+            <a:fillRect/>
+          </a:stretch>
+        </p:blipFill>
+        <p:spPr>
+          <a:xfrm>
+            <a:off x="1005840" y="1097280"/>
+            <a:ext cx="1188720" cy="1188720"/>
+          </a:xfrm>
+          <a:prstGeom prst="rect">
+            <a:avLst/>
+          </a:prstGeom>
+        </p:spPr>
+      </p:pic>
+      <p:sp>
+        <p:nvSpPr>
+          <p:cNvPr id="52" name="Rounded Rectangle 51"/>
           <p:cNvSpPr/>
           <p:nvPr/>
         </p:nvSpPr>
@@ -38766,9 +39351,7 @@
             <a:ext cx="640080" cy="640080"/>
           </a:xfrm>
           <a:prstGeom prst="roundRect">
-            <a:avLst>
-              <a:gd name="adj" fmla="val 20000"/>
-            </a:avLst>
+            <a:avLst/>
           </a:prstGeom>
           <a:solidFill>
             <a:srgbClr val="FF3999"/>
@@ -38801,7 +39384,7 @@
       </p:sp>
       <p:sp>
         <p:nvSpPr>
-          <p:cNvPr id="52" name="TextBox 51"/>
+          <p:cNvPr id="53" name="TextBox 52"/>
           <p:cNvSpPr txBox="1"/>
           <p:nvPr/>
         </p:nvSpPr>
@@ -38836,7 +39419,7 @@
       </p:sp>
       <p:sp>
         <p:nvSpPr>
-          <p:cNvPr id="53" name="TextBox 52"/>
+          <p:cNvPr id="54" name="TextBox 53"/>
           <p:cNvSpPr txBox="1"/>
           <p:nvPr/>
         </p:nvSpPr>
@@ -38871,7 +39454,7 @@
       </p:sp>
       <p:sp>
         <p:nvSpPr>
-          <p:cNvPr id="54" name="TextBox 53"/>
+          <p:cNvPr id="55" name="TextBox 54"/>
           <p:cNvSpPr txBox="1"/>
           <p:nvPr/>
         </p:nvSpPr>
@@ -38906,7 +39489,7 @@
       </p:sp>
       <p:sp>
         <p:nvSpPr>
-          <p:cNvPr id="55" name="Rounded Rectangle 54"/>
+          <p:cNvPr id="56" name="Rounded Rectangle 55"/>
           <p:cNvSpPr/>
           <p:nvPr/>
         </p:nvSpPr>
@@ -38916,9 +39499,7 @@
             <a:ext cx="2743200" cy="3977639"/>
           </a:xfrm>
           <a:prstGeom prst="roundRect">
-            <a:avLst>
-              <a:gd name="adj" fmla="val 20000"/>
-            </a:avLst>
+            <a:avLst/>
           </a:prstGeom>
           <a:solidFill>
             <a:srgbClr val="FFFFFF"/>
@@ -38951,9 +39532,33 @@
           </a:p>
         </p:txBody>
       </p:sp>
-      <p:sp>
-        <p:nvSpPr>
-          <p:cNvPr id="56" name="Rounded Rectangle 55"/>
+      <p:pic>
+        <p:nvPicPr>
+          <p:cNvPr id="57" name="Picture 56" descr="image.png"/>
+          <p:cNvPicPr>
+            <a:picLocks noChangeAspect="1"/>
+          </p:cNvPicPr>
+          <p:nvPr/>
+        </p:nvPicPr>
+        <p:blipFill>
+          <a:blip r:embed="rId3"/>
+          <a:stretch>
+            <a:fillRect/>
+          </a:stretch>
+        </p:blipFill>
+        <p:spPr>
+          <a:xfrm>
+            <a:off x="3977639" y="1097280"/>
+            <a:ext cx="1188720" cy="1188720"/>
+          </a:xfrm>
+          <a:prstGeom prst="rect">
+            <a:avLst/>
+          </a:prstGeom>
+        </p:spPr>
+      </p:pic>
+      <p:sp>
+        <p:nvSpPr>
+          <p:cNvPr id="58" name="Rounded Rectangle 57"/>
           <p:cNvSpPr/>
           <p:nvPr/>
         </p:nvSpPr>
@@ -38963,9 +39568,7 @@
             <a:ext cx="640080" cy="640080"/>
           </a:xfrm>
           <a:prstGeom prst="roundRect">
-            <a:avLst>
-              <a:gd name="adj" fmla="val 20000"/>
-            </a:avLst>
+            <a:avLst/>
           </a:prstGeom>
           <a:solidFill>
             <a:srgbClr val="FF3999"/>
@@ -38998,7 +39601,7 @@
       </p:sp>
       <p:sp>
         <p:nvSpPr>
-          <p:cNvPr id="57" name="TextBox 56"/>
+          <p:cNvPr id="59" name="TextBox 58"/>
           <p:cNvSpPr txBox="1"/>
           <p:nvPr/>
         </p:nvSpPr>
@@ -39033,7 +39636,7 @@
       </p:sp>
       <p:sp>
         <p:nvSpPr>
-          <p:cNvPr id="58" name="TextBox 57"/>
+          <p:cNvPr id="60" name="TextBox 59"/>
           <p:cNvSpPr txBox="1"/>
           <p:nvPr/>
         </p:nvSpPr>
@@ -39068,7 +39671,7 @@
       </p:sp>
       <p:sp>
         <p:nvSpPr>
-          <p:cNvPr id="59" name="TextBox 58"/>
+          <p:cNvPr id="61" name="TextBox 60"/>
           <p:cNvSpPr txBox="1"/>
           <p:nvPr/>
         </p:nvSpPr>
@@ -39103,7 +39706,7 @@
       </p:sp>
       <p:sp>
         <p:nvSpPr>
-          <p:cNvPr id="60" name="Rounded Rectangle 59"/>
+          <p:cNvPr id="62" name="Rounded Rectangle 61"/>
           <p:cNvSpPr/>
           <p:nvPr/>
         </p:nvSpPr>
@@ -39113,9 +39716,7 @@
             <a:ext cx="2743200" cy="3977639"/>
           </a:xfrm>
           <a:prstGeom prst="roundRect">
-            <a:avLst>
-              <a:gd name="adj" fmla="val 20000"/>
-            </a:avLst>
+            <a:avLst/>
           </a:prstGeom>
           <a:solidFill>
             <a:srgbClr val="FFFFFF"/>
@@ -39148,9 +39749,33 @@
           </a:p>
         </p:txBody>
       </p:sp>
-      <p:sp>
-        <p:nvSpPr>
-          <p:cNvPr id="61" name="Rounded Rectangle 60"/>
+      <p:pic>
+        <p:nvPicPr>
+          <p:cNvPr id="63" name="Picture 62" descr="image.png"/>
+          <p:cNvPicPr>
+            <a:picLocks noChangeAspect="1"/>
+          </p:cNvPicPr>
+          <p:nvPr/>
+        </p:nvPicPr>
+        <p:blipFill>
+          <a:blip r:embed="rId4"/>
+          <a:stretch>
+            <a:fillRect/>
+          </a:stretch>
+        </p:blipFill>
+        <p:spPr>
+          <a:xfrm>
+            <a:off x="6949440" y="1097280"/>
+            <a:ext cx="1188720" cy="1188720"/>
+          </a:xfrm>
+          <a:prstGeom prst="rect">
+            <a:avLst/>
+          </a:prstGeom>
+        </p:spPr>
+      </p:pic>
+      <p:sp>
+        <p:nvSpPr>
+          <p:cNvPr id="64" name="Rounded Rectangle 63"/>
           <p:cNvSpPr/>
           <p:nvPr/>
         </p:nvSpPr>
@@ -39160,9 +39785,7 @@
             <a:ext cx="640080" cy="640080"/>
           </a:xfrm>
           <a:prstGeom prst="roundRect">
-            <a:avLst>
-              <a:gd name="adj" fmla="val 20000"/>
-            </a:avLst>
+            <a:avLst/>
           </a:prstGeom>
           <a:solidFill>
             <a:srgbClr val="FF3999"/>
@@ -39195,7 +39818,7 @@
       </p:sp>
       <p:sp>
         <p:nvSpPr>
-          <p:cNvPr id="62" name="TextBox 61"/>
+          <p:cNvPr id="65" name="TextBox 64"/>
           <p:cNvSpPr txBox="1"/>
           <p:nvPr/>
         </p:nvSpPr>
@@ -39230,7 +39853,7 @@
       </p:sp>
       <p:sp>
         <p:nvSpPr>
-          <p:cNvPr id="63" name="TextBox 62"/>
+          <p:cNvPr id="66" name="TextBox 65"/>
           <p:cNvSpPr txBox="1"/>
           <p:nvPr/>
         </p:nvSpPr>
@@ -39265,7 +39888,7 @@
       </p:sp>
       <p:sp>
         <p:nvSpPr>
-          <p:cNvPr id="64" name="TextBox 63"/>
+          <p:cNvPr id="67" name="TextBox 66"/>
           <p:cNvSpPr txBox="1"/>
           <p:nvPr/>
         </p:nvSpPr>
@@ -41392,9 +42015,7 @@
             <a:ext cx="8595360" cy="3246120"/>
           </a:xfrm>
           <a:prstGeom prst="roundRect">
-            <a:avLst>
-              <a:gd name="adj" fmla="val 20000"/>
-            </a:avLst>
+            <a:avLst/>
           </a:prstGeom>
           <a:solidFill>
             <a:srgbClr val="FFFFFF"/>
@@ -41566,6 +42187,30 @@
           </a:p>
         </p:txBody>
       </p:sp>
+      <p:pic>
+        <p:nvPicPr>
+          <p:cNvPr id="52" name="Picture 51" descr="image.png"/>
+          <p:cNvPicPr>
+            <a:picLocks noChangeAspect="1"/>
+          </p:cNvPicPr>
+          <p:nvPr/>
+        </p:nvPicPr>
+        <p:blipFill>
+          <a:blip r:embed="rId2"/>
+          <a:stretch>
+            <a:fillRect/>
+          </a:stretch>
+        </p:blipFill>
+        <p:spPr>
+          <a:xfrm>
+            <a:off x="8138160" y="960120"/>
+            <a:ext cx="822960" cy="822960"/>
+          </a:xfrm>
+          <a:prstGeom prst="rect">
+            <a:avLst/>
+          </a:prstGeom>
+        </p:spPr>
+      </p:pic>
     </p:spTree>
   </p:cSld>
   <p:clrMapOvr>
@@ -43660,9 +44305,7 @@
             <a:ext cx="8595360" cy="1325880"/>
           </a:xfrm>
           <a:prstGeom prst="roundRect">
-            <a:avLst>
-              <a:gd name="adj" fmla="val 20000"/>
-            </a:avLst>
+            <a:avLst/>
           </a:prstGeom>
           <a:solidFill>
             <a:srgbClr val="FFFFFF"/>
@@ -43750,9 +44393,33 @@
           </a:p>
         </p:txBody>
       </p:sp>
-      <p:sp>
-        <p:nvSpPr>
-          <p:cNvPr id="52" name="Rounded Rectangle 51"/>
+      <p:pic>
+        <p:nvPicPr>
+          <p:cNvPr id="52" name="Picture 51" descr="image.png"/>
+          <p:cNvPicPr>
+            <a:picLocks noChangeAspect="1"/>
+          </p:cNvPicPr>
+          <p:nvPr/>
+        </p:nvPicPr>
+        <p:blipFill>
+          <a:blip r:embed="rId2"/>
+          <a:stretch>
+            <a:fillRect/>
+          </a:stretch>
+        </p:blipFill>
+        <p:spPr>
+          <a:xfrm>
+            <a:off x="8138160" y="960120"/>
+            <a:ext cx="822960" cy="822960"/>
+          </a:xfrm>
+          <a:prstGeom prst="rect">
+            <a:avLst/>
+          </a:prstGeom>
+        </p:spPr>
+      </p:pic>
+      <p:sp>
+        <p:nvSpPr>
+          <p:cNvPr id="53" name="Rounded Rectangle 52"/>
           <p:cNvSpPr/>
           <p:nvPr/>
         </p:nvSpPr>
@@ -43762,9 +44429,7 @@
             <a:ext cx="8595360" cy="1645920"/>
           </a:xfrm>
           <a:prstGeom prst="roundRect">
-            <a:avLst>
-              <a:gd name="adj" fmla="val 20000"/>
-            </a:avLst>
+            <a:avLst/>
           </a:prstGeom>
           <a:solidFill>
             <a:srgbClr val="FFFFFF"/>
@@ -43799,7 +44464,7 @@
       </p:sp>
       <p:sp>
         <p:nvSpPr>
-          <p:cNvPr id="53" name="Rectangle 52"/>
+          <p:cNvPr id="54" name="Rectangle 53"/>
           <p:cNvSpPr/>
           <p:nvPr/>
         </p:nvSpPr>
@@ -43842,7 +44507,7 @@
       </p:sp>
       <p:sp>
         <p:nvSpPr>
-          <p:cNvPr id="54" name="TextBox 53"/>
+          <p:cNvPr id="55" name="TextBox 54"/>
           <p:cNvSpPr txBox="1"/>
           <p:nvPr/>
         </p:nvSpPr>
@@ -43877,7 +44542,7 @@
       </p:sp>
       <p:sp>
         <p:nvSpPr>
-          <p:cNvPr id="55" name="TextBox 54"/>
+          <p:cNvPr id="56" name="TextBox 55"/>
           <p:cNvSpPr txBox="1"/>
           <p:nvPr/>
         </p:nvSpPr>
@@ -44000,7 +44665,7 @@
       </p:sp>
       <p:sp>
         <p:nvSpPr>
-          <p:cNvPr id="56" name="Rounded Rectangle 55"/>
+          <p:cNvPr id="57" name="Rounded Rectangle 56"/>
           <p:cNvSpPr/>
           <p:nvPr/>
         </p:nvSpPr>
@@ -44010,9 +44675,7 @@
             <a:ext cx="8595360" cy="621792"/>
           </a:xfrm>
           <a:prstGeom prst="roundRect">
-            <a:avLst>
-              <a:gd name="adj" fmla="val 20000"/>
-            </a:avLst>
+            <a:avLst/>
           </a:prstGeom>
           <a:solidFill>
             <a:srgbClr val="FFECF5"/>
@@ -44047,7 +44710,7 @@
       </p:sp>
       <p:sp>
         <p:nvSpPr>
-          <p:cNvPr id="57" name="TextBox 56"/>
+          <p:cNvPr id="58" name="TextBox 57"/>
           <p:cNvSpPr txBox="1"/>
           <p:nvPr/>
         </p:nvSpPr>
@@ -46197,21 +46860,91 @@
           </a:p>
         </p:txBody>
       </p:sp>
-      <p:sp>
-        <p:nvSpPr>
-          <p:cNvPr id="51" name="Rounded Rectangle 50"/>
-          <p:cNvSpPr/>
-          <p:nvPr/>
-        </p:nvSpPr>
-        <p:spPr>
-          <a:xfrm>
-            <a:off x="502920" y="1261872"/>
-            <a:ext cx="8138160" cy="749808"/>
+      <p:pic>
+        <p:nvPicPr>
+          <p:cNvPr id="51" name="Picture 50" descr="image.png"/>
+          <p:cNvPicPr>
+            <a:picLocks noChangeAspect="1"/>
+          </p:cNvPicPr>
+          <p:nvPr/>
+        </p:nvPicPr>
+        <p:blipFill>
+          <a:blip r:embed="rId2"/>
+          <a:stretch>
+            <a:fillRect/>
+          </a:stretch>
+        </p:blipFill>
+        <p:spPr>
+          <a:xfrm>
+            <a:off x="182880" y="1371600"/>
+            <a:ext cx="1188720" cy="1188720"/>
+          </a:xfrm>
+          <a:prstGeom prst="rect">
+            <a:avLst/>
+          </a:prstGeom>
+        </p:spPr>
+      </p:pic>
+      <p:pic>
+        <p:nvPicPr>
+          <p:cNvPr id="52" name="Picture 51" descr="image.png"/>
+          <p:cNvPicPr>
+            <a:picLocks noChangeAspect="1"/>
+          </p:cNvPicPr>
+          <p:nvPr/>
+        </p:nvPicPr>
+        <p:blipFill>
+          <a:blip r:embed="rId3"/>
+          <a:stretch>
+            <a:fillRect/>
+          </a:stretch>
+        </p:blipFill>
+        <p:spPr>
+          <a:xfrm>
+            <a:off x="4023360" y="1371600"/>
+            <a:ext cx="914400" cy="914400"/>
+          </a:xfrm>
+          <a:prstGeom prst="rect">
+            <a:avLst/>
+          </a:prstGeom>
+        </p:spPr>
+      </p:pic>
+      <p:pic>
+        <p:nvPicPr>
+          <p:cNvPr id="53" name="Picture 52" descr="image.png"/>
+          <p:cNvPicPr>
+            <a:picLocks noChangeAspect="1"/>
+          </p:cNvPicPr>
+          <p:nvPr/>
+        </p:nvPicPr>
+        <p:blipFill>
+          <a:blip r:embed="rId4"/>
+          <a:stretch>
+            <a:fillRect/>
+          </a:stretch>
+        </p:blipFill>
+        <p:spPr>
+          <a:xfrm>
+            <a:off x="7680960" y="1371600"/>
+            <a:ext cx="1097280" cy="1097280"/>
+          </a:xfrm>
+          <a:prstGeom prst="rect">
+            <a:avLst/>
+          </a:prstGeom>
+        </p:spPr>
+      </p:pic>
+      <p:sp>
+        <p:nvSpPr>
+          <p:cNvPr id="54" name="Rounded Rectangle 53"/>
+          <p:cNvSpPr/>
+          <p:nvPr/>
+        </p:nvSpPr>
+        <p:spPr>
+          <a:xfrm>
+            <a:off x="502920" y="2331720"/>
+            <a:ext cx="8138160" cy="566928"/>
           </a:xfrm>
           <a:prstGeom prst="roundRect">
-            <a:avLst>
-              <a:gd name="adj" fmla="val 20000"/>
-            </a:avLst>
+            <a:avLst/>
           </a:prstGeom>
           <a:solidFill>
             <a:srgbClr val="FFECF5"/>
@@ -46246,19 +46979,17 @@
       </p:sp>
       <p:sp>
         <p:nvSpPr>
-          <p:cNvPr id="52" name="Rounded Rectangle 51"/>
-          <p:cNvSpPr/>
-          <p:nvPr/>
-        </p:nvSpPr>
-        <p:spPr>
-          <a:xfrm>
-            <a:off x="548640" y="1316736"/>
-            <a:ext cx="640080" cy="640080"/>
+          <p:cNvPr id="55" name="Rounded Rectangle 54"/>
+          <p:cNvSpPr/>
+          <p:nvPr/>
+        </p:nvSpPr>
+        <p:spPr>
+          <a:xfrm>
+            <a:off x="548640" y="2386584"/>
+            <a:ext cx="457200" cy="457200"/>
           </a:xfrm>
           <a:prstGeom prst="roundRect">
-            <a:avLst>
-              <a:gd name="adj" fmla="val 20000"/>
-            </a:avLst>
+            <a:avLst/>
           </a:prstGeom>
           <a:solidFill>
             <a:srgbClr val="FF3999"/>
@@ -46291,14 +47022,14 @@
       </p:sp>
       <p:sp>
         <p:nvSpPr>
-          <p:cNvPr id="53" name="TextBox 52"/>
+          <p:cNvPr id="56" name="TextBox 55"/>
           <p:cNvSpPr txBox="1"/>
           <p:nvPr/>
         </p:nvSpPr>
         <p:spPr>
           <a:xfrm>
-            <a:off x="548640" y="1348739"/>
-            <a:ext cx="640080" cy="576072"/>
+            <a:off x="548640" y="2409444"/>
+            <a:ext cx="457200" cy="411480"/>
           </a:xfrm>
           <a:prstGeom prst="rect">
             <a:avLst/>
@@ -46313,7 +47044,7 @@
           <a:p>
             <a:pPr algn="ctr"/>
             <a:r>
-              <a:rPr sz="1800" b="1" i="0">
+              <a:rPr sz="1400" b="1" i="0">
                 <a:solidFill>
                   <a:srgbClr val="FFFFFF"/>
                 </a:solidFill>
@@ -46326,14 +47057,14 @@
       </p:sp>
       <p:sp>
         <p:nvSpPr>
-          <p:cNvPr id="54" name="TextBox 53"/>
+          <p:cNvPr id="57" name="TextBox 56"/>
           <p:cNvSpPr txBox="1"/>
           <p:nvPr/>
         </p:nvSpPr>
         <p:spPr>
           <a:xfrm>
-            <a:off x="1325880" y="1389888"/>
-            <a:ext cx="7178040" cy="530352"/>
+            <a:off x="1143000" y="2423160"/>
+            <a:ext cx="7406640" cy="411480"/>
           </a:xfrm>
           <a:prstGeom prst="rect">
             <a:avLst/>
@@ -46348,7 +47079,7 @@
           <a:p>
             <a:pPr algn="l"/>
             <a:r>
-              <a:rPr sz="1300" b="0" i="0">
+              <a:rPr sz="1200" b="0" i="0">
                 <a:solidFill>
                   <a:srgbClr val="1A1A1A"/>
                 </a:solidFill>
@@ -46361,19 +47092,17 @@
       </p:sp>
       <p:sp>
         <p:nvSpPr>
-          <p:cNvPr id="55" name="Rounded Rectangle 54"/>
-          <p:cNvSpPr/>
-          <p:nvPr/>
-        </p:nvSpPr>
-        <p:spPr>
-          <a:xfrm>
-            <a:off x="502920" y="2212848"/>
-            <a:ext cx="8138160" cy="749808"/>
+          <p:cNvPr id="58" name="Rounded Rectangle 57"/>
+          <p:cNvSpPr/>
+          <p:nvPr/>
+        </p:nvSpPr>
+        <p:spPr>
+          <a:xfrm>
+            <a:off x="502920" y="3017520"/>
+            <a:ext cx="8138160" cy="566928"/>
           </a:xfrm>
           <a:prstGeom prst="roundRect">
-            <a:avLst>
-              <a:gd name="adj" fmla="val 20000"/>
-            </a:avLst>
+            <a:avLst/>
           </a:prstGeom>
           <a:solidFill>
             <a:srgbClr val="FFECF5"/>
@@ -46408,19 +47137,17 @@
       </p:sp>
       <p:sp>
         <p:nvSpPr>
-          <p:cNvPr id="56" name="Rounded Rectangle 55"/>
-          <p:cNvSpPr/>
-          <p:nvPr/>
-        </p:nvSpPr>
-        <p:spPr>
-          <a:xfrm>
-            <a:off x="548640" y="2267712"/>
-            <a:ext cx="640080" cy="640080"/>
+          <p:cNvPr id="59" name="Rounded Rectangle 58"/>
+          <p:cNvSpPr/>
+          <p:nvPr/>
+        </p:nvSpPr>
+        <p:spPr>
+          <a:xfrm>
+            <a:off x="548640" y="3072384"/>
+            <a:ext cx="457200" cy="457200"/>
           </a:xfrm>
           <a:prstGeom prst="roundRect">
-            <a:avLst>
-              <a:gd name="adj" fmla="val 20000"/>
-            </a:avLst>
+            <a:avLst/>
           </a:prstGeom>
           <a:solidFill>
             <a:srgbClr val="FF3999"/>
@@ -46453,14 +47180,14 @@
       </p:sp>
       <p:sp>
         <p:nvSpPr>
-          <p:cNvPr id="57" name="TextBox 56"/>
+          <p:cNvPr id="60" name="TextBox 59"/>
           <p:cNvSpPr txBox="1"/>
           <p:nvPr/>
         </p:nvSpPr>
         <p:spPr>
           <a:xfrm>
-            <a:off x="548640" y="2299716"/>
-            <a:ext cx="640080" cy="576072"/>
+            <a:off x="548640" y="3095244"/>
+            <a:ext cx="457200" cy="411480"/>
           </a:xfrm>
           <a:prstGeom prst="rect">
             <a:avLst/>
@@ -46475,7 +47202,7 @@
           <a:p>
             <a:pPr algn="ctr"/>
             <a:r>
-              <a:rPr sz="1800" b="1" i="0">
+              <a:rPr sz="1400" b="1" i="0">
                 <a:solidFill>
                   <a:srgbClr val="FFFFFF"/>
                 </a:solidFill>
@@ -46488,14 +47215,14 @@
       </p:sp>
       <p:sp>
         <p:nvSpPr>
-          <p:cNvPr id="58" name="TextBox 57"/>
+          <p:cNvPr id="61" name="TextBox 60"/>
           <p:cNvSpPr txBox="1"/>
           <p:nvPr/>
         </p:nvSpPr>
         <p:spPr>
           <a:xfrm>
-            <a:off x="1325880" y="2340864"/>
-            <a:ext cx="7178040" cy="530352"/>
+            <a:off x="1143000" y="3108960"/>
+            <a:ext cx="7406640" cy="411480"/>
           </a:xfrm>
           <a:prstGeom prst="rect">
             <a:avLst/>
@@ -46510,7 +47237,7 @@
           <a:p>
             <a:pPr algn="l"/>
             <a:r>
-              <a:rPr sz="1300" b="0" i="0">
+              <a:rPr sz="1200" b="0" i="0">
                 <a:solidFill>
                   <a:srgbClr val="1A1A1A"/>
                 </a:solidFill>
@@ -46523,19 +47250,17 @@
       </p:sp>
       <p:sp>
         <p:nvSpPr>
-          <p:cNvPr id="59" name="Rounded Rectangle 58"/>
-          <p:cNvSpPr/>
-          <p:nvPr/>
-        </p:nvSpPr>
-        <p:spPr>
-          <a:xfrm>
-            <a:off x="502920" y="3163824"/>
-            <a:ext cx="8138160" cy="749808"/>
+          <p:cNvPr id="62" name="Rounded Rectangle 61"/>
+          <p:cNvSpPr/>
+          <p:nvPr/>
+        </p:nvSpPr>
+        <p:spPr>
+          <a:xfrm>
+            <a:off x="502920" y="3703320"/>
+            <a:ext cx="8138160" cy="566928"/>
           </a:xfrm>
           <a:prstGeom prst="roundRect">
-            <a:avLst>
-              <a:gd name="adj" fmla="val 20000"/>
-            </a:avLst>
+            <a:avLst/>
           </a:prstGeom>
           <a:solidFill>
             <a:srgbClr val="FFECF5"/>
@@ -46570,19 +47295,17 @@
       </p:sp>
       <p:sp>
         <p:nvSpPr>
-          <p:cNvPr id="60" name="Rounded Rectangle 59"/>
-          <p:cNvSpPr/>
-          <p:nvPr/>
-        </p:nvSpPr>
-        <p:spPr>
-          <a:xfrm>
-            <a:off x="548640" y="3218688"/>
-            <a:ext cx="640080" cy="640080"/>
+          <p:cNvPr id="63" name="Rounded Rectangle 62"/>
+          <p:cNvSpPr/>
+          <p:nvPr/>
+        </p:nvSpPr>
+        <p:spPr>
+          <a:xfrm>
+            <a:off x="548640" y="3758183"/>
+            <a:ext cx="457200" cy="457200"/>
           </a:xfrm>
           <a:prstGeom prst="roundRect">
-            <a:avLst>
-              <a:gd name="adj" fmla="val 20000"/>
-            </a:avLst>
+            <a:avLst/>
           </a:prstGeom>
           <a:solidFill>
             <a:srgbClr val="FF3999"/>
@@ -46615,14 +47338,14 @@
       </p:sp>
       <p:sp>
         <p:nvSpPr>
-          <p:cNvPr id="61" name="TextBox 60"/>
+          <p:cNvPr id="64" name="TextBox 63"/>
           <p:cNvSpPr txBox="1"/>
           <p:nvPr/>
         </p:nvSpPr>
         <p:spPr>
           <a:xfrm>
-            <a:off x="548640" y="3250692"/>
-            <a:ext cx="640080" cy="576072"/>
+            <a:off x="548640" y="3781044"/>
+            <a:ext cx="457200" cy="411480"/>
           </a:xfrm>
           <a:prstGeom prst="rect">
             <a:avLst/>
@@ -46637,7 +47360,7 @@
           <a:p>
             <a:pPr algn="ctr"/>
             <a:r>
-              <a:rPr sz="1800" b="1" i="0">
+              <a:rPr sz="1400" b="1" i="0">
                 <a:solidFill>
                   <a:srgbClr val="FFFFFF"/>
                 </a:solidFill>
@@ -46650,14 +47373,14 @@
       </p:sp>
       <p:sp>
         <p:nvSpPr>
-          <p:cNvPr id="62" name="TextBox 61"/>
+          <p:cNvPr id="65" name="TextBox 64"/>
           <p:cNvSpPr txBox="1"/>
           <p:nvPr/>
         </p:nvSpPr>
         <p:spPr>
           <a:xfrm>
-            <a:off x="1325880" y="3291840"/>
-            <a:ext cx="7178040" cy="530352"/>
+            <a:off x="1143000" y="3794759"/>
+            <a:ext cx="7406640" cy="411480"/>
           </a:xfrm>
           <a:prstGeom prst="rect">
             <a:avLst/>
@@ -46672,7 +47395,7 @@
           <a:p>
             <a:pPr algn="l"/>
             <a:r>
-              <a:rPr sz="1300" b="0" i="0">
+              <a:rPr sz="1200" b="0" i="0">
                 <a:solidFill>
                   <a:srgbClr val="1A1A1A"/>
                 </a:solidFill>
@@ -46685,19 +47408,17 @@
       </p:sp>
       <p:sp>
         <p:nvSpPr>
-          <p:cNvPr id="63" name="Rounded Rectangle 62"/>
-          <p:cNvSpPr/>
-          <p:nvPr/>
-        </p:nvSpPr>
-        <p:spPr>
-          <a:xfrm>
-            <a:off x="320040" y="4114800"/>
-            <a:ext cx="8503920" cy="640080"/>
+          <p:cNvPr id="66" name="Rounded Rectangle 65"/>
+          <p:cNvSpPr/>
+          <p:nvPr/>
+        </p:nvSpPr>
+        <p:spPr>
+          <a:xfrm>
+            <a:off x="320040" y="4407408"/>
+            <a:ext cx="8503920" cy="502920"/>
           </a:xfrm>
           <a:prstGeom prst="roundRect">
-            <a:avLst>
-              <a:gd name="adj" fmla="val 20000"/>
-            </a:avLst>
+            <a:avLst/>
           </a:prstGeom>
           <a:solidFill>
             <a:srgbClr val="FFD700"/>
@@ -46730,14 +47451,14 @@
       </p:sp>
       <p:sp>
         <p:nvSpPr>
-          <p:cNvPr id="64" name="TextBox 63"/>
+          <p:cNvPr id="67" name="TextBox 66"/>
           <p:cNvSpPr txBox="1"/>
           <p:nvPr/>
         </p:nvSpPr>
         <p:spPr>
           <a:xfrm>
-            <a:off x="457200" y="4178808"/>
-            <a:ext cx="8229600" cy="512064"/>
+            <a:off x="457200" y="4453128"/>
+            <a:ext cx="8229600" cy="402336"/>
           </a:xfrm>
           <a:prstGeom prst="rect">
             <a:avLst/>
@@ -46752,7 +47473,7 @@
           <a:p>
             <a:pPr algn="ctr"/>
             <a:r>
-              <a:rPr sz="1300" b="1" i="1">
+              <a:rPr sz="1200" b="1" i="1">
                 <a:solidFill>
                   <a:srgbClr val="1A1A1A"/>
                 </a:solidFill>
@@ -48857,9 +49578,7 @@
             <a:ext cx="2743200" cy="3977639"/>
           </a:xfrm>
           <a:prstGeom prst="roundRect">
-            <a:avLst>
-              <a:gd name="adj" fmla="val 20000"/>
-            </a:avLst>
+            <a:avLst/>
           </a:prstGeom>
           <a:solidFill>
             <a:srgbClr val="FFFFFF"/>
@@ -48892,9 +49611,33 @@
           </a:p>
         </p:txBody>
       </p:sp>
-      <p:sp>
-        <p:nvSpPr>
-          <p:cNvPr id="51" name="Rounded Rectangle 50"/>
+      <p:pic>
+        <p:nvPicPr>
+          <p:cNvPr id="51" name="Picture 50" descr="image.png"/>
+          <p:cNvPicPr>
+            <a:picLocks noChangeAspect="1"/>
+          </p:cNvPicPr>
+          <p:nvPr/>
+        </p:nvPicPr>
+        <p:blipFill>
+          <a:blip r:embed="rId2"/>
+          <a:stretch>
+            <a:fillRect/>
+          </a:stretch>
+        </p:blipFill>
+        <p:spPr>
+          <a:xfrm>
+            <a:off x="1005840" y="1097280"/>
+            <a:ext cx="1188720" cy="1188720"/>
+          </a:xfrm>
+          <a:prstGeom prst="rect">
+            <a:avLst/>
+          </a:prstGeom>
+        </p:spPr>
+      </p:pic>
+      <p:sp>
+        <p:nvSpPr>
+          <p:cNvPr id="52" name="Rounded Rectangle 51"/>
           <p:cNvSpPr/>
           <p:nvPr/>
         </p:nvSpPr>
@@ -48904,9 +49647,7 @@
             <a:ext cx="640080" cy="640080"/>
           </a:xfrm>
           <a:prstGeom prst="roundRect">
-            <a:avLst>
-              <a:gd name="adj" fmla="val 20000"/>
-            </a:avLst>
+            <a:avLst/>
           </a:prstGeom>
           <a:solidFill>
             <a:srgbClr val="FF3999"/>
@@ -48939,7 +49680,7 @@
       </p:sp>
       <p:sp>
         <p:nvSpPr>
-          <p:cNvPr id="52" name="TextBox 51"/>
+          <p:cNvPr id="53" name="TextBox 52"/>
           <p:cNvSpPr txBox="1"/>
           <p:nvPr/>
         </p:nvSpPr>
@@ -48974,7 +49715,7 @@
       </p:sp>
       <p:sp>
         <p:nvSpPr>
-          <p:cNvPr id="53" name="TextBox 52"/>
+          <p:cNvPr id="54" name="TextBox 53"/>
           <p:cNvSpPr txBox="1"/>
           <p:nvPr/>
         </p:nvSpPr>
@@ -49009,7 +49750,7 @@
       </p:sp>
       <p:sp>
         <p:nvSpPr>
-          <p:cNvPr id="54" name="TextBox 53"/>
+          <p:cNvPr id="55" name="TextBox 54"/>
           <p:cNvSpPr txBox="1"/>
           <p:nvPr/>
         </p:nvSpPr>
@@ -49044,7 +49785,7 @@
       </p:sp>
       <p:sp>
         <p:nvSpPr>
-          <p:cNvPr id="55" name="Rounded Rectangle 54"/>
+          <p:cNvPr id="56" name="Rounded Rectangle 55"/>
           <p:cNvSpPr/>
           <p:nvPr/>
         </p:nvSpPr>
@@ -49054,9 +49795,7 @@
             <a:ext cx="2743200" cy="3977639"/>
           </a:xfrm>
           <a:prstGeom prst="roundRect">
-            <a:avLst>
-              <a:gd name="adj" fmla="val 20000"/>
-            </a:avLst>
+            <a:avLst/>
           </a:prstGeom>
           <a:solidFill>
             <a:srgbClr val="FFFFFF"/>
@@ -49089,9 +49828,33 @@
           </a:p>
         </p:txBody>
       </p:sp>
-      <p:sp>
-        <p:nvSpPr>
-          <p:cNvPr id="56" name="Rounded Rectangle 55"/>
+      <p:pic>
+        <p:nvPicPr>
+          <p:cNvPr id="57" name="Picture 56" descr="image.png"/>
+          <p:cNvPicPr>
+            <a:picLocks noChangeAspect="1"/>
+          </p:cNvPicPr>
+          <p:nvPr/>
+        </p:nvPicPr>
+        <p:blipFill>
+          <a:blip r:embed="rId3"/>
+          <a:stretch>
+            <a:fillRect/>
+          </a:stretch>
+        </p:blipFill>
+        <p:spPr>
+          <a:xfrm>
+            <a:off x="3977639" y="1097280"/>
+            <a:ext cx="1188720" cy="1188720"/>
+          </a:xfrm>
+          <a:prstGeom prst="rect">
+            <a:avLst/>
+          </a:prstGeom>
+        </p:spPr>
+      </p:pic>
+      <p:sp>
+        <p:nvSpPr>
+          <p:cNvPr id="58" name="Rounded Rectangle 57"/>
           <p:cNvSpPr/>
           <p:nvPr/>
         </p:nvSpPr>
@@ -49101,9 +49864,7 @@
             <a:ext cx="640080" cy="640080"/>
           </a:xfrm>
           <a:prstGeom prst="roundRect">
-            <a:avLst>
-              <a:gd name="adj" fmla="val 20000"/>
-            </a:avLst>
+            <a:avLst/>
           </a:prstGeom>
           <a:solidFill>
             <a:srgbClr val="FF3999"/>
@@ -49136,7 +49897,7 @@
       </p:sp>
       <p:sp>
         <p:nvSpPr>
-          <p:cNvPr id="57" name="TextBox 56"/>
+          <p:cNvPr id="59" name="TextBox 58"/>
           <p:cNvSpPr txBox="1"/>
           <p:nvPr/>
         </p:nvSpPr>
@@ -49171,7 +49932,7 @@
       </p:sp>
       <p:sp>
         <p:nvSpPr>
-          <p:cNvPr id="58" name="TextBox 57"/>
+          <p:cNvPr id="60" name="TextBox 59"/>
           <p:cNvSpPr txBox="1"/>
           <p:nvPr/>
         </p:nvSpPr>
@@ -49206,7 +49967,7 @@
       </p:sp>
       <p:sp>
         <p:nvSpPr>
-          <p:cNvPr id="59" name="TextBox 58"/>
+          <p:cNvPr id="61" name="TextBox 60"/>
           <p:cNvSpPr txBox="1"/>
           <p:nvPr/>
         </p:nvSpPr>
@@ -49241,7 +50002,7 @@
       </p:sp>
       <p:sp>
         <p:nvSpPr>
-          <p:cNvPr id="60" name="Rounded Rectangle 59"/>
+          <p:cNvPr id="62" name="Rounded Rectangle 61"/>
           <p:cNvSpPr/>
           <p:nvPr/>
         </p:nvSpPr>
@@ -49251,9 +50012,7 @@
             <a:ext cx="2743200" cy="3977639"/>
           </a:xfrm>
           <a:prstGeom prst="roundRect">
-            <a:avLst>
-              <a:gd name="adj" fmla="val 20000"/>
-            </a:avLst>
+            <a:avLst/>
           </a:prstGeom>
           <a:solidFill>
             <a:srgbClr val="FFFFFF"/>
@@ -49286,9 +50045,33 @@
           </a:p>
         </p:txBody>
       </p:sp>
-      <p:sp>
-        <p:nvSpPr>
-          <p:cNvPr id="61" name="Rounded Rectangle 60"/>
+      <p:pic>
+        <p:nvPicPr>
+          <p:cNvPr id="63" name="Picture 62" descr="image.png"/>
+          <p:cNvPicPr>
+            <a:picLocks noChangeAspect="1"/>
+          </p:cNvPicPr>
+          <p:nvPr/>
+        </p:nvPicPr>
+        <p:blipFill>
+          <a:blip r:embed="rId4"/>
+          <a:stretch>
+            <a:fillRect/>
+          </a:stretch>
+        </p:blipFill>
+        <p:spPr>
+          <a:xfrm>
+            <a:off x="6949440" y="1097280"/>
+            <a:ext cx="1188720" cy="1188720"/>
+          </a:xfrm>
+          <a:prstGeom prst="rect">
+            <a:avLst/>
+          </a:prstGeom>
+        </p:spPr>
+      </p:pic>
+      <p:sp>
+        <p:nvSpPr>
+          <p:cNvPr id="64" name="Rounded Rectangle 63"/>
           <p:cNvSpPr/>
           <p:nvPr/>
         </p:nvSpPr>
@@ -49298,9 +50081,7 @@
             <a:ext cx="640080" cy="640080"/>
           </a:xfrm>
           <a:prstGeom prst="roundRect">
-            <a:avLst>
-              <a:gd name="adj" fmla="val 20000"/>
-            </a:avLst>
+            <a:avLst/>
           </a:prstGeom>
           <a:solidFill>
             <a:srgbClr val="FF3999"/>
@@ -49333,7 +50114,7 @@
       </p:sp>
       <p:sp>
         <p:nvSpPr>
-          <p:cNvPr id="62" name="TextBox 61"/>
+          <p:cNvPr id="65" name="TextBox 64"/>
           <p:cNvSpPr txBox="1"/>
           <p:nvPr/>
         </p:nvSpPr>
@@ -49368,7 +50149,7 @@
       </p:sp>
       <p:sp>
         <p:nvSpPr>
-          <p:cNvPr id="63" name="TextBox 62"/>
+          <p:cNvPr id="66" name="TextBox 65"/>
           <p:cNvSpPr txBox="1"/>
           <p:nvPr/>
         </p:nvSpPr>
@@ -49403,7 +50184,7 @@
       </p:sp>
       <p:sp>
         <p:nvSpPr>
-          <p:cNvPr id="64" name="TextBox 63"/>
+          <p:cNvPr id="67" name="TextBox 66"/>
           <p:cNvSpPr txBox="1"/>
           <p:nvPr/>
         </p:nvSpPr>
@@ -51527,12 +52308,10 @@
         <p:spPr>
           <a:xfrm>
             <a:off x="274320" y="914400"/>
-            <a:ext cx="8595360" cy="1508760"/>
+            <a:ext cx="5486400" cy="2377440"/>
           </a:xfrm>
           <a:prstGeom prst="roundRect">
-            <a:avLst>
-              <a:gd name="adj" fmla="val 20000"/>
-            </a:avLst>
+            <a:avLst/>
           </a:prstGeom>
           <a:solidFill>
             <a:srgbClr val="FFFFFF"/>
@@ -51574,7 +52353,7 @@
         <p:spPr>
           <a:xfrm>
             <a:off x="438912" y="1078992"/>
-            <a:ext cx="8321040" cy="1234440"/>
+            <a:ext cx="5212080" cy="2103120"/>
           </a:xfrm>
           <a:prstGeom prst="rect">
             <a:avLst/>
@@ -51644,13 +52423,174 @@
         </p:nvSpPr>
         <p:spPr>
           <a:xfrm>
-            <a:off x="274320" y="2542032"/>
+            <a:off x="5943600" y="914400"/>
+            <a:ext cx="2926080" cy="2377440"/>
+          </a:xfrm>
+          <a:prstGeom prst="roundRect">
+            <a:avLst/>
+          </a:prstGeom>
+          <a:solidFill>
+            <a:srgbClr val="FFECF5"/>
+          </a:solidFill>
+          <a:ln w="15240">
+            <a:solidFill>
+              <a:srgbClr val="FFD6EC"/>
+            </a:solidFill>
+          </a:ln>
+        </p:spPr>
+        <p:style>
+          <a:lnRef idx="1">
+            <a:schemeClr val="accent1"/>
+          </a:lnRef>
+          <a:fillRef idx="3">
+            <a:schemeClr val="accent1"/>
+          </a:fillRef>
+          <a:effectRef idx="2">
+            <a:schemeClr val="accent1"/>
+          </a:effectRef>
+          <a:fontRef idx="minor">
+            <a:schemeClr val="lt1"/>
+          </a:fontRef>
+        </p:style>
+        <p:txBody>
+          <a:bodyPr rtlCol="0" anchor="ctr"/>
+          <a:lstStyle/>
+          <a:p>
+            <a:pPr algn="ctr"/>
+          </a:p>
+        </p:txBody>
+      </p:sp>
+      <p:pic>
+        <p:nvPicPr>
+          <p:cNvPr id="53" name="Picture 52" descr="image.png"/>
+          <p:cNvPicPr>
+            <a:picLocks noChangeAspect="1"/>
+          </p:cNvPicPr>
+          <p:nvPr/>
+        </p:nvPicPr>
+        <p:blipFill>
+          <a:blip r:embed="rId2"/>
+          <a:stretch>
+            <a:fillRect/>
+          </a:stretch>
+        </p:blipFill>
+        <p:spPr>
+          <a:xfrm>
+            <a:off x="6492240" y="1005840"/>
+            <a:ext cx="1005840" cy="1005840"/>
+          </a:xfrm>
+          <a:prstGeom prst="rect">
+            <a:avLst/>
+          </a:prstGeom>
+        </p:spPr>
+      </p:pic>
+      <p:sp>
+        <p:nvSpPr>
+          <p:cNvPr id="54" name="TextBox 53"/>
+          <p:cNvSpPr txBox="1"/>
+          <p:nvPr/>
+        </p:nvSpPr>
+        <p:spPr>
+          <a:xfrm>
+            <a:off x="6400800" y="2057400"/>
+            <a:ext cx="2286000" cy="365760"/>
+          </a:xfrm>
+          <a:prstGeom prst="rect">
+            <a:avLst/>
+          </a:prstGeom>
+          <a:noFill/>
+        </p:spPr>
+        <p:txBody>
+          <a:bodyPr wrap="square">
+            <a:spAutoFit/>
+          </a:bodyPr>
+          <a:lstStyle/>
+          <a:p>
+            <a:pPr algn="ctr"/>
+            <a:r>
+              <a:rPr sz="1100" b="0" i="0">
+                <a:solidFill>
+                  <a:srgbClr val="666666"/>
+                </a:solidFill>
+                <a:latin typeface="Hiragino Kaku Gothic ProN"/>
+              </a:rPr>
+              <a:t>企業からお金をもらって</a:t>
+            </a:r>
+          </a:p>
+        </p:txBody>
+      </p:sp>
+      <p:sp>
+        <p:nvSpPr>
+          <p:cNvPr id="55" name="TextBox 54"/>
+          <p:cNvSpPr txBox="1"/>
+          <p:nvPr/>
+        </p:nvSpPr>
+        <p:spPr>
+          <a:xfrm>
+            <a:off x="6309360" y="2423160"/>
+            <a:ext cx="2468880" cy="365760"/>
+          </a:xfrm>
+          <a:prstGeom prst="rect">
+            <a:avLst/>
+          </a:prstGeom>
+          <a:noFill/>
+        </p:spPr>
+        <p:txBody>
+          <a:bodyPr wrap="square">
+            <a:spAutoFit/>
+          </a:bodyPr>
+          <a:lstStyle/>
+          <a:p>
+            <a:pPr algn="ctr"/>
+            <a:r>
+              <a:rPr sz="1100" b="0" i="0">
+                <a:solidFill>
+                  <a:srgbClr val="666666"/>
+                </a:solidFill>
+                <a:latin typeface="Hiragino Kaku Gothic ProN"/>
+              </a:rPr>
+              <a:t>「自分で買いました」と言う</a:t>
+            </a:r>
+          </a:p>
+        </p:txBody>
+      </p:sp>
+      <p:pic>
+        <p:nvPicPr>
+          <p:cNvPr id="56" name="Picture 55" descr="image.png"/>
+          <p:cNvPicPr>
+            <a:picLocks noChangeAspect="1"/>
+          </p:cNvPicPr>
+          <p:nvPr/>
+        </p:nvPicPr>
+        <p:blipFill>
+          <a:blip r:embed="rId3"/>
+          <a:stretch>
+            <a:fillRect/>
+          </a:stretch>
+        </p:blipFill>
+        <p:spPr>
+          <a:xfrm>
+            <a:off x="7863840" y="960120"/>
+            <a:ext cx="731520" cy="731520"/>
+          </a:xfrm>
+          <a:prstGeom prst="rect">
+            <a:avLst/>
+          </a:prstGeom>
+        </p:spPr>
+      </p:pic>
+      <p:sp>
+        <p:nvSpPr>
+          <p:cNvPr id="57" name="Rounded Rectangle 56"/>
+          <p:cNvSpPr/>
+          <p:nvPr/>
+        </p:nvSpPr>
+        <p:spPr>
+          <a:xfrm>
+            <a:off x="274320" y="3429000"/>
             <a:ext cx="8595360" cy="658368"/>
           </a:xfrm>
           <a:prstGeom prst="roundRect">
-            <a:avLst>
-              <a:gd name="adj" fmla="val 20000"/>
-            </a:avLst>
+            <a:avLst/>
           </a:prstGeom>
           <a:solidFill>
             <a:srgbClr val="FFECF5"/>
@@ -51685,13 +52625,13 @@
       </p:sp>
       <p:sp>
         <p:nvSpPr>
-          <p:cNvPr id="53" name="TextBox 52"/>
+          <p:cNvPr id="58" name="TextBox 57"/>
           <p:cNvSpPr txBox="1"/>
           <p:nvPr/>
         </p:nvSpPr>
         <p:spPr>
           <a:xfrm>
-            <a:off x="411479" y="2606039"/>
+            <a:off x="411479" y="3493008"/>
             <a:ext cx="8321040" cy="566928"/>
           </a:xfrm>
           <a:prstGeom prst="rect">
@@ -51713,7 +52653,7 @@
                 </a:solidFill>
                 <a:latin typeface="Hiragino Kaku Gothic ProN"/>
               </a:rPr>
-              <a:t>【重要】企業から報酬を受け取りながら自腹で買ったように装う行為＝ステマ。フォロワーを騙す違法行為であり「知らなかった」では済まされない。</a:t>
+              <a:t>【重要】フォロワーを騙す違法行為。「知らなかった」では済まされない。</a:t>
             </a:r>
           </a:p>
         </p:txBody>
@@ -53812,9 +54752,7 @@
             <a:ext cx="4114800" cy="2606040"/>
           </a:xfrm>
           <a:prstGeom prst="roundRect">
-            <a:avLst>
-              <a:gd name="adj" fmla="val 20000"/>
-            </a:avLst>
+            <a:avLst/>
           </a:prstGeom>
           <a:solidFill>
             <a:srgbClr val="FFFFFF"/>
@@ -54023,9 +54961,33 @@
           </a:p>
         </p:txBody>
       </p:sp>
-      <p:sp>
-        <p:nvSpPr>
-          <p:cNvPr id="54" name="Rounded Rectangle 53"/>
+      <p:pic>
+        <p:nvPicPr>
+          <p:cNvPr id="54" name="Picture 53" descr="image.png"/>
+          <p:cNvPicPr>
+            <a:picLocks noChangeAspect="1"/>
+          </p:cNvPicPr>
+          <p:nvPr/>
+        </p:nvPicPr>
+        <p:blipFill>
+          <a:blip r:embed="rId2"/>
+          <a:stretch>
+            <a:fillRect/>
+          </a:stretch>
+        </p:blipFill>
+        <p:spPr>
+          <a:xfrm>
+            <a:off x="3566160" y="2468880"/>
+            <a:ext cx="822960" cy="822960"/>
+          </a:xfrm>
+          <a:prstGeom prst="rect">
+            <a:avLst/>
+          </a:prstGeom>
+        </p:spPr>
+      </p:pic>
+      <p:sp>
+        <p:nvSpPr>
+          <p:cNvPr id="55" name="Rounded Rectangle 54"/>
           <p:cNvSpPr/>
           <p:nvPr/>
         </p:nvSpPr>
@@ -54035,9 +54997,7 @@
             <a:ext cx="4114800" cy="2606040"/>
           </a:xfrm>
           <a:prstGeom prst="roundRect">
-            <a:avLst>
-              <a:gd name="adj" fmla="val 20000"/>
-            </a:avLst>
+            <a:avLst/>
           </a:prstGeom>
           <a:solidFill>
             <a:srgbClr val="FFFFFF"/>
@@ -54072,7 +55032,7 @@
       </p:sp>
       <p:sp>
         <p:nvSpPr>
-          <p:cNvPr id="55" name="Rectangle 54"/>
+          <p:cNvPr id="56" name="Rectangle 55"/>
           <p:cNvSpPr/>
           <p:nvPr/>
         </p:nvSpPr>
@@ -54115,7 +55075,7 @@
       </p:sp>
       <p:sp>
         <p:nvSpPr>
-          <p:cNvPr id="56" name="TextBox 55"/>
+          <p:cNvPr id="57" name="TextBox 56"/>
           <p:cNvSpPr txBox="1"/>
           <p:nvPr/>
         </p:nvSpPr>
@@ -54150,7 +55110,7 @@
       </p:sp>
       <p:sp>
         <p:nvSpPr>
-          <p:cNvPr id="57" name="TextBox 56"/>
+          <p:cNvPr id="58" name="TextBox 57"/>
           <p:cNvSpPr txBox="1"/>
           <p:nvPr/>
         </p:nvSpPr>
@@ -54246,9 +55206,33 @@
           </a:p>
         </p:txBody>
       </p:sp>
-      <p:sp>
-        <p:nvSpPr>
-          <p:cNvPr id="58" name="Rounded Rectangle 57"/>
+      <p:pic>
+        <p:nvPicPr>
+          <p:cNvPr id="59" name="Picture 58" descr="image.png"/>
+          <p:cNvPicPr>
+            <a:picLocks noChangeAspect="1"/>
+          </p:cNvPicPr>
+          <p:nvPr/>
+        </p:nvPicPr>
+        <p:blipFill>
+          <a:blip r:embed="rId3"/>
+          <a:stretch>
+            <a:fillRect/>
+          </a:stretch>
+        </p:blipFill>
+        <p:spPr>
+          <a:xfrm>
+            <a:off x="8138160" y="2468880"/>
+            <a:ext cx="822960" cy="822960"/>
+          </a:xfrm>
+          <a:prstGeom prst="rect">
+            <a:avLst/>
+          </a:prstGeom>
+        </p:spPr>
+      </p:pic>
+      <p:sp>
+        <p:nvSpPr>
+          <p:cNvPr id="60" name="Rounded Rectangle 59"/>
           <p:cNvSpPr/>
           <p:nvPr/>
         </p:nvSpPr>
@@ -54258,9 +55242,7 @@
             <a:ext cx="8595360" cy="621792"/>
           </a:xfrm>
           <a:prstGeom prst="roundRect">
-            <a:avLst>
-              <a:gd name="adj" fmla="val 20000"/>
-            </a:avLst>
+            <a:avLst/>
           </a:prstGeom>
           <a:solidFill>
             <a:srgbClr val="FFECF5"/>
@@ -54295,7 +55277,7 @@
       </p:sp>
       <p:sp>
         <p:nvSpPr>
-          <p:cNvPr id="59" name="TextBox 58"/>
+          <p:cNvPr id="61" name="TextBox 60"/>
           <p:cNvSpPr txBox="1"/>
           <p:nvPr/>
         </p:nvSpPr>
@@ -54323,7 +55305,7 @@
                 </a:solidFill>
                 <a:latin typeface="Hiragino Kaku Gothic ProN"/>
               </a:rPr>
-              <a:t>案件毎にオリエンシートを共有します。媒体ごとのルールは進行担当のアナウンスに必ず従ってください。</a:t>
+              <a:t>案件毎にオリエンシートを共有します。進行担当のアナウンスに必ず従ってください。</a:t>
             </a:r>
           </a:p>
         </p:txBody>
@@ -56419,12 +57401,10 @@
         <p:spPr>
           <a:xfrm>
             <a:off x="274320" y="914400"/>
-            <a:ext cx="8595360" cy="1645920"/>
+            <a:ext cx="5943600" cy="1645920"/>
           </a:xfrm>
           <a:prstGeom prst="roundRect">
-            <a:avLst>
-              <a:gd name="adj" fmla="val 20000"/>
-            </a:avLst>
+            <a:avLst/>
           </a:prstGeom>
           <a:solidFill>
             <a:srgbClr val="FFFFFF"/>
@@ -56466,7 +57446,7 @@
         <p:spPr>
           <a:xfrm>
             <a:off x="438912" y="1078992"/>
-            <a:ext cx="8321040" cy="1371600"/>
+            <a:ext cx="5669280" cy="1371600"/>
           </a:xfrm>
           <a:prstGeom prst="rect">
             <a:avLst/>
@@ -56554,13 +57534,80 @@
         </p:nvSpPr>
         <p:spPr>
           <a:xfrm>
+            <a:off x="6400800" y="914400"/>
+            <a:ext cx="2468880" cy="1645920"/>
+          </a:xfrm>
+          <a:prstGeom prst="roundRect">
+            <a:avLst/>
+          </a:prstGeom>
+          <a:solidFill>
+            <a:srgbClr val="FFECF5"/>
+          </a:solidFill>
+          <a:ln w="15240">
+            <a:solidFill>
+              <a:srgbClr val="FFD6EC"/>
+            </a:solidFill>
+          </a:ln>
+        </p:spPr>
+        <p:style>
+          <a:lnRef idx="1">
+            <a:schemeClr val="accent1"/>
+          </a:lnRef>
+          <a:fillRef idx="3">
+            <a:schemeClr val="accent1"/>
+          </a:fillRef>
+          <a:effectRef idx="2">
+            <a:schemeClr val="accent1"/>
+          </a:effectRef>
+          <a:fontRef idx="minor">
+            <a:schemeClr val="lt1"/>
+          </a:fontRef>
+        </p:style>
+        <p:txBody>
+          <a:bodyPr rtlCol="0" anchor="ctr"/>
+          <a:lstStyle/>
+          <a:p>
+            <a:pPr algn="ctr"/>
+          </a:p>
+        </p:txBody>
+      </p:sp>
+      <p:pic>
+        <p:nvPicPr>
+          <p:cNvPr id="53" name="Picture 52" descr="image.png"/>
+          <p:cNvPicPr>
+            <a:picLocks noChangeAspect="1"/>
+          </p:cNvPicPr>
+          <p:nvPr/>
+        </p:nvPicPr>
+        <p:blipFill>
+          <a:blip r:embed="rId2"/>
+          <a:stretch>
+            <a:fillRect/>
+          </a:stretch>
+        </p:blipFill>
+        <p:spPr>
+          <a:xfrm>
+            <a:off x="6995160" y="1051560"/>
+            <a:ext cx="1188720" cy="1188720"/>
+          </a:xfrm>
+          <a:prstGeom prst="rect">
+            <a:avLst/>
+          </a:prstGeom>
+        </p:spPr>
+      </p:pic>
+      <p:sp>
+        <p:nvSpPr>
+          <p:cNvPr id="54" name="Rounded Rectangle 53"/>
+          <p:cNvSpPr/>
+          <p:nvPr/>
+        </p:nvSpPr>
+        <p:spPr>
+          <a:xfrm>
             <a:off x="274320" y="2679192"/>
             <a:ext cx="8595360" cy="1280160"/>
           </a:xfrm>
           <a:prstGeom prst="roundRect">
-            <a:avLst>
-              <a:gd name="adj" fmla="val 20000"/>
-            </a:avLst>
+            <a:avLst/>
           </a:prstGeom>
           <a:solidFill>
             <a:srgbClr val="FFFFFF"/>
@@ -56595,7 +57642,7 @@
       </p:sp>
       <p:sp>
         <p:nvSpPr>
-          <p:cNvPr id="53" name="Rectangle 52"/>
+          <p:cNvPr id="55" name="Rectangle 54"/>
           <p:cNvSpPr/>
           <p:nvPr/>
         </p:nvSpPr>
@@ -56638,7 +57685,7 @@
       </p:sp>
       <p:sp>
         <p:nvSpPr>
-          <p:cNvPr id="54" name="TextBox 53"/>
+          <p:cNvPr id="56" name="TextBox 55"/>
           <p:cNvSpPr txBox="1"/>
           <p:nvPr/>
         </p:nvSpPr>
@@ -56673,7 +57720,7 @@
       </p:sp>
       <p:sp>
         <p:nvSpPr>
-          <p:cNvPr id="55" name="TextBox 54"/>
+          <p:cNvPr id="57" name="TextBox 56"/>
           <p:cNvSpPr txBox="1"/>
           <p:nvPr/>
         </p:nvSpPr>
@@ -56714,7 +57761,7 @@
                 </a:solidFill>
                 <a:latin typeface="Hiragino Kaku Gothic ProN"/>
               </a:rPr>
-              <a:t>設定しないとシャドウバン（表示回数激減・おすすめに載らなくなる）の対象に</a:t>
+              <a:t>設定しないとシャドウバン（表示回数激減）の対象に</a:t>
             </a:r>
           </a:p>
           <a:p>
@@ -56744,9 +57791,33 @@
           </a:p>
         </p:txBody>
       </p:sp>
-      <p:sp>
-        <p:nvSpPr>
-          <p:cNvPr id="56" name="Rounded Rectangle 55"/>
+      <p:pic>
+        <p:nvPicPr>
+          <p:cNvPr id="58" name="Picture 57" descr="image.png"/>
+          <p:cNvPicPr>
+            <a:picLocks noChangeAspect="1"/>
+          </p:cNvPicPr>
+          <p:nvPr/>
+        </p:nvPicPr>
+        <p:blipFill>
+          <a:blip r:embed="rId3"/>
+          <a:stretch>
+            <a:fillRect/>
+          </a:stretch>
+        </p:blipFill>
+        <p:spPr>
+          <a:xfrm>
+            <a:off x="8138160" y="2724912"/>
+            <a:ext cx="640080" cy="640080"/>
+          </a:xfrm>
+          <a:prstGeom prst="rect">
+            <a:avLst/>
+          </a:prstGeom>
+        </p:spPr>
+      </p:pic>
+      <p:sp>
+        <p:nvSpPr>
+          <p:cNvPr id="59" name="Rounded Rectangle 58"/>
           <p:cNvSpPr/>
           <p:nvPr/>
         </p:nvSpPr>
@@ -56756,9 +57827,7 @@
             <a:ext cx="8595360" cy="594360"/>
           </a:xfrm>
           <a:prstGeom prst="roundRect">
-            <a:avLst>
-              <a:gd name="adj" fmla="val 20000"/>
-            </a:avLst>
+            <a:avLst/>
           </a:prstGeom>
           <a:solidFill>
             <a:srgbClr val="FFECF5"/>
@@ -56793,7 +57862,7 @@
       </p:sp>
       <p:sp>
         <p:nvSpPr>
-          <p:cNvPr id="57" name="TextBox 56"/>
+          <p:cNvPr id="60" name="TextBox 59"/>
           <p:cNvSpPr txBox="1"/>
           <p:nvPr/>
         </p:nvSpPr>
@@ -58920,9 +59989,7 @@
             <a:ext cx="3931920" cy="3246120"/>
           </a:xfrm>
           <a:prstGeom prst="roundRect">
-            <a:avLst>
-              <a:gd name="adj" fmla="val 20000"/>
-            </a:avLst>
+            <a:avLst/>
           </a:prstGeom>
           <a:solidFill>
             <a:srgbClr val="FFFFFF"/>
@@ -59088,9 +60155,33 @@
           </a:p>
         </p:txBody>
       </p:sp>
-      <p:sp>
-        <p:nvSpPr>
-          <p:cNvPr id="54" name="Rounded Rectangle 53"/>
+      <p:pic>
+        <p:nvPicPr>
+          <p:cNvPr id="54" name="Picture 53" descr="image.png"/>
+          <p:cNvPicPr>
+            <a:picLocks noChangeAspect="1"/>
+          </p:cNvPicPr>
+          <p:nvPr/>
+        </p:nvPicPr>
+        <p:blipFill>
+          <a:blip r:embed="rId2"/>
+          <a:stretch>
+            <a:fillRect/>
+          </a:stretch>
+        </p:blipFill>
+        <p:spPr>
+          <a:xfrm>
+            <a:off x="2377440" y="1371600"/>
+            <a:ext cx="1097280" cy="1097280"/>
+          </a:xfrm>
+          <a:prstGeom prst="rect">
+            <a:avLst/>
+          </a:prstGeom>
+        </p:spPr>
+      </p:pic>
+      <p:sp>
+        <p:nvSpPr>
+          <p:cNvPr id="55" name="Rounded Rectangle 54"/>
           <p:cNvSpPr/>
           <p:nvPr/>
         </p:nvSpPr>
@@ -59100,9 +60191,7 @@
             <a:ext cx="4480560" cy="3246120"/>
           </a:xfrm>
           <a:prstGeom prst="roundRect">
-            <a:avLst>
-              <a:gd name="adj" fmla="val 20000"/>
-            </a:avLst>
+            <a:avLst/>
           </a:prstGeom>
           <a:solidFill>
             <a:srgbClr val="FFFFFF"/>
@@ -59137,7 +60226,7 @@
       </p:sp>
       <p:sp>
         <p:nvSpPr>
-          <p:cNvPr id="55" name="Rectangle 54"/>
+          <p:cNvPr id="56" name="Rectangle 55"/>
           <p:cNvSpPr/>
           <p:nvPr/>
         </p:nvSpPr>
@@ -59180,7 +60269,7 @@
       </p:sp>
       <p:sp>
         <p:nvSpPr>
-          <p:cNvPr id="56" name="TextBox 55"/>
+          <p:cNvPr id="57" name="TextBox 56"/>
           <p:cNvSpPr txBox="1"/>
           <p:nvPr/>
         </p:nvSpPr>
@@ -59215,7 +60304,7 @@
       </p:sp>
       <p:sp>
         <p:nvSpPr>
-          <p:cNvPr id="57" name="TextBox 56"/>
+          <p:cNvPr id="58" name="TextBox 57"/>
           <p:cNvSpPr txBox="1"/>
           <p:nvPr/>
         </p:nvSpPr>
@@ -59311,9 +60400,33 @@
           </a:p>
         </p:txBody>
       </p:sp>
-      <p:sp>
-        <p:nvSpPr>
-          <p:cNvPr id="58" name="Rounded Rectangle 57"/>
+      <p:pic>
+        <p:nvPicPr>
+          <p:cNvPr id="59" name="Picture 58" descr="image.png"/>
+          <p:cNvPicPr>
+            <a:picLocks noChangeAspect="1"/>
+          </p:cNvPicPr>
+          <p:nvPr/>
+        </p:nvPicPr>
+        <p:blipFill>
+          <a:blip r:embed="rId3"/>
+          <a:stretch>
+            <a:fillRect/>
+          </a:stretch>
+        </p:blipFill>
+        <p:spPr>
+          <a:xfrm>
+            <a:off x="7589520" y="1371600"/>
+            <a:ext cx="914400" cy="914400"/>
+          </a:xfrm>
+          <a:prstGeom prst="rect">
+            <a:avLst/>
+          </a:prstGeom>
+        </p:spPr>
+      </p:pic>
+      <p:sp>
+        <p:nvSpPr>
+          <p:cNvPr id="60" name="Rounded Rectangle 59"/>
           <p:cNvSpPr/>
           <p:nvPr/>
         </p:nvSpPr>
@@ -59323,9 +60436,7 @@
             <a:ext cx="8595360" cy="594360"/>
           </a:xfrm>
           <a:prstGeom prst="roundRect">
-            <a:avLst>
-              <a:gd name="adj" fmla="val 20000"/>
-            </a:avLst>
+            <a:avLst/>
           </a:prstGeom>
           <a:solidFill>
             <a:srgbClr val="FFECF5"/>
@@ -59360,7 +60471,7 @@
       </p:sp>
       <p:sp>
         <p:nvSpPr>
-          <p:cNvPr id="59" name="TextBox 58"/>
+          <p:cNvPr id="61" name="TextBox 60"/>
           <p:cNvSpPr txBox="1"/>
           <p:nvPr/>
         </p:nvSpPr>
@@ -61487,9 +62598,7 @@
             <a:ext cx="8138160" cy="868680"/>
           </a:xfrm>
           <a:prstGeom prst="roundRect">
-            <a:avLst>
-              <a:gd name="adj" fmla="val 20000"/>
-            </a:avLst>
+            <a:avLst/>
           </a:prstGeom>
           <a:solidFill>
             <a:srgbClr val="FFECF5"/>
@@ -61534,9 +62643,7 @@
             <a:ext cx="640080" cy="640080"/>
           </a:xfrm>
           <a:prstGeom prst="roundRect">
-            <a:avLst>
-              <a:gd name="adj" fmla="val 20000"/>
-            </a:avLst>
+            <a:avLst/>
           </a:prstGeom>
           <a:solidFill>
             <a:srgbClr val="FF3999"/>
@@ -61649,9 +62756,7 @@
             <a:ext cx="8138160" cy="868680"/>
           </a:xfrm>
           <a:prstGeom prst="roundRect">
-            <a:avLst>
-              <a:gd name="adj" fmla="val 20000"/>
-            </a:avLst>
+            <a:avLst/>
           </a:prstGeom>
           <a:solidFill>
             <a:srgbClr val="FFECF5"/>
@@ -61696,9 +62801,7 @@
             <a:ext cx="640080" cy="640080"/>
           </a:xfrm>
           <a:prstGeom prst="roundRect">
-            <a:avLst>
-              <a:gd name="adj" fmla="val 20000"/>
-            </a:avLst>
+            <a:avLst/>
           </a:prstGeom>
           <a:solidFill>
             <a:srgbClr val="FF3999"/>
@@ -61811,9 +62914,7 @@
             <a:ext cx="8138160" cy="868680"/>
           </a:xfrm>
           <a:prstGeom prst="roundRect">
-            <a:avLst>
-              <a:gd name="adj" fmla="val 20000"/>
-            </a:avLst>
+            <a:avLst/>
           </a:prstGeom>
           <a:solidFill>
             <a:srgbClr val="FFECF5"/>
@@ -61858,9 +62959,7 @@
             <a:ext cx="640080" cy="640080"/>
           </a:xfrm>
           <a:prstGeom prst="roundRect">
-            <a:avLst>
-              <a:gd name="adj" fmla="val 20000"/>
-            </a:avLst>
+            <a:avLst/>
           </a:prstGeom>
           <a:solidFill>
             <a:srgbClr val="FF3999"/>
@@ -61973,9 +63072,7 @@
             <a:ext cx="8503920" cy="685800"/>
           </a:xfrm>
           <a:prstGeom prst="roundRect">
-            <a:avLst>
-              <a:gd name="adj" fmla="val 20000"/>
-            </a:avLst>
+            <a:avLst/>
           </a:prstGeom>
           <a:solidFill>
             <a:srgbClr val="FFECF5"/>
@@ -62116,9 +63213,7 @@
             <a:ext cx="5669280" cy="2560320"/>
           </a:xfrm>
           <a:prstGeom prst="roundRect">
-            <a:avLst>
-              <a:gd name="adj" fmla="val 20000"/>
-            </a:avLst>
+            <a:avLst/>
           </a:prstGeom>
           <a:solidFill>
             <a:srgbClr val="FFFFFF"/>
@@ -62221,6 +63316,30 @@
           </a:p>
         </p:txBody>
       </p:sp>
+      <p:pic>
+        <p:nvPicPr>
+          <p:cNvPr id="6" name="Picture 5" descr="image.png"/>
+          <p:cNvPicPr>
+            <a:picLocks noChangeAspect="1"/>
+          </p:cNvPicPr>
+          <p:nvPr/>
+        </p:nvPicPr>
+        <p:blipFill>
+          <a:blip r:embed="rId2"/>
+          <a:stretch>
+            <a:fillRect/>
+          </a:stretch>
+        </p:blipFill>
+        <p:spPr>
+          <a:xfrm>
+            <a:off x="7772400" y="3291840"/>
+            <a:ext cx="1097280" cy="1097280"/>
+          </a:xfrm>
+          <a:prstGeom prst="rect">
+            <a:avLst/>
+          </a:prstGeom>
+        </p:spPr>
+      </p:pic>
     </p:spTree>
   </p:cSld>
   <p:clrMapOvr>

--- a/TORIHADA_第2週_研修資料.pptx
+++ b/TORIHADA_第2週_研修資料.pptx
@@ -5303,7 +5303,7 @@
       </p:sp>
       <p:pic>
         <p:nvPicPr>
-          <p:cNvPr id="53" name="Picture 52" descr="image.png"/>
+          <p:cNvPr id="53" name="Picture 52" descr="illust_stema.png"/>
           <p:cNvPicPr>
             <a:picLocks noChangeAspect="1"/>
           </p:cNvPicPr>
@@ -5317,8 +5317,8 @@
         </p:blipFill>
         <p:spPr>
           <a:xfrm>
-            <a:off x="182880" y="182880"/>
-            <a:ext cx="1005840" cy="1005840"/>
+            <a:off x="0" y="0"/>
+            <a:ext cx="1463040" cy="1645920"/>
           </a:xfrm>
           <a:prstGeom prst="rect">
             <a:avLst/>
@@ -5327,7 +5327,7 @@
       </p:pic>
       <p:pic>
         <p:nvPicPr>
-          <p:cNvPr id="54" name="Picture 53" descr="image.png"/>
+          <p:cNvPr id="54" name="Picture 53" descr="illust_shield.png"/>
           <p:cNvPicPr>
             <a:picLocks noChangeAspect="1"/>
           </p:cNvPicPr>
@@ -5341,65 +5341,17 @@
         </p:blipFill>
         <p:spPr>
           <a:xfrm>
-            <a:off x="7863840" y="274320"/>
-            <a:ext cx="822960" cy="822960"/>
+            <a:off x="7498079" y="3291840"/>
+            <a:ext cx="1463040" cy="1463040"/>
           </a:xfrm>
           <a:prstGeom prst="rect">
             <a:avLst/>
           </a:prstGeom>
         </p:spPr>
       </p:pic>
-      <p:pic>
-        <p:nvPicPr>
-          <p:cNvPr id="55" name="Picture 54" descr="image.png"/>
-          <p:cNvPicPr>
-            <a:picLocks noChangeAspect="1"/>
-          </p:cNvPicPr>
-          <p:nvPr/>
-        </p:nvPicPr>
-        <p:blipFill>
-          <a:blip r:embed="rId4"/>
-          <a:stretch>
-            <a:fillRect/>
-          </a:stretch>
-        </p:blipFill>
-        <p:spPr>
-          <a:xfrm>
-            <a:off x="91440" y="3749039"/>
-            <a:ext cx="1005840" cy="1005840"/>
-          </a:xfrm>
-          <a:prstGeom prst="rect">
-            <a:avLst/>
-          </a:prstGeom>
-        </p:spPr>
-      </p:pic>
-      <p:pic>
-        <p:nvPicPr>
-          <p:cNvPr id="56" name="Picture 55" descr="image.png"/>
-          <p:cNvPicPr>
-            <a:picLocks noChangeAspect="1"/>
-          </p:cNvPicPr>
-          <p:nvPr/>
-        </p:nvPicPr>
-        <p:blipFill>
-          <a:blip r:embed="rId5"/>
-          <a:stretch>
-            <a:fillRect/>
-          </a:stretch>
-        </p:blipFill>
-        <p:spPr>
-          <a:xfrm>
-            <a:off x="7863840" y="3840480"/>
-            <a:ext cx="914400" cy="914400"/>
-          </a:xfrm>
-          <a:prstGeom prst="rect">
-            <a:avLst/>
-          </a:prstGeom>
-        </p:spPr>
-      </p:pic>
-      <p:sp>
-        <p:nvSpPr>
-          <p:cNvPr id="57" name="Rectangle 56"/>
+      <p:sp>
+        <p:nvSpPr>
+          <p:cNvPr id="55" name="Rectangle 54"/>
           <p:cNvSpPr/>
           <p:nvPr/>
         </p:nvSpPr>
@@ -5442,7 +5394,7 @@
       </p:sp>
       <p:sp>
         <p:nvSpPr>
-          <p:cNvPr id="58" name="TextBox 57"/>
+          <p:cNvPr id="56" name="TextBox 55"/>
           <p:cNvSpPr txBox="1"/>
           <p:nvPr/>
         </p:nvSpPr>
@@ -7604,7 +7556,7 @@
       </p:sp>
       <p:pic>
         <p:nvPicPr>
-          <p:cNvPr id="51" name="Picture 50" descr="image.png"/>
+          <p:cNvPr id="51" name="Picture 50" descr="illust_yakuji.png"/>
           <p:cNvPicPr>
             <a:picLocks noChangeAspect="1"/>
           </p:cNvPicPr>
@@ -7618,8 +7570,8 @@
         </p:blipFill>
         <p:spPr>
           <a:xfrm>
-            <a:off x="1005840" y="1097280"/>
-            <a:ext cx="1188720" cy="1188720"/>
+            <a:off x="548640" y="1051560"/>
+            <a:ext cx="2103120" cy="1920240"/>
           </a:xfrm>
           <a:prstGeom prst="rect">
             <a:avLst/>
@@ -7634,7 +7586,7 @@
         </p:nvSpPr>
         <p:spPr>
           <a:xfrm>
-            <a:off x="365760" y="2834640"/>
+            <a:off x="365760" y="3017520"/>
             <a:ext cx="640080" cy="640080"/>
           </a:xfrm>
           <a:prstGeom prst="roundRect">
@@ -7677,7 +7629,7 @@
         </p:nvSpPr>
         <p:spPr>
           <a:xfrm>
-            <a:off x="365760" y="2866644"/>
+            <a:off x="365760" y="3049524"/>
             <a:ext cx="640080" cy="576072"/>
           </a:xfrm>
           <a:prstGeom prst="rect">
@@ -7712,7 +7664,7 @@
         </p:nvSpPr>
         <p:spPr>
           <a:xfrm>
-            <a:off x="320040" y="3611880"/>
+            <a:off x="320040" y="3749039"/>
             <a:ext cx="2560320" cy="594360"/>
           </a:xfrm>
           <a:prstGeom prst="rect">
@@ -7728,7 +7680,7 @@
           <a:p>
             <a:pPr algn="l"/>
             <a:r>
-              <a:rPr sz="1400" b="1" i="0">
+              <a:rPr sz="1300" b="1" i="0">
                 <a:solidFill>
                   <a:srgbClr val="1A1A1A"/>
                 </a:solidFill>
@@ -7747,8 +7699,8 @@
         </p:nvSpPr>
         <p:spPr>
           <a:xfrm>
-            <a:off x="320040" y="4251960"/>
-            <a:ext cx="2560320" cy="640080"/>
+            <a:off x="320040" y="4370832"/>
+            <a:ext cx="2560320" cy="594360"/>
           </a:xfrm>
           <a:prstGeom prst="rect">
             <a:avLst/>
@@ -7763,7 +7715,7 @@
           <a:p>
             <a:pPr algn="l"/>
             <a:r>
-              <a:rPr sz="1100" b="0" i="0">
+              <a:rPr sz="1000" b="0" i="0">
                 <a:solidFill>
                   <a:srgbClr val="666666"/>
                 </a:solidFill>
@@ -7821,7 +7773,7 @@
       </p:sp>
       <p:pic>
         <p:nvPicPr>
-          <p:cNvPr id="57" name="Picture 56" descr="image.png"/>
+          <p:cNvPr id="57" name="Picture 56" descr="illust_ng_hyogen.png"/>
           <p:cNvPicPr>
             <a:picLocks noChangeAspect="1"/>
           </p:cNvPicPr>
@@ -7835,8 +7787,8 @@
         </p:blipFill>
         <p:spPr>
           <a:xfrm>
-            <a:off x="3977639" y="1097280"/>
-            <a:ext cx="1188720" cy="1188720"/>
+            <a:off x="3520440" y="1051560"/>
+            <a:ext cx="2103120" cy="1920240"/>
           </a:xfrm>
           <a:prstGeom prst="rect">
             <a:avLst/>
@@ -7851,7 +7803,7 @@
         </p:nvSpPr>
         <p:spPr>
           <a:xfrm>
-            <a:off x="3337560" y="2834640"/>
+            <a:off x="3337560" y="3017520"/>
             <a:ext cx="640080" cy="640080"/>
           </a:xfrm>
           <a:prstGeom prst="roundRect">
@@ -7894,7 +7846,7 @@
         </p:nvSpPr>
         <p:spPr>
           <a:xfrm>
-            <a:off x="3337560" y="2866644"/>
+            <a:off x="3337560" y="3049524"/>
             <a:ext cx="640080" cy="576072"/>
           </a:xfrm>
           <a:prstGeom prst="rect">
@@ -7929,7 +7881,7 @@
         </p:nvSpPr>
         <p:spPr>
           <a:xfrm>
-            <a:off x="3291840" y="3611880"/>
+            <a:off x="3291840" y="3749039"/>
             <a:ext cx="2560320" cy="594360"/>
           </a:xfrm>
           <a:prstGeom prst="rect">
@@ -7945,7 +7897,7 @@
           <a:p>
             <a:pPr algn="l"/>
             <a:r>
-              <a:rPr sz="1400" b="1" i="0">
+              <a:rPr sz="1300" b="1" i="0">
                 <a:solidFill>
                   <a:srgbClr val="1A1A1A"/>
                 </a:solidFill>
@@ -7964,8 +7916,8 @@
         </p:nvSpPr>
         <p:spPr>
           <a:xfrm>
-            <a:off x="3291840" y="4251960"/>
-            <a:ext cx="2560320" cy="640080"/>
+            <a:off x="3291840" y="4370832"/>
+            <a:ext cx="2560320" cy="594360"/>
           </a:xfrm>
           <a:prstGeom prst="rect">
             <a:avLst/>
@@ -7980,7 +7932,7 @@
           <a:p>
             <a:pPr algn="l"/>
             <a:r>
-              <a:rPr sz="1100" b="0" i="0">
+              <a:rPr sz="1000" b="0" i="0">
                 <a:solidFill>
                   <a:srgbClr val="666666"/>
                 </a:solidFill>
@@ -8038,22 +7990,22 @@
       </p:sp>
       <p:pic>
         <p:nvPicPr>
-          <p:cNvPr id="63" name="Picture 62" descr="image.png"/>
+          <p:cNvPr id="63" name="Picture 62" descr="illust_yakuji.png"/>
           <p:cNvPicPr>
             <a:picLocks noChangeAspect="1"/>
           </p:cNvPicPr>
           <p:nvPr/>
         </p:nvPicPr>
         <p:blipFill>
-          <a:blip r:embed="rId4"/>
+          <a:blip r:embed="rId2"/>
           <a:stretch>
             <a:fillRect/>
           </a:stretch>
         </p:blipFill>
         <p:spPr>
           <a:xfrm>
-            <a:off x="6949440" y="1097280"/>
-            <a:ext cx="1188720" cy="1188720"/>
+            <a:off x="6492240" y="1051560"/>
+            <a:ext cx="2103120" cy="1920240"/>
           </a:xfrm>
           <a:prstGeom prst="rect">
             <a:avLst/>
@@ -8068,7 +8020,7 @@
         </p:nvSpPr>
         <p:spPr>
           <a:xfrm>
-            <a:off x="6309360" y="2834640"/>
+            <a:off x="6309360" y="3017520"/>
             <a:ext cx="640080" cy="640080"/>
           </a:xfrm>
           <a:prstGeom prst="roundRect">
@@ -8111,7 +8063,7 @@
         </p:nvSpPr>
         <p:spPr>
           <a:xfrm>
-            <a:off x="6309360" y="2866644"/>
+            <a:off x="6309360" y="3049524"/>
             <a:ext cx="640080" cy="576072"/>
           </a:xfrm>
           <a:prstGeom prst="rect">
@@ -8146,7 +8098,7 @@
         </p:nvSpPr>
         <p:spPr>
           <a:xfrm>
-            <a:off x="6263640" y="3611880"/>
+            <a:off x="6263640" y="3749039"/>
             <a:ext cx="2560320" cy="594360"/>
           </a:xfrm>
           <a:prstGeom prst="rect">
@@ -8162,7 +8114,7 @@
           <a:p>
             <a:pPr algn="l"/>
             <a:r>
-              <a:rPr sz="1400" b="1" i="0">
+              <a:rPr sz="1300" b="1" i="0">
                 <a:solidFill>
                   <a:srgbClr val="1A1A1A"/>
                 </a:solidFill>
@@ -8181,8 +8133,8 @@
         </p:nvSpPr>
         <p:spPr>
           <a:xfrm>
-            <a:off x="6263640" y="4251960"/>
-            <a:ext cx="2560320" cy="640080"/>
+            <a:off x="6263640" y="4370832"/>
+            <a:ext cx="2560320" cy="594360"/>
           </a:xfrm>
           <a:prstGeom prst="rect">
             <a:avLst/>
@@ -8197,7 +8149,7 @@
           <a:p>
             <a:pPr algn="l"/>
             <a:r>
-              <a:rPr sz="1100" b="0" i="0">
+              <a:rPr sz="1000" b="0" i="0">
                 <a:solidFill>
                   <a:srgbClr val="666666"/>
                 </a:solidFill>
@@ -10426,7 +10378,7 @@
       </p:sp>
       <p:pic>
         <p:nvPicPr>
-          <p:cNvPr id="52" name="Picture 51" descr="image.png"/>
+          <p:cNvPr id="52" name="Picture 51" descr="illust_yakuji.png"/>
           <p:cNvPicPr>
             <a:picLocks noChangeAspect="1"/>
           </p:cNvPicPr>
@@ -10440,8 +10392,8 @@
         </p:blipFill>
         <p:spPr>
           <a:xfrm>
-            <a:off x="6400800" y="1005840"/>
-            <a:ext cx="1188720" cy="1188720"/>
+            <a:off x="6217920" y="841248"/>
+            <a:ext cx="2651760" cy="2651760"/>
           </a:xfrm>
           <a:prstGeom prst="rect">
             <a:avLst/>
@@ -10451,75 +10403,6 @@
       <p:sp>
         <p:nvSpPr>
           <p:cNvPr id="53" name="Rounded Rectangle 52"/>
-          <p:cNvSpPr/>
-          <p:nvPr/>
-        </p:nvSpPr>
-        <p:spPr>
-          <a:xfrm>
-            <a:off x="6126480" y="914400"/>
-            <a:ext cx="2743200" cy="1417320"/>
-          </a:xfrm>
-          <a:prstGeom prst="roundRect">
-            <a:avLst/>
-          </a:prstGeom>
-          <a:solidFill>
-            <a:srgbClr val="FFECF5"/>
-          </a:solidFill>
-          <a:ln w="15240">
-            <a:solidFill>
-              <a:srgbClr val="FFD6EC"/>
-            </a:solidFill>
-          </a:ln>
-        </p:spPr>
-        <p:style>
-          <a:lnRef idx="1">
-            <a:schemeClr val="accent1"/>
-          </a:lnRef>
-          <a:fillRef idx="3">
-            <a:schemeClr val="accent1"/>
-          </a:fillRef>
-          <a:effectRef idx="2">
-            <a:schemeClr val="accent1"/>
-          </a:effectRef>
-          <a:fontRef idx="minor">
-            <a:schemeClr val="lt1"/>
-          </a:fontRef>
-        </p:style>
-        <p:txBody>
-          <a:bodyPr rtlCol="0" anchor="ctr"/>
-          <a:lstStyle/>
-          <a:p>
-            <a:pPr algn="ctr"/>
-          </a:p>
-        </p:txBody>
-      </p:sp>
-      <p:pic>
-        <p:nvPicPr>
-          <p:cNvPr id="54" name="Picture 53" descr="image.png"/>
-          <p:cNvPicPr>
-            <a:picLocks noChangeAspect="1"/>
-          </p:cNvPicPr>
-          <p:nvPr/>
-        </p:nvPicPr>
-        <p:blipFill>
-          <a:blip r:embed="rId2"/>
-          <a:stretch>
-            <a:fillRect/>
-          </a:stretch>
-        </p:blipFill>
-        <p:spPr>
-          <a:xfrm>
-            <a:off x="6903720" y="1005840"/>
-            <a:ext cx="1188720" cy="1188720"/>
-          </a:xfrm>
-          <a:prstGeom prst="rect">
-            <a:avLst/>
-          </a:prstGeom>
-        </p:spPr>
-      </p:pic>
-      <p:sp>
-        <p:nvSpPr>
-          <p:cNvPr id="55" name="Rounded Rectangle 54"/>
           <p:cNvSpPr/>
           <p:nvPr/>
         </p:nvSpPr>
@@ -10564,7 +10447,7 @@
       </p:sp>
       <p:sp>
         <p:nvSpPr>
-          <p:cNvPr id="56" name="TextBox 55"/>
+          <p:cNvPr id="54" name="TextBox 53"/>
           <p:cNvSpPr txBox="1"/>
           <p:nvPr/>
         </p:nvSpPr>
@@ -10626,33 +10509,9 @@
           </a:p>
         </p:txBody>
       </p:sp>
-      <p:pic>
-        <p:nvPicPr>
-          <p:cNvPr id="57" name="Picture 56" descr="image.png"/>
-          <p:cNvPicPr>
-            <a:picLocks noChangeAspect="1"/>
-          </p:cNvPicPr>
-          <p:nvPr/>
-        </p:nvPicPr>
-        <p:blipFill>
-          <a:blip r:embed="rId3"/>
-          <a:stretch>
-            <a:fillRect/>
-          </a:stretch>
-        </p:blipFill>
-        <p:spPr>
-          <a:xfrm>
-            <a:off x="8138160" y="2468880"/>
-            <a:ext cx="731520" cy="731520"/>
-          </a:xfrm>
-          <a:prstGeom prst="rect">
-            <a:avLst/>
-          </a:prstGeom>
-        </p:spPr>
-      </p:pic>
-      <p:sp>
-        <p:nvSpPr>
-          <p:cNvPr id="58" name="Rounded Rectangle 57"/>
+      <p:sp>
+        <p:nvSpPr>
+          <p:cNvPr id="55" name="Rounded Rectangle 54"/>
           <p:cNvSpPr/>
           <p:nvPr/>
         </p:nvSpPr>
@@ -10697,7 +10556,7 @@
       </p:sp>
       <p:sp>
         <p:nvSpPr>
-          <p:cNvPr id="59" name="TextBox 58"/>
+          <p:cNvPr id="56" name="TextBox 55"/>
           <p:cNvSpPr txBox="1"/>
           <p:nvPr/>
         </p:nvSpPr>
@@ -12821,7 +12680,7 @@
         <p:spPr>
           <a:xfrm>
             <a:off x="274320" y="914400"/>
-            <a:ext cx="8595360" cy="1097280"/>
+            <a:ext cx="7132320" cy="1097280"/>
           </a:xfrm>
           <a:prstGeom prst="roundRect">
             <a:avLst/>
@@ -12866,7 +12725,7 @@
         <p:spPr>
           <a:xfrm>
             <a:off x="438912" y="1078992"/>
-            <a:ext cx="8321040" cy="822960"/>
+            <a:ext cx="6858000" cy="822960"/>
           </a:xfrm>
           <a:prstGeom prst="rect">
             <a:avLst/>
@@ -12907,7 +12766,7 @@
       </p:sp>
       <p:pic>
         <p:nvPicPr>
-          <p:cNvPr id="52" name="Picture 51" descr="image.png"/>
+          <p:cNvPr id="52" name="Picture 51" descr="illust_ng_hyogen.png"/>
           <p:cNvPicPr>
             <a:picLocks noChangeAspect="1"/>
           </p:cNvPicPr>
@@ -12921,8 +12780,8 @@
         </p:blipFill>
         <p:spPr>
           <a:xfrm>
-            <a:off x="8138160" y="914400"/>
-            <a:ext cx="914400" cy="914400"/>
+            <a:off x="7223760" y="841248"/>
+            <a:ext cx="1645920" cy="2286000"/>
           </a:xfrm>
           <a:prstGeom prst="rect">
             <a:avLst/>
@@ -13102,7 +12961,7 @@
                 </a:solidFill>
                 <a:latin typeface="Hiragino Kaku Gothic ProN"/>
               </a:rPr>
-              <a:t>　　→  「日本一潤う！」→ 公的調査データ等の証拠が必要</a:t>
+              <a:t>　　→  「日本一潤う！」→ 公的調査データなどの証拠が必要</a:t>
             </a:r>
           </a:p>
         </p:txBody>
@@ -13319,30 +13178,6 @@
           </a:p>
         </p:txBody>
       </p:sp>
-      <p:pic>
-        <p:nvPicPr>
-          <p:cNvPr id="61" name="Picture 60" descr="image.png"/>
-          <p:cNvPicPr>
-            <a:picLocks noChangeAspect="1"/>
-          </p:cNvPicPr>
-          <p:nvPr/>
-        </p:nvPicPr>
-        <p:blipFill>
-          <a:blip r:embed="rId3"/>
-          <a:stretch>
-            <a:fillRect/>
-          </a:stretch>
-        </p:blipFill>
-        <p:spPr>
-          <a:xfrm>
-            <a:off x="8138160" y="3200400"/>
-            <a:ext cx="731520" cy="731520"/>
-          </a:xfrm>
-          <a:prstGeom prst="rect">
-            <a:avLst/>
-          </a:prstGeom>
-        </p:spPr>
-      </p:pic>
     </p:spTree>
   </p:cSld>
   <p:clrMapOvr>
@@ -15577,7 +15412,7 @@
         <p:spPr>
           <a:xfrm>
             <a:off x="274320" y="2377440"/>
-            <a:ext cx="8595360" cy="1188720"/>
+            <a:ext cx="7132320" cy="1188720"/>
           </a:xfrm>
           <a:prstGeom prst="roundRect">
             <a:avLst/>
@@ -15622,7 +15457,7 @@
         <p:spPr>
           <a:xfrm>
             <a:off x="438912" y="2542032"/>
-            <a:ext cx="8321040" cy="914399"/>
+            <a:ext cx="6858000" cy="914399"/>
           </a:xfrm>
           <a:prstGeom prst="rect">
             <a:avLst/>
@@ -15670,7 +15505,7 @@
       </p:sp>
       <p:pic>
         <p:nvPicPr>
-          <p:cNvPr id="54" name="Picture 53" descr="image.png"/>
+          <p:cNvPr id="54" name="Picture 53" descr="illust_ng_hyogen.png"/>
           <p:cNvPicPr>
             <a:picLocks noChangeAspect="1"/>
           </p:cNvPicPr>
@@ -15684,8 +15519,8 @@
         </p:blipFill>
         <p:spPr>
           <a:xfrm>
-            <a:off x="8138160" y="2423160"/>
-            <a:ext cx="731520" cy="731520"/>
+            <a:off x="7223760" y="2331720"/>
+            <a:ext cx="1645920" cy="1645920"/>
           </a:xfrm>
           <a:prstGeom prst="rect">
             <a:avLst/>
@@ -17954,33 +17789,9 @@
           </a:p>
         </p:txBody>
       </p:sp>
-      <p:pic>
-        <p:nvPicPr>
-          <p:cNvPr id="52" name="Picture 51" descr="image.png"/>
-          <p:cNvPicPr>
-            <a:picLocks noChangeAspect="1"/>
-          </p:cNvPicPr>
-          <p:nvPr/>
-        </p:nvPicPr>
-        <p:blipFill>
-          <a:blip r:embed="rId2"/>
-          <a:stretch>
-            <a:fillRect/>
-          </a:stretch>
-        </p:blipFill>
-        <p:spPr>
-          <a:xfrm>
-            <a:off x="8138160" y="868680"/>
-            <a:ext cx="731520" cy="731520"/>
-          </a:xfrm>
-          <a:prstGeom prst="rect">
-            <a:avLst/>
-          </a:prstGeom>
-        </p:spPr>
-      </p:pic>
-      <p:sp>
-        <p:nvSpPr>
-          <p:cNvPr id="53" name="Rounded Rectangle 52"/>
+      <p:sp>
+        <p:nvSpPr>
+          <p:cNvPr id="52" name="Rounded Rectangle 51"/>
           <p:cNvSpPr/>
           <p:nvPr/>
         </p:nvSpPr>
@@ -18025,7 +17836,7 @@
       </p:sp>
       <p:sp>
         <p:nvSpPr>
-          <p:cNvPr id="54" name="Rectangle 53"/>
+          <p:cNvPr id="53" name="Rectangle 52"/>
           <p:cNvSpPr/>
           <p:nvPr/>
         </p:nvSpPr>
@@ -18068,7 +17879,7 @@
       </p:sp>
       <p:sp>
         <p:nvSpPr>
-          <p:cNvPr id="55" name="TextBox 54"/>
+          <p:cNvPr id="54" name="TextBox 53"/>
           <p:cNvSpPr txBox="1"/>
           <p:nvPr/>
         </p:nvSpPr>
@@ -18103,7 +17914,7 @@
       </p:sp>
       <p:sp>
         <p:nvSpPr>
-          <p:cNvPr id="56" name="TextBox 55"/>
+          <p:cNvPr id="55" name="TextBox 54"/>
           <p:cNvSpPr txBox="1"/>
           <p:nvPr/>
         </p:nvSpPr>
@@ -18201,7 +18012,7 @@
       </p:sp>
       <p:sp>
         <p:nvSpPr>
-          <p:cNvPr id="57" name="Rounded Rectangle 56"/>
+          <p:cNvPr id="56" name="Rounded Rectangle 55"/>
           <p:cNvSpPr/>
           <p:nvPr/>
         </p:nvSpPr>
@@ -18246,7 +18057,7 @@
       </p:sp>
       <p:sp>
         <p:nvSpPr>
-          <p:cNvPr id="58" name="Rectangle 57"/>
+          <p:cNvPr id="57" name="Rectangle 56"/>
           <p:cNvSpPr/>
           <p:nvPr/>
         </p:nvSpPr>
@@ -18289,7 +18100,7 @@
       </p:sp>
       <p:sp>
         <p:nvSpPr>
-          <p:cNvPr id="59" name="TextBox 58"/>
+          <p:cNvPr id="58" name="TextBox 57"/>
           <p:cNvSpPr txBox="1"/>
           <p:nvPr/>
         </p:nvSpPr>
@@ -18324,7 +18135,7 @@
       </p:sp>
       <p:sp>
         <p:nvSpPr>
-          <p:cNvPr id="60" name="TextBox 59"/>
+          <p:cNvPr id="59" name="TextBox 58"/>
           <p:cNvSpPr txBox="1"/>
           <p:nvPr/>
         </p:nvSpPr>
@@ -18419,22 +18230,22 @@
       </p:sp>
       <p:pic>
         <p:nvPicPr>
-          <p:cNvPr id="61" name="Picture 60" descr="image.png"/>
+          <p:cNvPr id="60" name="Picture 59" descr="illust_yakuji.png"/>
           <p:cNvPicPr>
             <a:picLocks noChangeAspect="1"/>
           </p:cNvPicPr>
           <p:nvPr/>
         </p:nvPicPr>
         <p:blipFill>
-          <a:blip r:embed="rId3"/>
+          <a:blip r:embed="rId2"/>
           <a:stretch>
             <a:fillRect/>
           </a:stretch>
         </p:blipFill>
         <p:spPr>
           <a:xfrm>
-            <a:off x="8092440" y="3108960"/>
-            <a:ext cx="777240" cy="777240"/>
+            <a:off x="8138160" y="3017520"/>
+            <a:ext cx="822960" cy="822960"/>
           </a:xfrm>
           <a:prstGeom prst="rect">
             <a:avLst/>
@@ -21255,7 +21066,7 @@
       </p:sp>
       <p:pic>
         <p:nvPicPr>
-          <p:cNvPr id="6" name="Picture 5" descr="image.png"/>
+          <p:cNvPr id="6" name="Picture 5" descr="illust_copyright.png"/>
           <p:cNvPicPr>
             <a:picLocks noChangeAspect="1"/>
           </p:cNvPicPr>
@@ -21269,8 +21080,8 @@
         </p:blipFill>
         <p:spPr>
           <a:xfrm>
-            <a:off x="7772400" y="3291840"/>
-            <a:ext cx="1097280" cy="1097280"/>
+            <a:off x="182880" y="1097280"/>
+            <a:ext cx="2468880" cy="2468880"/>
           </a:xfrm>
           <a:prstGeom prst="rect">
             <a:avLst/>
@@ -23406,7 +23217,7 @@
       </p:sp>
       <p:pic>
         <p:nvPicPr>
-          <p:cNvPr id="51" name="Picture 50" descr="image.png"/>
+          <p:cNvPr id="51" name="Picture 50" descr="illust_copyright.png"/>
           <p:cNvPicPr>
             <a:picLocks noChangeAspect="1"/>
           </p:cNvPicPr>
@@ -23420,8 +23231,8 @@
         </p:blipFill>
         <p:spPr>
           <a:xfrm>
-            <a:off x="1005840" y="1097280"/>
-            <a:ext cx="1188720" cy="1188720"/>
+            <a:off x="548640" y="1051560"/>
+            <a:ext cx="2103120" cy="1920240"/>
           </a:xfrm>
           <a:prstGeom prst="rect">
             <a:avLst/>
@@ -23436,7 +23247,7 @@
         </p:nvSpPr>
         <p:spPr>
           <a:xfrm>
-            <a:off x="365760" y="2834640"/>
+            <a:off x="365760" y="3017520"/>
             <a:ext cx="640080" cy="640080"/>
           </a:xfrm>
           <a:prstGeom prst="roundRect">
@@ -23479,7 +23290,7 @@
         </p:nvSpPr>
         <p:spPr>
           <a:xfrm>
-            <a:off x="365760" y="2866644"/>
+            <a:off x="365760" y="3049524"/>
             <a:ext cx="640080" cy="576072"/>
           </a:xfrm>
           <a:prstGeom prst="rect">
@@ -23514,7 +23325,7 @@
         </p:nvSpPr>
         <p:spPr>
           <a:xfrm>
-            <a:off x="320040" y="3611880"/>
+            <a:off x="320040" y="3749039"/>
             <a:ext cx="2560320" cy="594360"/>
           </a:xfrm>
           <a:prstGeom prst="rect">
@@ -23530,7 +23341,7 @@
           <a:p>
             <a:pPr algn="l"/>
             <a:r>
-              <a:rPr sz="1400" b="1" i="0">
+              <a:rPr sz="1300" b="1" i="0">
                 <a:solidFill>
                   <a:srgbClr val="1A1A1A"/>
                 </a:solidFill>
@@ -23549,8 +23360,8 @@
         </p:nvSpPr>
         <p:spPr>
           <a:xfrm>
-            <a:off x="320040" y="4251960"/>
-            <a:ext cx="2560320" cy="640080"/>
+            <a:off x="320040" y="4370832"/>
+            <a:ext cx="2560320" cy="594360"/>
           </a:xfrm>
           <a:prstGeom prst="rect">
             <a:avLst/>
@@ -23565,7 +23376,7 @@
           <a:p>
             <a:pPr algn="l"/>
             <a:r>
-              <a:rPr sz="1100" b="0" i="0">
+              <a:rPr sz="1000" b="0" i="0">
                 <a:solidFill>
                   <a:srgbClr val="666666"/>
                 </a:solidFill>
@@ -23623,7 +23434,7 @@
       </p:sp>
       <p:pic>
         <p:nvPicPr>
-          <p:cNvPr id="57" name="Picture 56" descr="image.png"/>
+          <p:cNvPr id="57" name="Picture 56" descr="illust_music.png"/>
           <p:cNvPicPr>
             <a:picLocks noChangeAspect="1"/>
           </p:cNvPicPr>
@@ -23637,8 +23448,8 @@
         </p:blipFill>
         <p:spPr>
           <a:xfrm>
-            <a:off x="3977639" y="1097280"/>
-            <a:ext cx="1188720" cy="1188720"/>
+            <a:off x="3520440" y="1051560"/>
+            <a:ext cx="2103120" cy="1920240"/>
           </a:xfrm>
           <a:prstGeom prst="rect">
             <a:avLst/>
@@ -23653,7 +23464,7 @@
         </p:nvSpPr>
         <p:spPr>
           <a:xfrm>
-            <a:off x="3337560" y="2834640"/>
+            <a:off x="3337560" y="3017520"/>
             <a:ext cx="640080" cy="640080"/>
           </a:xfrm>
           <a:prstGeom prst="roundRect">
@@ -23696,7 +23507,7 @@
         </p:nvSpPr>
         <p:spPr>
           <a:xfrm>
-            <a:off x="3337560" y="2866644"/>
+            <a:off x="3337560" y="3049524"/>
             <a:ext cx="640080" cy="576072"/>
           </a:xfrm>
           <a:prstGeom prst="rect">
@@ -23731,7 +23542,7 @@
         </p:nvSpPr>
         <p:spPr>
           <a:xfrm>
-            <a:off x="3291840" y="3611880"/>
+            <a:off x="3291840" y="3749039"/>
             <a:ext cx="2560320" cy="594360"/>
           </a:xfrm>
           <a:prstGeom prst="rect">
@@ -23747,7 +23558,7 @@
           <a:p>
             <a:pPr algn="l"/>
             <a:r>
-              <a:rPr sz="1400" b="1" i="0">
+              <a:rPr sz="1300" b="1" i="0">
                 <a:solidFill>
                   <a:srgbClr val="1A1A1A"/>
                 </a:solidFill>
@@ -23766,8 +23577,8 @@
         </p:nvSpPr>
         <p:spPr>
           <a:xfrm>
-            <a:off x="3291840" y="4251960"/>
-            <a:ext cx="2560320" cy="640080"/>
+            <a:off x="3291840" y="4370832"/>
+            <a:ext cx="2560320" cy="594360"/>
           </a:xfrm>
           <a:prstGeom prst="rect">
             <a:avLst/>
@@ -23782,7 +23593,7 @@
           <a:p>
             <a:pPr algn="l"/>
             <a:r>
-              <a:rPr sz="1100" b="0" i="0">
+              <a:rPr sz="1000" b="0" i="0">
                 <a:solidFill>
                   <a:srgbClr val="666666"/>
                 </a:solidFill>
@@ -23840,7 +23651,7 @@
       </p:sp>
       <p:pic>
         <p:nvPicPr>
-          <p:cNvPr id="63" name="Picture 62" descr="image.png"/>
+          <p:cNvPr id="63" name="Picture 62" descr="illust_tieup.png"/>
           <p:cNvPicPr>
             <a:picLocks noChangeAspect="1"/>
           </p:cNvPicPr>
@@ -23854,8 +23665,8 @@
         </p:blipFill>
         <p:spPr>
           <a:xfrm>
-            <a:off x="6949440" y="1097280"/>
-            <a:ext cx="1188720" cy="1188720"/>
+            <a:off x="6492240" y="1051560"/>
+            <a:ext cx="2103120" cy="1920240"/>
           </a:xfrm>
           <a:prstGeom prst="rect">
             <a:avLst/>
@@ -23870,7 +23681,7 @@
         </p:nvSpPr>
         <p:spPr>
           <a:xfrm>
-            <a:off x="6309360" y="2834640"/>
+            <a:off x="6309360" y="3017520"/>
             <a:ext cx="640080" cy="640080"/>
           </a:xfrm>
           <a:prstGeom prst="roundRect">
@@ -23913,7 +23724,7 @@
         </p:nvSpPr>
         <p:spPr>
           <a:xfrm>
-            <a:off x="6309360" y="2866644"/>
+            <a:off x="6309360" y="3049524"/>
             <a:ext cx="640080" cy="576072"/>
           </a:xfrm>
           <a:prstGeom prst="rect">
@@ -23948,7 +23759,7 @@
         </p:nvSpPr>
         <p:spPr>
           <a:xfrm>
-            <a:off x="6263640" y="3611880"/>
+            <a:off x="6263640" y="3749039"/>
             <a:ext cx="2560320" cy="594360"/>
           </a:xfrm>
           <a:prstGeom prst="rect">
@@ -23964,7 +23775,7 @@
           <a:p>
             <a:pPr algn="l"/>
             <a:r>
-              <a:rPr sz="1400" b="1" i="0">
+              <a:rPr sz="1300" b="1" i="0">
                 <a:solidFill>
                   <a:srgbClr val="1A1A1A"/>
                 </a:solidFill>
@@ -23983,8 +23794,8 @@
         </p:nvSpPr>
         <p:spPr>
           <a:xfrm>
-            <a:off x="6263640" y="4251960"/>
-            <a:ext cx="2560320" cy="640080"/>
+            <a:off x="6263640" y="4370832"/>
+            <a:ext cx="2560320" cy="594360"/>
           </a:xfrm>
           <a:prstGeom prst="rect">
             <a:avLst/>
@@ -23999,7 +23810,7 @@
           <a:p>
             <a:pPr algn="l"/>
             <a:r>
-              <a:rPr sz="1100" b="0" i="0">
+              <a:rPr sz="1000" b="0" i="0">
                 <a:solidFill>
                   <a:srgbClr val="666666"/>
                 </a:solidFill>
@@ -26101,7 +25912,7 @@
         <p:spPr>
           <a:xfrm>
             <a:off x="274320" y="914400"/>
-            <a:ext cx="8595360" cy="868680"/>
+            <a:ext cx="6217920" cy="868680"/>
           </a:xfrm>
           <a:prstGeom prst="roundRect">
             <a:avLst/>
@@ -26146,7 +25957,7 @@
         <p:spPr>
           <a:xfrm>
             <a:off x="438912" y="1078992"/>
-            <a:ext cx="8321040" cy="594360"/>
+            <a:ext cx="5943600" cy="594360"/>
           </a:xfrm>
           <a:prstGeom prst="rect">
             <a:avLst/>
@@ -26176,9 +25987,33 @@
           </a:p>
         </p:txBody>
       </p:sp>
-      <p:sp>
-        <p:nvSpPr>
-          <p:cNvPr id="52" name="Rounded Rectangle 51"/>
+      <p:pic>
+        <p:nvPicPr>
+          <p:cNvPr id="52" name="Picture 51" descr="illust_copyright.png"/>
+          <p:cNvPicPr>
+            <a:picLocks noChangeAspect="1"/>
+          </p:cNvPicPr>
+          <p:nvPr/>
+        </p:nvPicPr>
+        <p:blipFill>
+          <a:blip r:embed="rId2"/>
+          <a:stretch>
+            <a:fillRect/>
+          </a:stretch>
+        </p:blipFill>
+        <p:spPr>
+          <a:xfrm>
+            <a:off x="6583680" y="822960"/>
+            <a:ext cx="2286000" cy="2286000"/>
+          </a:xfrm>
+          <a:prstGeom prst="rect">
+            <a:avLst/>
+          </a:prstGeom>
+        </p:spPr>
+      </p:pic>
+      <p:sp>
+        <p:nvSpPr>
+          <p:cNvPr id="53" name="Rounded Rectangle 52"/>
           <p:cNvSpPr/>
           <p:nvPr/>
         </p:nvSpPr>
@@ -26223,7 +26058,7 @@
       </p:sp>
       <p:sp>
         <p:nvSpPr>
-          <p:cNvPr id="53" name="Rectangle 52"/>
+          <p:cNvPr id="54" name="Rectangle 53"/>
           <p:cNvSpPr/>
           <p:nvPr/>
         </p:nvSpPr>
@@ -26266,7 +26101,7 @@
       </p:sp>
       <p:sp>
         <p:nvSpPr>
-          <p:cNvPr id="54" name="TextBox 53"/>
+          <p:cNvPr id="55" name="TextBox 54"/>
           <p:cNvSpPr txBox="1"/>
           <p:nvPr/>
         </p:nvSpPr>
@@ -26301,7 +26136,7 @@
       </p:sp>
       <p:sp>
         <p:nvSpPr>
-          <p:cNvPr id="55" name="TextBox 54"/>
+          <p:cNvPr id="56" name="TextBox 55"/>
           <p:cNvSpPr txBox="1"/>
           <p:nvPr/>
         </p:nvSpPr>
@@ -26394,30 +26229,6 @@
           </a:p>
         </p:txBody>
       </p:sp>
-      <p:pic>
-        <p:nvPicPr>
-          <p:cNvPr id="56" name="Picture 55" descr="image.png"/>
-          <p:cNvPicPr>
-            <a:picLocks noChangeAspect="1"/>
-          </p:cNvPicPr>
-          <p:nvPr/>
-        </p:nvPicPr>
-        <p:blipFill>
-          <a:blip r:embed="rId2"/>
-          <a:stretch>
-            <a:fillRect/>
-          </a:stretch>
-        </p:blipFill>
-        <p:spPr>
-          <a:xfrm>
-            <a:off x="8138160" y="1920240"/>
-            <a:ext cx="777240" cy="777240"/>
-          </a:xfrm>
-          <a:prstGeom prst="rect">
-            <a:avLst/>
-          </a:prstGeom>
-        </p:spPr>
-      </p:pic>
       <p:sp>
         <p:nvSpPr>
           <p:cNvPr id="57" name="Rounded Rectangle 56"/>
@@ -28589,7 +28400,7 @@
         <p:spPr>
           <a:xfrm>
             <a:off x="274320" y="914400"/>
-            <a:ext cx="8595360" cy="1005840"/>
+            <a:ext cx="6858000" cy="1005840"/>
           </a:xfrm>
           <a:prstGeom prst="roundRect">
             <a:avLst/>
@@ -28634,7 +28445,7 @@
         <p:spPr>
           <a:xfrm>
             <a:off x="438912" y="1078992"/>
-            <a:ext cx="8321040" cy="731520"/>
+            <a:ext cx="6583680" cy="731520"/>
           </a:xfrm>
           <a:prstGeom prst="rect">
             <a:avLst/>
@@ -28691,7 +28502,7 @@
       </p:sp>
       <p:pic>
         <p:nvPicPr>
-          <p:cNvPr id="52" name="Picture 51" descr="image.png"/>
+          <p:cNvPr id="52" name="Picture 51" descr="illust_music.png"/>
           <p:cNvPicPr>
             <a:picLocks noChangeAspect="1"/>
           </p:cNvPicPr>
@@ -28705,8 +28516,8 @@
         </p:blipFill>
         <p:spPr>
           <a:xfrm>
-            <a:off x="8138160" y="868680"/>
-            <a:ext cx="777240" cy="777240"/>
+            <a:off x="6949440" y="841248"/>
+            <a:ext cx="1920240" cy="2560320"/>
           </a:xfrm>
           <a:prstGeom prst="rect">
             <a:avLst/>
@@ -29118,30 +28929,6 @@
           </a:p>
         </p:txBody>
       </p:sp>
-      <p:pic>
-        <p:nvPicPr>
-          <p:cNvPr id="61" name="Picture 60" descr="image.png"/>
-          <p:cNvPicPr>
-            <a:picLocks noChangeAspect="1"/>
-          </p:cNvPicPr>
-          <p:nvPr/>
-        </p:nvPicPr>
-        <p:blipFill>
-          <a:blip r:embed="rId3"/>
-          <a:stretch>
-            <a:fillRect/>
-          </a:stretch>
-        </p:blipFill>
-        <p:spPr>
-          <a:xfrm>
-            <a:off x="8092440" y="3200400"/>
-            <a:ext cx="777240" cy="777240"/>
-          </a:xfrm>
-          <a:prstGeom prst="rect">
-            <a:avLst/>
-          </a:prstGeom>
-        </p:spPr>
-      </p:pic>
     </p:spTree>
   </p:cSld>
   <p:clrMapOvr>
@@ -29320,7 +29107,7 @@
       </p:sp>
       <p:pic>
         <p:nvPicPr>
-          <p:cNvPr id="6" name="Picture 5" descr="image.png"/>
+          <p:cNvPr id="6" name="Picture 5" descr="illust_stema.png"/>
           <p:cNvPicPr>
             <a:picLocks noChangeAspect="1"/>
           </p:cNvPicPr>
@@ -29334,8 +29121,8 @@
         </p:blipFill>
         <p:spPr>
           <a:xfrm>
-            <a:off x="7772400" y="3291840"/>
-            <a:ext cx="1097280" cy="1097280"/>
+            <a:off x="182880" y="1097280"/>
+            <a:ext cx="2468880" cy="2468880"/>
           </a:xfrm>
           <a:prstGeom prst="rect">
             <a:avLst/>
@@ -31433,7 +31220,7 @@
         <p:spPr>
           <a:xfrm>
             <a:off x="274320" y="914400"/>
-            <a:ext cx="8595360" cy="1005840"/>
+            <a:ext cx="6858000" cy="1005840"/>
           </a:xfrm>
           <a:prstGeom prst="roundRect">
             <a:avLst/>
@@ -31478,7 +31265,7 @@
         <p:spPr>
           <a:xfrm>
             <a:off x="438912" y="1078992"/>
-            <a:ext cx="8321040" cy="731520"/>
+            <a:ext cx="6583680" cy="731520"/>
           </a:xfrm>
           <a:prstGeom prst="rect">
             <a:avLst/>
@@ -31532,7 +31319,7 @@
       </p:sp>
       <p:pic>
         <p:nvPicPr>
-          <p:cNvPr id="52" name="Picture 51" descr="image.png"/>
+          <p:cNvPr id="52" name="Picture 51" descr="illust_tieup.png"/>
           <p:cNvPicPr>
             <a:picLocks noChangeAspect="1"/>
           </p:cNvPicPr>
@@ -31546,8 +31333,8 @@
         </p:blipFill>
         <p:spPr>
           <a:xfrm>
-            <a:off x="8138160" y="868680"/>
-            <a:ext cx="777240" cy="777240"/>
+            <a:off x="6949440" y="841248"/>
+            <a:ext cx="1920240" cy="2560320"/>
           </a:xfrm>
           <a:prstGeom prst="rect">
             <a:avLst/>
@@ -34011,7 +33798,7 @@
         <p:spPr>
           <a:xfrm>
             <a:off x="274320" y="1920240"/>
-            <a:ext cx="8595360" cy="2240280"/>
+            <a:ext cx="6858000" cy="2240280"/>
           </a:xfrm>
           <a:prstGeom prst="roundRect">
             <a:avLst/>
@@ -34056,7 +33843,7 @@
         <p:spPr>
           <a:xfrm>
             <a:off x="274320" y="1920240"/>
-            <a:ext cx="8595360" cy="384048"/>
+            <a:ext cx="6858000" cy="384048"/>
           </a:xfrm>
           <a:prstGeom prst="rect">
             <a:avLst/>
@@ -34099,7 +33886,7 @@
         <p:spPr>
           <a:xfrm>
             <a:off x="411479" y="1947672"/>
-            <a:ext cx="8321040" cy="347472"/>
+            <a:ext cx="6583680" cy="347472"/>
           </a:xfrm>
           <a:prstGeom prst="rect">
             <a:avLst/>
@@ -34134,7 +33921,7 @@
         <p:spPr>
           <a:xfrm>
             <a:off x="438912" y="2377440"/>
-            <a:ext cx="8321040" cy="1673352"/>
+            <a:ext cx="6583680" cy="1673352"/>
           </a:xfrm>
           <a:prstGeom prst="rect">
             <a:avLst/>
@@ -34250,7 +34037,7 @@
       </p:sp>
       <p:pic>
         <p:nvPicPr>
-          <p:cNvPr id="56" name="Picture 55" descr="image.png"/>
+          <p:cNvPr id="56" name="Picture 55" descr="illust_risk.png"/>
           <p:cNvPicPr>
             <a:picLocks noChangeAspect="1"/>
           </p:cNvPicPr>
@@ -34264,8 +34051,8 @@
         </p:blipFill>
         <p:spPr>
           <a:xfrm>
-            <a:off x="8138160" y="1965960"/>
-            <a:ext cx="777240" cy="777240"/>
+            <a:off x="6949440" y="1920240"/>
+            <a:ext cx="1920240" cy="1920240"/>
           </a:xfrm>
           <a:prstGeom prst="rect">
             <a:avLst/>
@@ -37166,7 +36953,7 @@
       </p:sp>
       <p:pic>
         <p:nvPicPr>
-          <p:cNvPr id="6" name="Picture 5" descr="image.png"/>
+          <p:cNvPr id="6" name="Picture 5" descr="illust_kyogai.png"/>
           <p:cNvPicPr>
             <a:picLocks noChangeAspect="1"/>
           </p:cNvPicPr>
@@ -37180,8 +36967,8 @@
         </p:blipFill>
         <p:spPr>
           <a:xfrm>
-            <a:off x="7772400" y="3291840"/>
-            <a:ext cx="1097280" cy="1097280"/>
+            <a:off x="182880" y="1097280"/>
+            <a:ext cx="2468880" cy="2468880"/>
           </a:xfrm>
           <a:prstGeom prst="rect">
             <a:avLst/>
@@ -39317,7 +39104,7 @@
       </p:sp>
       <p:pic>
         <p:nvPicPr>
-          <p:cNvPr id="51" name="Picture 50" descr="image.png"/>
+          <p:cNvPr id="51" name="Picture 50" descr="illust_stema.png"/>
           <p:cNvPicPr>
             <a:picLocks noChangeAspect="1"/>
           </p:cNvPicPr>
@@ -39331,8 +39118,8 @@
         </p:blipFill>
         <p:spPr>
           <a:xfrm>
-            <a:off x="1005840" y="1097280"/>
-            <a:ext cx="1188720" cy="1188720"/>
+            <a:off x="548640" y="1051560"/>
+            <a:ext cx="2103120" cy="1920240"/>
           </a:xfrm>
           <a:prstGeom prst="rect">
             <a:avLst/>
@@ -39347,7 +39134,7 @@
         </p:nvSpPr>
         <p:spPr>
           <a:xfrm>
-            <a:off x="365760" y="2834640"/>
+            <a:off x="365760" y="3017520"/>
             <a:ext cx="640080" cy="640080"/>
           </a:xfrm>
           <a:prstGeom prst="roundRect">
@@ -39390,7 +39177,7 @@
         </p:nvSpPr>
         <p:spPr>
           <a:xfrm>
-            <a:off x="365760" y="2866644"/>
+            <a:off x="365760" y="3049524"/>
             <a:ext cx="640080" cy="576072"/>
           </a:xfrm>
           <a:prstGeom prst="rect">
@@ -39425,7 +39212,7 @@
         </p:nvSpPr>
         <p:spPr>
           <a:xfrm>
-            <a:off x="320040" y="3611880"/>
+            <a:off x="320040" y="3749039"/>
             <a:ext cx="2560320" cy="594360"/>
           </a:xfrm>
           <a:prstGeom prst="rect">
@@ -39441,7 +39228,7 @@
           <a:p>
             <a:pPr algn="l"/>
             <a:r>
-              <a:rPr sz="1400" b="1" i="0">
+              <a:rPr sz="1300" b="1" i="0">
                 <a:solidFill>
                   <a:srgbClr val="1A1A1A"/>
                 </a:solidFill>
@@ -39460,8 +39247,8 @@
         </p:nvSpPr>
         <p:spPr>
           <a:xfrm>
-            <a:off x="320040" y="4251960"/>
-            <a:ext cx="2560320" cy="640080"/>
+            <a:off x="320040" y="4370832"/>
+            <a:ext cx="2560320" cy="594360"/>
           </a:xfrm>
           <a:prstGeom prst="rect">
             <a:avLst/>
@@ -39476,7 +39263,7 @@
           <a:p>
             <a:pPr algn="l"/>
             <a:r>
-              <a:rPr sz="1100" b="0" i="0">
+              <a:rPr sz="1000" b="0" i="0">
                 <a:solidFill>
                   <a:srgbClr val="666666"/>
                 </a:solidFill>
@@ -39534,7 +39321,7 @@
       </p:sp>
       <p:pic>
         <p:nvPicPr>
-          <p:cNvPr id="57" name="Picture 56" descr="image.png"/>
+          <p:cNvPr id="57" name="Picture 56" descr="illust_kyogai.png"/>
           <p:cNvPicPr>
             <a:picLocks noChangeAspect="1"/>
           </p:cNvPicPr>
@@ -39548,8 +39335,8 @@
         </p:blipFill>
         <p:spPr>
           <a:xfrm>
-            <a:off x="3977639" y="1097280"/>
-            <a:ext cx="1188720" cy="1188720"/>
+            <a:off x="3520440" y="1051560"/>
+            <a:ext cx="2103120" cy="1920240"/>
           </a:xfrm>
           <a:prstGeom prst="rect">
             <a:avLst/>
@@ -39564,7 +39351,7 @@
         </p:nvSpPr>
         <p:spPr>
           <a:xfrm>
-            <a:off x="3337560" y="2834640"/>
+            <a:off x="3337560" y="3017520"/>
             <a:ext cx="640080" cy="640080"/>
           </a:xfrm>
           <a:prstGeom prst="roundRect">
@@ -39607,7 +39394,7 @@
         </p:nvSpPr>
         <p:spPr>
           <a:xfrm>
-            <a:off x="3337560" y="2866644"/>
+            <a:off x="3337560" y="3049524"/>
             <a:ext cx="640080" cy="576072"/>
           </a:xfrm>
           <a:prstGeom prst="rect">
@@ -39642,7 +39429,7 @@
         </p:nvSpPr>
         <p:spPr>
           <a:xfrm>
-            <a:off x="3291840" y="3611880"/>
+            <a:off x="3291840" y="3749039"/>
             <a:ext cx="2560320" cy="594360"/>
           </a:xfrm>
           <a:prstGeom prst="rect">
@@ -39658,7 +39445,7 @@
           <a:p>
             <a:pPr algn="l"/>
             <a:r>
-              <a:rPr sz="1400" b="1" i="0">
+              <a:rPr sz="1300" b="1" i="0">
                 <a:solidFill>
                   <a:srgbClr val="1A1A1A"/>
                 </a:solidFill>
@@ -39677,8 +39464,8 @@
         </p:nvSpPr>
         <p:spPr>
           <a:xfrm>
-            <a:off x="3291840" y="4251960"/>
-            <a:ext cx="2560320" cy="640080"/>
+            <a:off x="3291840" y="4370832"/>
+            <a:ext cx="2560320" cy="594360"/>
           </a:xfrm>
           <a:prstGeom prst="rect">
             <a:avLst/>
@@ -39693,7 +39480,7 @@
           <a:p>
             <a:pPr algn="l"/>
             <a:r>
-              <a:rPr sz="1100" b="0" i="0">
+              <a:rPr sz="1000" b="0" i="0">
                 <a:solidFill>
                   <a:srgbClr val="666666"/>
                 </a:solidFill>
@@ -39751,7 +39538,7 @@
       </p:sp>
       <p:pic>
         <p:nvPicPr>
-          <p:cNvPr id="63" name="Picture 62" descr="image.png"/>
+          <p:cNvPr id="63" name="Picture 62" descr="illust_shield.png"/>
           <p:cNvPicPr>
             <a:picLocks noChangeAspect="1"/>
           </p:cNvPicPr>
@@ -39765,8 +39552,8 @@
         </p:blipFill>
         <p:spPr>
           <a:xfrm>
-            <a:off x="6949440" y="1097280"/>
-            <a:ext cx="1188720" cy="1188720"/>
+            <a:off x="6492240" y="1051560"/>
+            <a:ext cx="2103120" cy="1920240"/>
           </a:xfrm>
           <a:prstGeom prst="rect">
             <a:avLst/>
@@ -39781,7 +39568,7 @@
         </p:nvSpPr>
         <p:spPr>
           <a:xfrm>
-            <a:off x="6309360" y="2834640"/>
+            <a:off x="6309360" y="3017520"/>
             <a:ext cx="640080" cy="640080"/>
           </a:xfrm>
           <a:prstGeom prst="roundRect">
@@ -39824,7 +39611,7 @@
         </p:nvSpPr>
         <p:spPr>
           <a:xfrm>
-            <a:off x="6309360" y="2866644"/>
+            <a:off x="6309360" y="3049524"/>
             <a:ext cx="640080" cy="576072"/>
           </a:xfrm>
           <a:prstGeom prst="rect">
@@ -39859,7 +39646,7 @@
         </p:nvSpPr>
         <p:spPr>
           <a:xfrm>
-            <a:off x="6263640" y="3611880"/>
+            <a:off x="6263640" y="3749039"/>
             <a:ext cx="2560320" cy="594360"/>
           </a:xfrm>
           <a:prstGeom prst="rect">
@@ -39875,7 +39662,7 @@
           <a:p>
             <a:pPr algn="l"/>
             <a:r>
-              <a:rPr sz="1400" b="1" i="0">
+              <a:rPr sz="1300" b="1" i="0">
                 <a:solidFill>
                   <a:srgbClr val="1A1A1A"/>
                 </a:solidFill>
@@ -39894,8 +39681,8 @@
         </p:nvSpPr>
         <p:spPr>
           <a:xfrm>
-            <a:off x="6263640" y="4251960"/>
-            <a:ext cx="2560320" cy="640080"/>
+            <a:off x="6263640" y="4370832"/>
+            <a:ext cx="2560320" cy="594360"/>
           </a:xfrm>
           <a:prstGeom prst="rect">
             <a:avLst/>
@@ -39910,7 +39697,7 @@
           <a:p>
             <a:pPr algn="l"/>
             <a:r>
-              <a:rPr sz="1100" b="0" i="0">
+              <a:rPr sz="1000" b="0" i="0">
                 <a:solidFill>
                   <a:srgbClr val="666666"/>
                 </a:solidFill>
@@ -42012,7 +41799,7 @@
         <p:spPr>
           <a:xfrm>
             <a:off x="274320" y="914400"/>
-            <a:ext cx="8595360" cy="3246120"/>
+            <a:ext cx="6858000" cy="3246120"/>
           </a:xfrm>
           <a:prstGeom prst="roundRect">
             <a:avLst/>
@@ -42057,7 +41844,7 @@
         <p:spPr>
           <a:xfrm>
             <a:off x="438912" y="1078992"/>
-            <a:ext cx="8321040" cy="2971800"/>
+            <a:ext cx="6583680" cy="2971800"/>
           </a:xfrm>
           <a:prstGeom prst="rect">
             <a:avLst/>
@@ -42189,7 +41976,7 @@
       </p:sp>
       <p:pic>
         <p:nvPicPr>
-          <p:cNvPr id="52" name="Picture 51" descr="image.png"/>
+          <p:cNvPr id="52" name="Picture 51" descr="illust_stema.png"/>
           <p:cNvPicPr>
             <a:picLocks noChangeAspect="1"/>
           </p:cNvPicPr>
@@ -42203,8 +41990,8 @@
         </p:blipFill>
         <p:spPr>
           <a:xfrm>
-            <a:off x="8138160" y="960120"/>
-            <a:ext cx="822960" cy="822960"/>
+            <a:off x="6949440" y="914400"/>
+            <a:ext cx="1920240" cy="2286000"/>
           </a:xfrm>
           <a:prstGeom prst="rect">
             <a:avLst/>
@@ -44302,7 +44089,7 @@
         <p:spPr>
           <a:xfrm>
             <a:off x="274320" y="914400"/>
-            <a:ext cx="8595360" cy="1325880"/>
+            <a:ext cx="6400800" cy="1325880"/>
           </a:xfrm>
           <a:prstGeom prst="roundRect">
             <a:avLst/>
@@ -44347,7 +44134,7 @@
         <p:spPr>
           <a:xfrm>
             <a:off x="438912" y="1078992"/>
-            <a:ext cx="8321040" cy="1051560"/>
+            <a:ext cx="6126480" cy="1051560"/>
           </a:xfrm>
           <a:prstGeom prst="rect">
             <a:avLst/>
@@ -44395,7 +44182,7 @@
       </p:sp>
       <p:pic>
         <p:nvPicPr>
-          <p:cNvPr id="52" name="Picture 51" descr="image.png"/>
+          <p:cNvPr id="52" name="Picture 51" descr="illust_kyogai.png"/>
           <p:cNvPicPr>
             <a:picLocks noChangeAspect="1"/>
           </p:cNvPicPr>
@@ -44409,8 +44196,8 @@
         </p:blipFill>
         <p:spPr>
           <a:xfrm>
-            <a:off x="8138160" y="960120"/>
-            <a:ext cx="822960" cy="822960"/>
+            <a:off x="6492240" y="841248"/>
+            <a:ext cx="2377440" cy="3200400"/>
           </a:xfrm>
           <a:prstGeom prst="rect">
             <a:avLst/>
@@ -44426,7 +44213,7 @@
         <p:spPr>
           <a:xfrm>
             <a:off x="274320" y="2331720"/>
-            <a:ext cx="8595360" cy="1645920"/>
+            <a:ext cx="6217920" cy="1645920"/>
           </a:xfrm>
           <a:prstGeom prst="roundRect">
             <a:avLst/>
@@ -44471,7 +44258,7 @@
         <p:spPr>
           <a:xfrm>
             <a:off x="274320" y="2331720"/>
-            <a:ext cx="8595360" cy="384048"/>
+            <a:ext cx="6217920" cy="384048"/>
           </a:xfrm>
           <a:prstGeom prst="rect">
             <a:avLst/>
@@ -44514,7 +44301,7 @@
         <p:spPr>
           <a:xfrm>
             <a:off x="411479" y="2359151"/>
-            <a:ext cx="8321040" cy="347472"/>
+            <a:ext cx="5943600" cy="347472"/>
           </a:xfrm>
           <a:prstGeom prst="rect">
             <a:avLst/>
@@ -44549,7 +44336,7 @@
         <p:spPr>
           <a:xfrm>
             <a:off x="438912" y="2788920"/>
-            <a:ext cx="8321040" cy="1078992"/>
+            <a:ext cx="5943600" cy="1078992"/>
           </a:xfrm>
           <a:prstGeom prst="rect">
             <a:avLst/>
@@ -46862,7 +46649,7 @@
       </p:sp>
       <p:pic>
         <p:nvPicPr>
-          <p:cNvPr id="51" name="Picture 50" descr="image.png"/>
+          <p:cNvPr id="51" name="Picture 50" descr="illust_stema.png"/>
           <p:cNvPicPr>
             <a:picLocks noChangeAspect="1"/>
           </p:cNvPicPr>
@@ -46876,8 +46663,8 @@
         </p:blipFill>
         <p:spPr>
           <a:xfrm>
-            <a:off x="182880" y="1371600"/>
-            <a:ext cx="1188720" cy="1188720"/>
+            <a:off x="91440" y="1188720"/>
+            <a:ext cx="1371600" cy="1371600"/>
           </a:xfrm>
           <a:prstGeom prst="rect">
             <a:avLst/>
@@ -46886,7 +46673,7 @@
       </p:pic>
       <p:pic>
         <p:nvPicPr>
-          <p:cNvPr id="52" name="Picture 51" descr="image.png"/>
+          <p:cNvPr id="52" name="Picture 51" descr="illust_shield.png"/>
           <p:cNvPicPr>
             <a:picLocks noChangeAspect="1"/>
           </p:cNvPicPr>
@@ -46900,8 +46687,8 @@
         </p:blipFill>
         <p:spPr>
           <a:xfrm>
-            <a:off x="4023360" y="1371600"/>
-            <a:ext cx="914400" cy="914400"/>
+            <a:off x="3886200" y="1188720"/>
+            <a:ext cx="1371600" cy="1371600"/>
           </a:xfrm>
           <a:prstGeom prst="rect">
             <a:avLst/>
@@ -46910,7 +46697,7 @@
       </p:pic>
       <p:pic>
         <p:nvPicPr>
-          <p:cNvPr id="53" name="Picture 52" descr="image.png"/>
+          <p:cNvPr id="53" name="Picture 52" descr="illust_kyogai.png"/>
           <p:cNvPicPr>
             <a:picLocks noChangeAspect="1"/>
           </p:cNvPicPr>
@@ -46924,8 +46711,8 @@
         </p:blipFill>
         <p:spPr>
           <a:xfrm>
-            <a:off x="7680960" y="1371600"/>
-            <a:ext cx="1097280" cy="1097280"/>
+            <a:off x="7589520" y="1188720"/>
+            <a:ext cx="1371600" cy="1371600"/>
           </a:xfrm>
           <a:prstGeom prst="rect">
             <a:avLst/>
@@ -46940,7 +46727,7 @@
         </p:nvSpPr>
         <p:spPr>
           <a:xfrm>
-            <a:off x="502920" y="2331720"/>
+            <a:off x="502920" y="2697480"/>
             <a:ext cx="8138160" cy="566928"/>
           </a:xfrm>
           <a:prstGeom prst="roundRect">
@@ -46985,7 +46772,7 @@
         </p:nvSpPr>
         <p:spPr>
           <a:xfrm>
-            <a:off x="548640" y="2386584"/>
+            <a:off x="548640" y="2752344"/>
             <a:ext cx="457200" cy="457200"/>
           </a:xfrm>
           <a:prstGeom prst="roundRect">
@@ -47028,7 +46815,7 @@
         </p:nvSpPr>
         <p:spPr>
           <a:xfrm>
-            <a:off x="548640" y="2409444"/>
+            <a:off x="548640" y="2775204"/>
             <a:ext cx="457200" cy="411480"/>
           </a:xfrm>
           <a:prstGeom prst="rect">
@@ -47063,7 +46850,7 @@
         </p:nvSpPr>
         <p:spPr>
           <a:xfrm>
-            <a:off x="1143000" y="2423160"/>
+            <a:off x="1143000" y="2788920"/>
             <a:ext cx="7406640" cy="411480"/>
           </a:xfrm>
           <a:prstGeom prst="rect">
@@ -47098,7 +46885,7 @@
         </p:nvSpPr>
         <p:spPr>
           <a:xfrm>
-            <a:off x="502920" y="3017520"/>
+            <a:off x="502920" y="3383280"/>
             <a:ext cx="8138160" cy="566928"/>
           </a:xfrm>
           <a:prstGeom prst="roundRect">
@@ -47143,7 +46930,7 @@
         </p:nvSpPr>
         <p:spPr>
           <a:xfrm>
-            <a:off x="548640" y="3072384"/>
+            <a:off x="548640" y="3438144"/>
             <a:ext cx="457200" cy="457200"/>
           </a:xfrm>
           <a:prstGeom prst="roundRect">
@@ -47186,7 +46973,7 @@
         </p:nvSpPr>
         <p:spPr>
           <a:xfrm>
-            <a:off x="548640" y="3095244"/>
+            <a:off x="548640" y="3461004"/>
             <a:ext cx="457200" cy="411480"/>
           </a:xfrm>
           <a:prstGeom prst="rect">
@@ -47221,7 +47008,7 @@
         </p:nvSpPr>
         <p:spPr>
           <a:xfrm>
-            <a:off x="1143000" y="3108960"/>
+            <a:off x="1143000" y="3474720"/>
             <a:ext cx="7406640" cy="411480"/>
           </a:xfrm>
           <a:prstGeom prst="rect">
@@ -47256,7 +47043,7 @@
         </p:nvSpPr>
         <p:spPr>
           <a:xfrm>
-            <a:off x="502920" y="3703320"/>
+            <a:off x="502920" y="4069080"/>
             <a:ext cx="8138160" cy="566928"/>
           </a:xfrm>
           <a:prstGeom prst="roundRect">
@@ -47301,7 +47088,7 @@
         </p:nvSpPr>
         <p:spPr>
           <a:xfrm>
-            <a:off x="548640" y="3758183"/>
+            <a:off x="548640" y="4123944"/>
             <a:ext cx="457200" cy="457200"/>
           </a:xfrm>
           <a:prstGeom prst="roundRect">
@@ -47344,7 +47131,7 @@
         </p:nvSpPr>
         <p:spPr>
           <a:xfrm>
-            <a:off x="548640" y="3781044"/>
+            <a:off x="548640" y="4146804"/>
             <a:ext cx="457200" cy="411480"/>
           </a:xfrm>
           <a:prstGeom prst="rect">
@@ -47379,7 +47166,7 @@
         </p:nvSpPr>
         <p:spPr>
           <a:xfrm>
-            <a:off x="1143000" y="3794759"/>
+            <a:off x="1143000" y="4160520"/>
             <a:ext cx="7406640" cy="411480"/>
           </a:xfrm>
           <a:prstGeom prst="rect">
@@ -47414,8 +47201,8 @@
         </p:nvSpPr>
         <p:spPr>
           <a:xfrm>
-            <a:off x="320040" y="4407408"/>
-            <a:ext cx="8503920" cy="502920"/>
+            <a:off x="320040" y="4681728"/>
+            <a:ext cx="8503920" cy="320040"/>
           </a:xfrm>
           <a:prstGeom prst="roundRect">
             <a:avLst/>
@@ -47457,8 +47244,8 @@
         </p:nvSpPr>
         <p:spPr>
           <a:xfrm>
-            <a:off x="457200" y="4453128"/>
-            <a:ext cx="8229600" cy="402336"/>
+            <a:off x="457200" y="4690872"/>
+            <a:ext cx="8229600" cy="292608"/>
           </a:xfrm>
           <a:prstGeom prst="rect">
             <a:avLst/>
@@ -49613,7 +49400,7 @@
       </p:sp>
       <p:pic>
         <p:nvPicPr>
-          <p:cNvPr id="51" name="Picture 50" descr="image.png"/>
+          <p:cNvPr id="51" name="Picture 50" descr="illust_stema.png"/>
           <p:cNvPicPr>
             <a:picLocks noChangeAspect="1"/>
           </p:cNvPicPr>
@@ -49627,8 +49414,8 @@
         </p:blipFill>
         <p:spPr>
           <a:xfrm>
-            <a:off x="1005840" y="1097280"/>
-            <a:ext cx="1188720" cy="1188720"/>
+            <a:off x="548640" y="1051560"/>
+            <a:ext cx="2103120" cy="1920240"/>
           </a:xfrm>
           <a:prstGeom prst="rect">
             <a:avLst/>
@@ -49643,7 +49430,7 @@
         </p:nvSpPr>
         <p:spPr>
           <a:xfrm>
-            <a:off x="365760" y="2834640"/>
+            <a:off x="365760" y="3017520"/>
             <a:ext cx="640080" cy="640080"/>
           </a:xfrm>
           <a:prstGeom prst="roundRect">
@@ -49686,7 +49473,7 @@
         </p:nvSpPr>
         <p:spPr>
           <a:xfrm>
-            <a:off x="365760" y="2866644"/>
+            <a:off x="365760" y="3049524"/>
             <a:ext cx="640080" cy="576072"/>
           </a:xfrm>
           <a:prstGeom prst="rect">
@@ -49721,7 +49508,7 @@
         </p:nvSpPr>
         <p:spPr>
           <a:xfrm>
-            <a:off x="320040" y="3611880"/>
+            <a:off x="320040" y="3749039"/>
             <a:ext cx="2560320" cy="594360"/>
           </a:xfrm>
           <a:prstGeom prst="rect">
@@ -49737,7 +49524,7 @@
           <a:p>
             <a:pPr algn="l"/>
             <a:r>
-              <a:rPr sz="1400" b="1" i="0">
+              <a:rPr sz="1300" b="1" i="0">
                 <a:solidFill>
                   <a:srgbClr val="1A1A1A"/>
                 </a:solidFill>
@@ -49756,8 +49543,8 @@
         </p:nvSpPr>
         <p:spPr>
           <a:xfrm>
-            <a:off x="320040" y="4251960"/>
-            <a:ext cx="2560320" cy="640080"/>
+            <a:off x="320040" y="4370832"/>
+            <a:ext cx="2560320" cy="594360"/>
           </a:xfrm>
           <a:prstGeom prst="rect">
             <a:avLst/>
@@ -49772,7 +49559,7 @@
           <a:p>
             <a:pPr algn="l"/>
             <a:r>
-              <a:rPr sz="1100" b="0" i="0">
+              <a:rPr sz="1000" b="0" i="0">
                 <a:solidFill>
                   <a:srgbClr val="666666"/>
                 </a:solidFill>
@@ -49830,7 +49617,7 @@
       </p:sp>
       <p:pic>
         <p:nvPicPr>
-          <p:cNvPr id="57" name="Picture 56" descr="image.png"/>
+          <p:cNvPr id="57" name="Picture 56" descr="illust_pr_hyoki.png"/>
           <p:cNvPicPr>
             <a:picLocks noChangeAspect="1"/>
           </p:cNvPicPr>
@@ -49844,8 +49631,8 @@
         </p:blipFill>
         <p:spPr>
           <a:xfrm>
-            <a:off x="3977639" y="1097280"/>
-            <a:ext cx="1188720" cy="1188720"/>
+            <a:off x="3520440" y="1051560"/>
+            <a:ext cx="2103120" cy="1920240"/>
           </a:xfrm>
           <a:prstGeom prst="rect">
             <a:avLst/>
@@ -49860,7 +49647,7 @@
         </p:nvSpPr>
         <p:spPr>
           <a:xfrm>
-            <a:off x="3337560" y="2834640"/>
+            <a:off x="3337560" y="3017520"/>
             <a:ext cx="640080" cy="640080"/>
           </a:xfrm>
           <a:prstGeom prst="roundRect">
@@ -49903,7 +49690,7 @@
         </p:nvSpPr>
         <p:spPr>
           <a:xfrm>
-            <a:off x="3337560" y="2866644"/>
+            <a:off x="3337560" y="3049524"/>
             <a:ext cx="640080" cy="576072"/>
           </a:xfrm>
           <a:prstGeom prst="rect">
@@ -49938,7 +49725,7 @@
         </p:nvSpPr>
         <p:spPr>
           <a:xfrm>
-            <a:off x="3291840" y="3611880"/>
+            <a:off x="3291840" y="3749039"/>
             <a:ext cx="2560320" cy="594360"/>
           </a:xfrm>
           <a:prstGeom prst="rect">
@@ -49954,7 +49741,7 @@
           <a:p>
             <a:pPr algn="l"/>
             <a:r>
-              <a:rPr sz="1400" b="1" i="0">
+              <a:rPr sz="1300" b="1" i="0">
                 <a:solidFill>
                   <a:srgbClr val="1A1A1A"/>
                 </a:solidFill>
@@ -49973,8 +49760,8 @@
         </p:nvSpPr>
         <p:spPr>
           <a:xfrm>
-            <a:off x="3291840" y="4251960"/>
-            <a:ext cx="2560320" cy="640080"/>
+            <a:off x="3291840" y="4370832"/>
+            <a:ext cx="2560320" cy="594360"/>
           </a:xfrm>
           <a:prstGeom prst="rect">
             <a:avLst/>
@@ -49989,7 +49776,7 @@
           <a:p>
             <a:pPr algn="l"/>
             <a:r>
-              <a:rPr sz="1100" b="0" i="0">
+              <a:rPr sz="1000" b="0" i="0">
                 <a:solidFill>
                   <a:srgbClr val="666666"/>
                 </a:solidFill>
@@ -50047,7 +49834,7 @@
       </p:sp>
       <p:pic>
         <p:nvPicPr>
-          <p:cNvPr id="63" name="Picture 62" descr="image.png"/>
+          <p:cNvPr id="63" name="Picture 62" descr="illust_risk.png"/>
           <p:cNvPicPr>
             <a:picLocks noChangeAspect="1"/>
           </p:cNvPicPr>
@@ -50061,8 +49848,8 @@
         </p:blipFill>
         <p:spPr>
           <a:xfrm>
-            <a:off x="6949440" y="1097280"/>
-            <a:ext cx="1188720" cy="1188720"/>
+            <a:off x="6492240" y="1051560"/>
+            <a:ext cx="2103120" cy="1920240"/>
           </a:xfrm>
           <a:prstGeom prst="rect">
             <a:avLst/>
@@ -50077,7 +49864,7 @@
         </p:nvSpPr>
         <p:spPr>
           <a:xfrm>
-            <a:off x="6309360" y="2834640"/>
+            <a:off x="6309360" y="3017520"/>
             <a:ext cx="640080" cy="640080"/>
           </a:xfrm>
           <a:prstGeom prst="roundRect">
@@ -50120,7 +49907,7 @@
         </p:nvSpPr>
         <p:spPr>
           <a:xfrm>
-            <a:off x="6309360" y="2866644"/>
+            <a:off x="6309360" y="3049524"/>
             <a:ext cx="640080" cy="576072"/>
           </a:xfrm>
           <a:prstGeom prst="rect">
@@ -50155,7 +49942,7 @@
         </p:nvSpPr>
         <p:spPr>
           <a:xfrm>
-            <a:off x="6263640" y="3611880"/>
+            <a:off x="6263640" y="3749039"/>
             <a:ext cx="2560320" cy="594360"/>
           </a:xfrm>
           <a:prstGeom prst="rect">
@@ -50171,7 +49958,7 @@
           <a:p>
             <a:pPr algn="l"/>
             <a:r>
-              <a:rPr sz="1400" b="1" i="0">
+              <a:rPr sz="1300" b="1" i="0">
                 <a:solidFill>
                   <a:srgbClr val="1A1A1A"/>
                 </a:solidFill>
@@ -50190,8 +49977,8 @@
         </p:nvSpPr>
         <p:spPr>
           <a:xfrm>
-            <a:off x="6263640" y="4251960"/>
-            <a:ext cx="2560320" cy="640080"/>
+            <a:off x="6263640" y="4370832"/>
+            <a:ext cx="2560320" cy="594360"/>
           </a:xfrm>
           <a:prstGeom prst="rect">
             <a:avLst/>
@@ -50206,7 +49993,7 @@
           <a:p>
             <a:pPr algn="l"/>
             <a:r>
-              <a:rPr sz="1100" b="0" i="0">
+              <a:rPr sz="1000" b="0" i="0">
                 <a:solidFill>
                   <a:srgbClr val="666666"/>
                 </a:solidFill>
@@ -52415,54 +52202,9 @@
           </a:p>
         </p:txBody>
       </p:sp>
-      <p:sp>
-        <p:nvSpPr>
-          <p:cNvPr id="52" name="Rounded Rectangle 51"/>
-          <p:cNvSpPr/>
-          <p:nvPr/>
-        </p:nvSpPr>
-        <p:spPr>
-          <a:xfrm>
-            <a:off x="5943600" y="914400"/>
-            <a:ext cx="2926080" cy="2377440"/>
-          </a:xfrm>
-          <a:prstGeom prst="roundRect">
-            <a:avLst/>
-          </a:prstGeom>
-          <a:solidFill>
-            <a:srgbClr val="FFECF5"/>
-          </a:solidFill>
-          <a:ln w="15240">
-            <a:solidFill>
-              <a:srgbClr val="FFD6EC"/>
-            </a:solidFill>
-          </a:ln>
-        </p:spPr>
-        <p:style>
-          <a:lnRef idx="1">
-            <a:schemeClr val="accent1"/>
-          </a:lnRef>
-          <a:fillRef idx="3">
-            <a:schemeClr val="accent1"/>
-          </a:fillRef>
-          <a:effectRef idx="2">
-            <a:schemeClr val="accent1"/>
-          </a:effectRef>
-          <a:fontRef idx="minor">
-            <a:schemeClr val="lt1"/>
-          </a:fontRef>
-        </p:style>
-        <p:txBody>
-          <a:bodyPr rtlCol="0" anchor="ctr"/>
-          <a:lstStyle/>
-          <a:p>
-            <a:pPr algn="ctr"/>
-          </a:p>
-        </p:txBody>
-      </p:sp>
       <p:pic>
         <p:nvPicPr>
-          <p:cNvPr id="53" name="Picture 52" descr="image.png"/>
+          <p:cNvPr id="52" name="Picture 51" descr="illust_stema.png"/>
           <p:cNvPicPr>
             <a:picLocks noChangeAspect="1"/>
           </p:cNvPicPr>
@@ -52476,8 +52218,8 @@
         </p:blipFill>
         <p:spPr>
           <a:xfrm>
-            <a:off x="6492240" y="1005840"/>
-            <a:ext cx="1005840" cy="1005840"/>
+            <a:off x="5852160" y="868680"/>
+            <a:ext cx="3017520" cy="3017520"/>
           </a:xfrm>
           <a:prstGeom prst="rect">
             <a:avLst/>
@@ -52486,101 +52228,7 @@
       </p:pic>
       <p:sp>
         <p:nvSpPr>
-          <p:cNvPr id="54" name="TextBox 53"/>
-          <p:cNvSpPr txBox="1"/>
-          <p:nvPr/>
-        </p:nvSpPr>
-        <p:spPr>
-          <a:xfrm>
-            <a:off x="6400800" y="2057400"/>
-            <a:ext cx="2286000" cy="365760"/>
-          </a:xfrm>
-          <a:prstGeom prst="rect">
-            <a:avLst/>
-          </a:prstGeom>
-          <a:noFill/>
-        </p:spPr>
-        <p:txBody>
-          <a:bodyPr wrap="square">
-            <a:spAutoFit/>
-          </a:bodyPr>
-          <a:lstStyle/>
-          <a:p>
-            <a:pPr algn="ctr"/>
-            <a:r>
-              <a:rPr sz="1100" b="0" i="0">
-                <a:solidFill>
-                  <a:srgbClr val="666666"/>
-                </a:solidFill>
-                <a:latin typeface="Hiragino Kaku Gothic ProN"/>
-              </a:rPr>
-              <a:t>企業からお金をもらって</a:t>
-            </a:r>
-          </a:p>
-        </p:txBody>
-      </p:sp>
-      <p:sp>
-        <p:nvSpPr>
-          <p:cNvPr id="55" name="TextBox 54"/>
-          <p:cNvSpPr txBox="1"/>
-          <p:nvPr/>
-        </p:nvSpPr>
-        <p:spPr>
-          <a:xfrm>
-            <a:off x="6309360" y="2423160"/>
-            <a:ext cx="2468880" cy="365760"/>
-          </a:xfrm>
-          <a:prstGeom prst="rect">
-            <a:avLst/>
-          </a:prstGeom>
-          <a:noFill/>
-        </p:spPr>
-        <p:txBody>
-          <a:bodyPr wrap="square">
-            <a:spAutoFit/>
-          </a:bodyPr>
-          <a:lstStyle/>
-          <a:p>
-            <a:pPr algn="ctr"/>
-            <a:r>
-              <a:rPr sz="1100" b="0" i="0">
-                <a:solidFill>
-                  <a:srgbClr val="666666"/>
-                </a:solidFill>
-                <a:latin typeface="Hiragino Kaku Gothic ProN"/>
-              </a:rPr>
-              <a:t>「自分で買いました」と言う</a:t>
-            </a:r>
-          </a:p>
-        </p:txBody>
-      </p:sp>
-      <p:pic>
-        <p:nvPicPr>
-          <p:cNvPr id="56" name="Picture 55" descr="image.png"/>
-          <p:cNvPicPr>
-            <a:picLocks noChangeAspect="1"/>
-          </p:cNvPicPr>
-          <p:nvPr/>
-        </p:nvPicPr>
-        <p:blipFill>
-          <a:blip r:embed="rId3"/>
-          <a:stretch>
-            <a:fillRect/>
-          </a:stretch>
-        </p:blipFill>
-        <p:spPr>
-          <a:xfrm>
-            <a:off x="7863840" y="960120"/>
-            <a:ext cx="731520" cy="731520"/>
-          </a:xfrm>
-          <a:prstGeom prst="rect">
-            <a:avLst/>
-          </a:prstGeom>
-        </p:spPr>
-      </p:pic>
-      <p:sp>
-        <p:nvSpPr>
-          <p:cNvPr id="57" name="Rounded Rectangle 56"/>
+          <p:cNvPr id="53" name="Rounded Rectangle 52"/>
           <p:cNvSpPr/>
           <p:nvPr/>
         </p:nvSpPr>
@@ -52625,7 +52273,7 @@
       </p:sp>
       <p:sp>
         <p:nvSpPr>
-          <p:cNvPr id="58" name="TextBox 57"/>
+          <p:cNvPr id="54" name="TextBox 53"/>
           <p:cNvSpPr txBox="1"/>
           <p:nvPr/>
         </p:nvSpPr>
@@ -54961,33 +54609,9 @@
           </a:p>
         </p:txBody>
       </p:sp>
-      <p:pic>
-        <p:nvPicPr>
-          <p:cNvPr id="54" name="Picture 53" descr="image.png"/>
-          <p:cNvPicPr>
-            <a:picLocks noChangeAspect="1"/>
-          </p:cNvPicPr>
-          <p:nvPr/>
-        </p:nvPicPr>
-        <p:blipFill>
-          <a:blip r:embed="rId2"/>
-          <a:stretch>
-            <a:fillRect/>
-          </a:stretch>
-        </p:blipFill>
-        <p:spPr>
-          <a:xfrm>
-            <a:off x="3566160" y="2468880"/>
-            <a:ext cx="822960" cy="822960"/>
-          </a:xfrm>
-          <a:prstGeom prst="rect">
-            <a:avLst/>
-          </a:prstGeom>
-        </p:spPr>
-      </p:pic>
-      <p:sp>
-        <p:nvSpPr>
-          <p:cNvPr id="55" name="Rounded Rectangle 54"/>
+      <p:sp>
+        <p:nvSpPr>
+          <p:cNvPr id="54" name="Rounded Rectangle 53"/>
           <p:cNvSpPr/>
           <p:nvPr/>
         </p:nvSpPr>
@@ -55032,7 +54656,7 @@
       </p:sp>
       <p:sp>
         <p:nvSpPr>
-          <p:cNvPr id="56" name="Rectangle 55"/>
+          <p:cNvPr id="55" name="Rectangle 54"/>
           <p:cNvSpPr/>
           <p:nvPr/>
         </p:nvSpPr>
@@ -55075,7 +54699,7 @@
       </p:sp>
       <p:sp>
         <p:nvSpPr>
-          <p:cNvPr id="57" name="TextBox 56"/>
+          <p:cNvPr id="56" name="TextBox 55"/>
           <p:cNvSpPr txBox="1"/>
           <p:nvPr/>
         </p:nvSpPr>
@@ -55110,7 +54734,7 @@
       </p:sp>
       <p:sp>
         <p:nvSpPr>
-          <p:cNvPr id="58" name="TextBox 57"/>
+          <p:cNvPr id="57" name="TextBox 56"/>
           <p:cNvSpPr txBox="1"/>
           <p:nvPr/>
         </p:nvSpPr>
@@ -55208,22 +54832,22 @@
       </p:sp>
       <p:pic>
         <p:nvPicPr>
-          <p:cNvPr id="59" name="Picture 58" descr="image.png"/>
+          <p:cNvPr id="58" name="Picture 57" descr="illust_pr_hyoki.png"/>
           <p:cNvPicPr>
             <a:picLocks noChangeAspect="1"/>
           </p:cNvPicPr>
           <p:nvPr/>
         </p:nvPicPr>
         <p:blipFill>
-          <a:blip r:embed="rId3"/>
+          <a:blip r:embed="rId2"/>
           <a:stretch>
             <a:fillRect/>
           </a:stretch>
         </p:blipFill>
         <p:spPr>
           <a:xfrm>
-            <a:off x="8138160" y="2468880"/>
-            <a:ext cx="822960" cy="822960"/>
+            <a:off x="3566160" y="914400"/>
+            <a:ext cx="1005840" cy="1005840"/>
           </a:xfrm>
           <a:prstGeom prst="rect">
             <a:avLst/>
@@ -55232,7 +54856,7 @@
       </p:pic>
       <p:sp>
         <p:nvSpPr>
-          <p:cNvPr id="60" name="Rounded Rectangle 59"/>
+          <p:cNvPr id="59" name="Rounded Rectangle 58"/>
           <p:cNvSpPr/>
           <p:nvPr/>
         </p:nvSpPr>
@@ -55277,7 +54901,7 @@
       </p:sp>
       <p:sp>
         <p:nvSpPr>
-          <p:cNvPr id="61" name="TextBox 60"/>
+          <p:cNvPr id="60" name="TextBox 59"/>
           <p:cNvSpPr txBox="1"/>
           <p:nvPr/>
         </p:nvSpPr>
@@ -57526,54 +57150,9 @@
           </a:p>
         </p:txBody>
       </p:sp>
-      <p:sp>
-        <p:nvSpPr>
-          <p:cNvPr id="52" name="Rounded Rectangle 51"/>
-          <p:cNvSpPr/>
-          <p:nvPr/>
-        </p:nvSpPr>
-        <p:spPr>
-          <a:xfrm>
-            <a:off x="6400800" y="914400"/>
-            <a:ext cx="2468880" cy="1645920"/>
-          </a:xfrm>
-          <a:prstGeom prst="roundRect">
-            <a:avLst/>
-          </a:prstGeom>
-          <a:solidFill>
-            <a:srgbClr val="FFECF5"/>
-          </a:solidFill>
-          <a:ln w="15240">
-            <a:solidFill>
-              <a:srgbClr val="FFD6EC"/>
-            </a:solidFill>
-          </a:ln>
-        </p:spPr>
-        <p:style>
-          <a:lnRef idx="1">
-            <a:schemeClr val="accent1"/>
-          </a:lnRef>
-          <a:fillRef idx="3">
-            <a:schemeClr val="accent1"/>
-          </a:fillRef>
-          <a:effectRef idx="2">
-            <a:schemeClr val="accent1"/>
-          </a:effectRef>
-          <a:fontRef idx="minor">
-            <a:schemeClr val="lt1"/>
-          </a:fontRef>
-        </p:style>
-        <p:txBody>
-          <a:bodyPr rtlCol="0" anchor="ctr"/>
-          <a:lstStyle/>
-          <a:p>
-            <a:pPr algn="ctr"/>
-          </a:p>
-        </p:txBody>
-      </p:sp>
       <p:pic>
         <p:nvPicPr>
-          <p:cNvPr id="53" name="Picture 52" descr="image.png"/>
+          <p:cNvPr id="52" name="Picture 51" descr="illust_tieup.png"/>
           <p:cNvPicPr>
             <a:picLocks noChangeAspect="1"/>
           </p:cNvPicPr>
@@ -57587,8 +57166,8 @@
         </p:blipFill>
         <p:spPr>
           <a:xfrm>
-            <a:off x="6995160" y="1051560"/>
-            <a:ext cx="1188720" cy="1188720"/>
+            <a:off x="6309360" y="841248"/>
+            <a:ext cx="2560320" cy="2560320"/>
           </a:xfrm>
           <a:prstGeom prst="rect">
             <a:avLst/>
@@ -57597,7 +57176,7 @@
       </p:pic>
       <p:sp>
         <p:nvSpPr>
-          <p:cNvPr id="54" name="Rounded Rectangle 53"/>
+          <p:cNvPr id="53" name="Rounded Rectangle 52"/>
           <p:cNvSpPr/>
           <p:nvPr/>
         </p:nvSpPr>
@@ -57642,7 +57221,7 @@
       </p:sp>
       <p:sp>
         <p:nvSpPr>
-          <p:cNvPr id="55" name="Rectangle 54"/>
+          <p:cNvPr id="54" name="Rectangle 53"/>
           <p:cNvSpPr/>
           <p:nvPr/>
         </p:nvSpPr>
@@ -57685,7 +57264,7 @@
       </p:sp>
       <p:sp>
         <p:nvSpPr>
-          <p:cNvPr id="56" name="TextBox 55"/>
+          <p:cNvPr id="55" name="TextBox 54"/>
           <p:cNvSpPr txBox="1"/>
           <p:nvPr/>
         </p:nvSpPr>
@@ -57720,7 +57299,7 @@
       </p:sp>
       <p:sp>
         <p:nvSpPr>
-          <p:cNvPr id="57" name="TextBox 56"/>
+          <p:cNvPr id="56" name="TextBox 55"/>
           <p:cNvSpPr txBox="1"/>
           <p:nvPr/>
         </p:nvSpPr>
@@ -57786,38 +57365,14 @@
                 </a:solidFill>
                 <a:latin typeface="Hiragino Kaku Gothic ProN"/>
               </a:rPr>
-              <a:t>何度もシャドウバンになると永久アカウント停止のリスクがある</a:t>
+              <a:t>繰り返すと永久アカウント停止のリスク</a:t>
             </a:r>
           </a:p>
         </p:txBody>
       </p:sp>
-      <p:pic>
-        <p:nvPicPr>
-          <p:cNvPr id="58" name="Picture 57" descr="image.png"/>
-          <p:cNvPicPr>
-            <a:picLocks noChangeAspect="1"/>
-          </p:cNvPicPr>
-          <p:nvPr/>
-        </p:nvPicPr>
-        <p:blipFill>
-          <a:blip r:embed="rId3"/>
-          <a:stretch>
-            <a:fillRect/>
-          </a:stretch>
-        </p:blipFill>
-        <p:spPr>
-          <a:xfrm>
-            <a:off x="8138160" y="2724912"/>
-            <a:ext cx="640080" cy="640080"/>
-          </a:xfrm>
-          <a:prstGeom prst="rect">
-            <a:avLst/>
-          </a:prstGeom>
-        </p:spPr>
-      </p:pic>
-      <p:sp>
-        <p:nvSpPr>
-          <p:cNvPr id="59" name="Rounded Rectangle 58"/>
+      <p:sp>
+        <p:nvSpPr>
+          <p:cNvPr id="57" name="Rounded Rectangle 56"/>
           <p:cNvSpPr/>
           <p:nvPr/>
         </p:nvSpPr>
@@ -57862,7 +57417,7 @@
       </p:sp>
       <p:sp>
         <p:nvSpPr>
-          <p:cNvPr id="60" name="TextBox 59"/>
+          <p:cNvPr id="58" name="TextBox 57"/>
           <p:cNvSpPr txBox="1"/>
           <p:nvPr/>
         </p:nvSpPr>
@@ -57890,7 +57445,7 @@
                 </a:solidFill>
                 <a:latin typeface="Hiragino Kaku Gothic ProN"/>
               </a:rPr>
-              <a:t>文字で#PRと書くだけでなく、公式の広告設定ツールを使った企業との紐付けが重要です。</a:t>
+              <a:t>文字で#PRと書くだけでなく、公式の広告設定ツールでの企業との紐付けが重要です。</a:t>
             </a:r>
           </a:p>
         </p:txBody>
@@ -60155,33 +59710,9 @@
           </a:p>
         </p:txBody>
       </p:sp>
-      <p:pic>
-        <p:nvPicPr>
-          <p:cNvPr id="54" name="Picture 53" descr="image.png"/>
-          <p:cNvPicPr>
-            <a:picLocks noChangeAspect="1"/>
-          </p:cNvPicPr>
-          <p:nvPr/>
-        </p:nvPicPr>
-        <p:blipFill>
-          <a:blip r:embed="rId2"/>
-          <a:stretch>
-            <a:fillRect/>
-          </a:stretch>
-        </p:blipFill>
-        <p:spPr>
-          <a:xfrm>
-            <a:off x="2377440" y="1371600"/>
-            <a:ext cx="1097280" cy="1097280"/>
-          </a:xfrm>
-          <a:prstGeom prst="rect">
-            <a:avLst/>
-          </a:prstGeom>
-        </p:spPr>
-      </p:pic>
-      <p:sp>
-        <p:nvSpPr>
-          <p:cNvPr id="55" name="Rounded Rectangle 54"/>
+      <p:sp>
+        <p:nvSpPr>
+          <p:cNvPr id="54" name="Rounded Rectangle 53"/>
           <p:cNvSpPr/>
           <p:nvPr/>
         </p:nvSpPr>
@@ -60226,7 +59757,7 @@
       </p:sp>
       <p:sp>
         <p:nvSpPr>
-          <p:cNvPr id="56" name="Rectangle 55"/>
+          <p:cNvPr id="55" name="Rectangle 54"/>
           <p:cNvSpPr/>
           <p:nvPr/>
         </p:nvSpPr>
@@ -60269,7 +59800,7 @@
       </p:sp>
       <p:sp>
         <p:nvSpPr>
-          <p:cNvPr id="57" name="TextBox 56"/>
+          <p:cNvPr id="56" name="TextBox 55"/>
           <p:cNvSpPr txBox="1"/>
           <p:nvPr/>
         </p:nvSpPr>
@@ -60304,7 +59835,7 @@
       </p:sp>
       <p:sp>
         <p:nvSpPr>
-          <p:cNvPr id="58" name="TextBox 57"/>
+          <p:cNvPr id="57" name="TextBox 56"/>
           <p:cNvSpPr txBox="1"/>
           <p:nvPr/>
         </p:nvSpPr>
@@ -60402,22 +59933,22 @@
       </p:sp>
       <p:pic>
         <p:nvPicPr>
-          <p:cNvPr id="59" name="Picture 58" descr="image.png"/>
+          <p:cNvPr id="58" name="Picture 57" descr="illust_risk.png"/>
           <p:cNvPicPr>
             <a:picLocks noChangeAspect="1"/>
           </p:cNvPicPr>
           <p:nvPr/>
         </p:nvPicPr>
         <p:blipFill>
-          <a:blip r:embed="rId3"/>
+          <a:blip r:embed="rId2"/>
           <a:stretch>
             <a:fillRect/>
           </a:stretch>
         </p:blipFill>
         <p:spPr>
           <a:xfrm>
-            <a:off x="7589520" y="1371600"/>
-            <a:ext cx="914400" cy="914400"/>
+            <a:off x="3200400" y="960120"/>
+            <a:ext cx="1097280" cy="1097280"/>
           </a:xfrm>
           <a:prstGeom prst="rect">
             <a:avLst/>
@@ -60426,7 +59957,7 @@
       </p:pic>
       <p:sp>
         <p:nvSpPr>
-          <p:cNvPr id="60" name="Rounded Rectangle 59"/>
+          <p:cNvPr id="59" name="Rounded Rectangle 58"/>
           <p:cNvSpPr/>
           <p:nvPr/>
         </p:nvSpPr>
@@ -60471,7 +60002,7 @@
       </p:sp>
       <p:sp>
         <p:nvSpPr>
-          <p:cNvPr id="61" name="TextBox 60"/>
+          <p:cNvPr id="60" name="TextBox 59"/>
           <p:cNvSpPr txBox="1"/>
           <p:nvPr/>
         </p:nvSpPr>
@@ -63318,7 +62849,7 @@
       </p:sp>
       <p:pic>
         <p:nvPicPr>
-          <p:cNvPr id="6" name="Picture 5" descr="image.png"/>
+          <p:cNvPr id="6" name="Picture 5" descr="illust_yakuji.png"/>
           <p:cNvPicPr>
             <a:picLocks noChangeAspect="1"/>
           </p:cNvPicPr>
@@ -63332,8 +62863,8 @@
         </p:blipFill>
         <p:spPr>
           <a:xfrm>
-            <a:off x="7772400" y="3291840"/>
-            <a:ext cx="1097280" cy="1097280"/>
+            <a:off x="182880" y="1097280"/>
+            <a:ext cx="2468880" cy="2468880"/>
           </a:xfrm>
           <a:prstGeom prst="rect">
             <a:avLst/>

--- a/TORIHADA_第2週_研修資料.pptx
+++ b/TORIHADA_第2週_研修資料.pptx
@@ -5303,7 +5303,7 @@
       </p:sp>
       <p:pic>
         <p:nvPicPr>
-          <p:cNvPr id="53" name="Picture 52" descr="illust_stema.png"/>
+          <p:cNvPr id="53" name="Picture 52" descr="image-1-1.png"/>
           <p:cNvPicPr>
             <a:picLocks noChangeAspect="1"/>
           </p:cNvPicPr>
@@ -5317,8 +5317,8 @@
         </p:blipFill>
         <p:spPr>
           <a:xfrm>
-            <a:off x="0" y="0"/>
-            <a:ext cx="1463040" cy="1645920"/>
+            <a:off x="91440" y="91440"/>
+            <a:ext cx="1097280" cy="1097280"/>
           </a:xfrm>
           <a:prstGeom prst="rect">
             <a:avLst/>
@@ -5327,7 +5327,7 @@
       </p:pic>
       <p:pic>
         <p:nvPicPr>
-          <p:cNvPr id="54" name="Picture 53" descr="illust_shield.png"/>
+          <p:cNvPr id="54" name="Picture 53" descr="image-1-2.png"/>
           <p:cNvPicPr>
             <a:picLocks noChangeAspect="1"/>
           </p:cNvPicPr>
@@ -5341,17 +5341,65 @@
         </p:blipFill>
         <p:spPr>
           <a:xfrm>
-            <a:off x="7498079" y="3291840"/>
-            <a:ext cx="1463040" cy="1463040"/>
+            <a:off x="7772400" y="91440"/>
+            <a:ext cx="1188720" cy="1188720"/>
           </a:xfrm>
           <a:prstGeom prst="rect">
             <a:avLst/>
           </a:prstGeom>
         </p:spPr>
       </p:pic>
-      <p:sp>
-        <p:nvSpPr>
-          <p:cNvPr id="55" name="Rectangle 54"/>
+      <p:pic>
+        <p:nvPicPr>
+          <p:cNvPr id="55" name="Picture 54" descr="image-1-3.png"/>
+          <p:cNvPicPr>
+            <a:picLocks noChangeAspect="1"/>
+          </p:cNvPicPr>
+          <p:nvPr/>
+        </p:nvPicPr>
+        <p:blipFill>
+          <a:blip r:embed="rId4"/>
+          <a:stretch>
+            <a:fillRect/>
+          </a:stretch>
+        </p:blipFill>
+        <p:spPr>
+          <a:xfrm>
+            <a:off x="0" y="3566160"/>
+            <a:ext cx="1188720" cy="1188720"/>
+          </a:xfrm>
+          <a:prstGeom prst="rect">
+            <a:avLst/>
+          </a:prstGeom>
+        </p:spPr>
+      </p:pic>
+      <p:pic>
+        <p:nvPicPr>
+          <p:cNvPr id="56" name="Picture 55" descr="image-6-1.png"/>
+          <p:cNvPicPr>
+            <a:picLocks noChangeAspect="1"/>
+          </p:cNvPicPr>
+          <p:nvPr/>
+        </p:nvPicPr>
+        <p:blipFill>
+          <a:blip r:embed="rId5"/>
+          <a:stretch>
+            <a:fillRect/>
+          </a:stretch>
+        </p:blipFill>
+        <p:spPr>
+          <a:xfrm>
+            <a:off x="7863840" y="3657600"/>
+            <a:ext cx="1005840" cy="1005840"/>
+          </a:xfrm>
+          <a:prstGeom prst="rect">
+            <a:avLst/>
+          </a:prstGeom>
+        </p:spPr>
+      </p:pic>
+      <p:sp>
+        <p:nvSpPr>
+          <p:cNvPr id="57" name="Rectangle 56"/>
           <p:cNvSpPr/>
           <p:nvPr/>
         </p:nvSpPr>
@@ -5394,7 +5442,7 @@
       </p:sp>
       <p:sp>
         <p:nvSpPr>
-          <p:cNvPr id="56" name="TextBox 55"/>
+          <p:cNvPr id="58" name="TextBox 57"/>
           <p:cNvSpPr txBox="1"/>
           <p:nvPr/>
         </p:nvSpPr>
@@ -7556,7 +7604,7 @@
       </p:sp>
       <p:pic>
         <p:nvPicPr>
-          <p:cNvPr id="51" name="Picture 50" descr="illust_yakuji.png"/>
+          <p:cNvPr id="51" name="Picture 50" descr="image-5-3.png"/>
           <p:cNvPicPr>
             <a:picLocks noChangeAspect="1"/>
           </p:cNvPicPr>
@@ -7570,8 +7618,8 @@
         </p:blipFill>
         <p:spPr>
           <a:xfrm>
-            <a:off x="548640" y="1051560"/>
-            <a:ext cx="2103120" cy="1920240"/>
+            <a:off x="914400" y="1097280"/>
+            <a:ext cx="1371600" cy="1371600"/>
           </a:xfrm>
           <a:prstGeom prst="rect">
             <a:avLst/>
@@ -7586,7 +7634,7 @@
         </p:nvSpPr>
         <p:spPr>
           <a:xfrm>
-            <a:off x="365760" y="3017520"/>
+            <a:off x="365760" y="2834640"/>
             <a:ext cx="640080" cy="640080"/>
           </a:xfrm>
           <a:prstGeom prst="roundRect">
@@ -7629,7 +7677,7 @@
         </p:nvSpPr>
         <p:spPr>
           <a:xfrm>
-            <a:off x="365760" y="3049524"/>
+            <a:off x="365760" y="2866644"/>
             <a:ext cx="640080" cy="576072"/>
           </a:xfrm>
           <a:prstGeom prst="rect">
@@ -7664,7 +7712,7 @@
         </p:nvSpPr>
         <p:spPr>
           <a:xfrm>
-            <a:off x="320040" y="3749039"/>
+            <a:off x="320040" y="3611880"/>
             <a:ext cx="2560320" cy="594360"/>
           </a:xfrm>
           <a:prstGeom prst="rect">
@@ -7699,7 +7747,7 @@
         </p:nvSpPr>
         <p:spPr>
           <a:xfrm>
-            <a:off x="320040" y="4370832"/>
+            <a:off x="320040" y="4251960"/>
             <a:ext cx="2560320" cy="594360"/>
           </a:xfrm>
           <a:prstGeom prst="rect">
@@ -7773,7 +7821,7 @@
       </p:sp>
       <p:pic>
         <p:nvPicPr>
-          <p:cNvPr id="57" name="Picture 56" descr="illust_ng_hyogen.png"/>
+          <p:cNvPr id="57" name="Picture 56" descr="image-5-2.png"/>
           <p:cNvPicPr>
             <a:picLocks noChangeAspect="1"/>
           </p:cNvPicPr>
@@ -7787,8 +7835,8 @@
         </p:blipFill>
         <p:spPr>
           <a:xfrm>
-            <a:off x="3520440" y="1051560"/>
-            <a:ext cx="2103120" cy="1920240"/>
+            <a:off x="3886200" y="1097280"/>
+            <a:ext cx="1371600" cy="1371600"/>
           </a:xfrm>
           <a:prstGeom prst="rect">
             <a:avLst/>
@@ -7803,7 +7851,7 @@
         </p:nvSpPr>
         <p:spPr>
           <a:xfrm>
-            <a:off x="3337560" y="3017520"/>
+            <a:off x="3337560" y="2834640"/>
             <a:ext cx="640080" cy="640080"/>
           </a:xfrm>
           <a:prstGeom prst="roundRect">
@@ -7846,7 +7894,7 @@
         </p:nvSpPr>
         <p:spPr>
           <a:xfrm>
-            <a:off x="3337560" y="3049524"/>
+            <a:off x="3337560" y="2866644"/>
             <a:ext cx="640080" cy="576072"/>
           </a:xfrm>
           <a:prstGeom prst="rect">
@@ -7881,7 +7929,7 @@
         </p:nvSpPr>
         <p:spPr>
           <a:xfrm>
-            <a:off x="3291840" y="3749039"/>
+            <a:off x="3291840" y="3611880"/>
             <a:ext cx="2560320" cy="594360"/>
           </a:xfrm>
           <a:prstGeom prst="rect">
@@ -7916,7 +7964,7 @@
         </p:nvSpPr>
         <p:spPr>
           <a:xfrm>
-            <a:off x="3291840" y="4370832"/>
+            <a:off x="3291840" y="4251960"/>
             <a:ext cx="2560320" cy="594360"/>
           </a:xfrm>
           <a:prstGeom prst="rect">
@@ -7990,22 +8038,22 @@
       </p:sp>
       <p:pic>
         <p:nvPicPr>
-          <p:cNvPr id="63" name="Picture 62" descr="illust_yakuji.png"/>
+          <p:cNvPr id="63" name="Picture 62" descr="image-1-1.png"/>
           <p:cNvPicPr>
             <a:picLocks noChangeAspect="1"/>
           </p:cNvPicPr>
           <p:nvPr/>
         </p:nvPicPr>
         <p:blipFill>
-          <a:blip r:embed="rId2"/>
+          <a:blip r:embed="rId4"/>
           <a:stretch>
             <a:fillRect/>
           </a:stretch>
         </p:blipFill>
         <p:spPr>
           <a:xfrm>
-            <a:off x="6492240" y="1051560"/>
-            <a:ext cx="2103120" cy="1920240"/>
+            <a:off x="6858000" y="1097280"/>
+            <a:ext cx="1371600" cy="1371600"/>
           </a:xfrm>
           <a:prstGeom prst="rect">
             <a:avLst/>
@@ -8020,7 +8068,7 @@
         </p:nvSpPr>
         <p:spPr>
           <a:xfrm>
-            <a:off x="6309360" y="3017520"/>
+            <a:off x="6309360" y="2834640"/>
             <a:ext cx="640080" cy="640080"/>
           </a:xfrm>
           <a:prstGeom prst="roundRect">
@@ -8063,7 +8111,7 @@
         </p:nvSpPr>
         <p:spPr>
           <a:xfrm>
-            <a:off x="6309360" y="3049524"/>
+            <a:off x="6309360" y="2866644"/>
             <a:ext cx="640080" cy="576072"/>
           </a:xfrm>
           <a:prstGeom prst="rect">
@@ -8098,7 +8146,7 @@
         </p:nvSpPr>
         <p:spPr>
           <a:xfrm>
-            <a:off x="6263640" y="3749039"/>
+            <a:off x="6263640" y="3611880"/>
             <a:ext cx="2560320" cy="594360"/>
           </a:xfrm>
           <a:prstGeom prst="rect">
@@ -8133,7 +8181,7 @@
         </p:nvSpPr>
         <p:spPr>
           <a:xfrm>
-            <a:off x="6263640" y="4370832"/>
+            <a:off x="6263640" y="4251960"/>
             <a:ext cx="2560320" cy="594360"/>
           </a:xfrm>
           <a:prstGeom prst="rect">
@@ -10251,7 +10299,7 @@
         <p:spPr>
           <a:xfrm>
             <a:off x="274320" y="914400"/>
-            <a:ext cx="5943600" cy="1417320"/>
+            <a:ext cx="8595360" cy="1417320"/>
           </a:xfrm>
           <a:prstGeom prst="roundRect">
             <a:avLst/>
@@ -10296,7 +10344,7 @@
         <p:spPr>
           <a:xfrm>
             <a:off x="438912" y="1078992"/>
-            <a:ext cx="5669280" cy="1143000"/>
+            <a:ext cx="8321040" cy="1143000"/>
           </a:xfrm>
           <a:prstGeom prst="rect">
             <a:avLst/>
@@ -10376,33 +10424,9 @@
           </a:p>
         </p:txBody>
       </p:sp>
-      <p:pic>
-        <p:nvPicPr>
-          <p:cNvPr id="52" name="Picture 51" descr="illust_yakuji.png"/>
-          <p:cNvPicPr>
-            <a:picLocks noChangeAspect="1"/>
-          </p:cNvPicPr>
-          <p:nvPr/>
-        </p:nvPicPr>
-        <p:blipFill>
-          <a:blip r:embed="rId2"/>
-          <a:stretch>
-            <a:fillRect/>
-          </a:stretch>
-        </p:blipFill>
-        <p:spPr>
-          <a:xfrm>
-            <a:off x="6217920" y="841248"/>
-            <a:ext cx="2651760" cy="2651760"/>
-          </a:xfrm>
-          <a:prstGeom prst="rect">
-            <a:avLst/>
-          </a:prstGeom>
-        </p:spPr>
-      </p:pic>
-      <p:sp>
-        <p:nvSpPr>
-          <p:cNvPr id="53" name="Rounded Rectangle 52"/>
+      <p:sp>
+        <p:nvSpPr>
+          <p:cNvPr id="52" name="Rounded Rectangle 51"/>
           <p:cNvSpPr/>
           <p:nvPr/>
         </p:nvSpPr>
@@ -10447,7 +10471,7 @@
       </p:sp>
       <p:sp>
         <p:nvSpPr>
-          <p:cNvPr id="54" name="TextBox 53"/>
+          <p:cNvPr id="53" name="TextBox 52"/>
           <p:cNvSpPr txBox="1"/>
           <p:nvPr/>
         </p:nvSpPr>
@@ -10511,7 +10535,7 @@
       </p:sp>
       <p:sp>
         <p:nvSpPr>
-          <p:cNvPr id="55" name="Rounded Rectangle 54"/>
+          <p:cNvPr id="54" name="Rounded Rectangle 53"/>
           <p:cNvSpPr/>
           <p:nvPr/>
         </p:nvSpPr>
@@ -10556,7 +10580,7 @@
       </p:sp>
       <p:sp>
         <p:nvSpPr>
-          <p:cNvPr id="56" name="TextBox 55"/>
+          <p:cNvPr id="55" name="TextBox 54"/>
           <p:cNvSpPr txBox="1"/>
           <p:nvPr/>
         </p:nvSpPr>
@@ -12680,7 +12704,7 @@
         <p:spPr>
           <a:xfrm>
             <a:off x="274320" y="914400"/>
-            <a:ext cx="7132320" cy="1097280"/>
+            <a:ext cx="8595360" cy="1097280"/>
           </a:xfrm>
           <a:prstGeom prst="roundRect">
             <a:avLst/>
@@ -12725,7 +12749,7 @@
         <p:spPr>
           <a:xfrm>
             <a:off x="438912" y="1078992"/>
-            <a:ext cx="6858000" cy="822960"/>
+            <a:ext cx="8321040" cy="822960"/>
           </a:xfrm>
           <a:prstGeom prst="rect">
             <a:avLst/>
@@ -12764,40 +12788,16 @@
           </a:p>
         </p:txBody>
       </p:sp>
-      <p:pic>
-        <p:nvPicPr>
-          <p:cNvPr id="52" name="Picture 51" descr="illust_ng_hyogen.png"/>
-          <p:cNvPicPr>
-            <a:picLocks noChangeAspect="1"/>
-          </p:cNvPicPr>
-          <p:nvPr/>
-        </p:nvPicPr>
-        <p:blipFill>
-          <a:blip r:embed="rId2"/>
-          <a:stretch>
-            <a:fillRect/>
-          </a:stretch>
-        </p:blipFill>
-        <p:spPr>
-          <a:xfrm>
-            <a:off x="7223760" y="841248"/>
-            <a:ext cx="1645920" cy="2286000"/>
-          </a:xfrm>
-          <a:prstGeom prst="rect">
-            <a:avLst/>
-          </a:prstGeom>
-        </p:spPr>
-      </p:pic>
-      <p:sp>
-        <p:nvSpPr>
-          <p:cNvPr id="53" name="Rounded Rectangle 52"/>
+      <p:sp>
+        <p:nvSpPr>
+          <p:cNvPr id="52" name="Rounded Rectangle 51"/>
           <p:cNvSpPr/>
           <p:nvPr/>
         </p:nvSpPr>
         <p:spPr>
           <a:xfrm>
             <a:off x="274320" y="2103120"/>
-            <a:ext cx="4023360" cy="2103120"/>
+            <a:ext cx="4114800" cy="2103120"/>
           </a:xfrm>
           <a:prstGeom prst="roundRect">
             <a:avLst/>
@@ -12835,14 +12835,14 @@
       </p:sp>
       <p:sp>
         <p:nvSpPr>
-          <p:cNvPr id="54" name="Rectangle 53"/>
+          <p:cNvPr id="53" name="Rectangle 52"/>
           <p:cNvSpPr/>
           <p:nvPr/>
         </p:nvSpPr>
         <p:spPr>
           <a:xfrm>
             <a:off x="274320" y="2103120"/>
-            <a:ext cx="4023360" cy="384048"/>
+            <a:ext cx="4114800" cy="384048"/>
           </a:xfrm>
           <a:prstGeom prst="rect">
             <a:avLst/>
@@ -12878,14 +12878,14 @@
       </p:sp>
       <p:sp>
         <p:nvSpPr>
-          <p:cNvPr id="55" name="TextBox 54"/>
+          <p:cNvPr id="54" name="TextBox 53"/>
           <p:cNvSpPr txBox="1"/>
           <p:nvPr/>
         </p:nvSpPr>
         <p:spPr>
           <a:xfrm>
             <a:off x="411479" y="2130551"/>
-            <a:ext cx="3749040" cy="347472"/>
+            <a:ext cx="3840480" cy="347472"/>
           </a:xfrm>
           <a:prstGeom prst="rect">
             <a:avLst/>
@@ -12913,14 +12913,14 @@
       </p:sp>
       <p:sp>
         <p:nvSpPr>
-          <p:cNvPr id="56" name="TextBox 55"/>
+          <p:cNvPr id="55" name="TextBox 54"/>
           <p:cNvSpPr txBox="1"/>
           <p:nvPr/>
         </p:nvSpPr>
         <p:spPr>
           <a:xfrm>
             <a:off x="438912" y="2560320"/>
-            <a:ext cx="3749040" cy="1536191"/>
+            <a:ext cx="3840480" cy="1536191"/>
           </a:xfrm>
           <a:prstGeom prst="rect">
             <a:avLst/>
@@ -12945,7 +12945,7 @@
                 </a:solidFill>
                 <a:latin typeface="Hiragino Kaku Gothic ProN"/>
               </a:rPr>
-              <a:t>•  客観的な証明（合理的な根拠）がないと景表法違反（優良誤認）になる</a:t>
+              <a:t>•  客観的な証明がないと景表法違反（優良誤認）になる</a:t>
             </a:r>
           </a:p>
           <a:p>
@@ -12968,7 +12968,7 @@
       </p:sp>
       <p:sp>
         <p:nvSpPr>
-          <p:cNvPr id="57" name="Rounded Rectangle 56"/>
+          <p:cNvPr id="56" name="Rounded Rectangle 55"/>
           <p:cNvSpPr/>
           <p:nvPr/>
         </p:nvSpPr>
@@ -13013,7 +13013,7 @@
       </p:sp>
       <p:sp>
         <p:nvSpPr>
-          <p:cNvPr id="58" name="Rectangle 57"/>
+          <p:cNvPr id="57" name="Rectangle 56"/>
           <p:cNvSpPr/>
           <p:nvPr/>
         </p:nvSpPr>
@@ -13056,7 +13056,7 @@
       </p:sp>
       <p:sp>
         <p:nvSpPr>
-          <p:cNvPr id="59" name="TextBox 58"/>
+          <p:cNvPr id="58" name="TextBox 57"/>
           <p:cNvSpPr txBox="1"/>
           <p:nvPr/>
         </p:nvSpPr>
@@ -13091,7 +13091,7 @@
       </p:sp>
       <p:sp>
         <p:nvSpPr>
-          <p:cNvPr id="60" name="TextBox 59"/>
+          <p:cNvPr id="59" name="TextBox 58"/>
           <p:cNvSpPr txBox="1"/>
           <p:nvPr/>
         </p:nvSpPr>
@@ -15412,7 +15412,7 @@
         <p:spPr>
           <a:xfrm>
             <a:off x="274320" y="2377440"/>
-            <a:ext cx="7132320" cy="1188720"/>
+            <a:ext cx="8595360" cy="1188720"/>
           </a:xfrm>
           <a:prstGeom prst="roundRect">
             <a:avLst/>
@@ -15457,7 +15457,7 @@
         <p:spPr>
           <a:xfrm>
             <a:off x="438912" y="2542032"/>
-            <a:ext cx="6858000" cy="914399"/>
+            <a:ext cx="8321040" cy="914399"/>
           </a:xfrm>
           <a:prstGeom prst="rect">
             <a:avLst/>
@@ -15503,33 +15503,9 @@
           </a:p>
         </p:txBody>
       </p:sp>
-      <p:pic>
-        <p:nvPicPr>
-          <p:cNvPr id="54" name="Picture 53" descr="illust_ng_hyogen.png"/>
-          <p:cNvPicPr>
-            <a:picLocks noChangeAspect="1"/>
-          </p:cNvPicPr>
-          <p:nvPr/>
-        </p:nvPicPr>
-        <p:blipFill>
-          <a:blip r:embed="rId2"/>
-          <a:stretch>
-            <a:fillRect/>
-          </a:stretch>
-        </p:blipFill>
-        <p:spPr>
-          <a:xfrm>
-            <a:off x="7223760" y="2331720"/>
-            <a:ext cx="1645920" cy="1645920"/>
-          </a:xfrm>
-          <a:prstGeom prst="rect">
-            <a:avLst/>
-          </a:prstGeom>
-        </p:spPr>
-      </p:pic>
-      <p:sp>
-        <p:nvSpPr>
-          <p:cNvPr id="55" name="Rounded Rectangle 54"/>
+      <p:sp>
+        <p:nvSpPr>
+          <p:cNvPr id="54" name="Rounded Rectangle 53"/>
           <p:cNvSpPr/>
           <p:nvPr/>
         </p:nvSpPr>
@@ -15574,7 +15550,7 @@
       </p:sp>
       <p:sp>
         <p:nvSpPr>
-          <p:cNvPr id="56" name="TextBox 55"/>
+          <p:cNvPr id="55" name="TextBox 54"/>
           <p:cNvSpPr txBox="1"/>
           <p:nvPr/>
         </p:nvSpPr>
@@ -18228,30 +18204,6 @@
           </a:p>
         </p:txBody>
       </p:sp>
-      <p:pic>
-        <p:nvPicPr>
-          <p:cNvPr id="60" name="Picture 59" descr="illust_yakuji.png"/>
-          <p:cNvPicPr>
-            <a:picLocks noChangeAspect="1"/>
-          </p:cNvPicPr>
-          <p:nvPr/>
-        </p:nvPicPr>
-        <p:blipFill>
-          <a:blip r:embed="rId2"/>
-          <a:stretch>
-            <a:fillRect/>
-          </a:stretch>
-        </p:blipFill>
-        <p:spPr>
-          <a:xfrm>
-            <a:off x="8138160" y="3017520"/>
-            <a:ext cx="822960" cy="822960"/>
-          </a:xfrm>
-          <a:prstGeom prst="rect">
-            <a:avLst/>
-          </a:prstGeom>
-        </p:spPr>
-      </p:pic>
     </p:spTree>
   </p:cSld>
   <p:clrMapOvr>
@@ -20308,7 +20260,7 @@
         <p:spPr>
           <a:xfrm>
             <a:off x="320040" y="91440"/>
-            <a:ext cx="5486400" cy="502920"/>
+            <a:ext cx="7315200" cy="502920"/>
           </a:xfrm>
           <a:prstGeom prst="rect">
             <a:avLst/>
@@ -21003,7 +20955,7 @@
         <p:spPr>
           <a:xfrm>
             <a:off x="3200400" y="1280160"/>
-            <a:ext cx="5303520" cy="1097280"/>
+            <a:ext cx="3840480" cy="1097280"/>
           </a:xfrm>
           <a:prstGeom prst="rect">
             <a:avLst/>
@@ -21038,7 +20990,7 @@
         <p:spPr>
           <a:xfrm>
             <a:off x="3200400" y="2468880"/>
-            <a:ext cx="5303520" cy="640080"/>
+            <a:ext cx="3840480" cy="640080"/>
           </a:xfrm>
           <a:prstGeom prst="rect">
             <a:avLst/>
@@ -21066,7 +21018,7 @@
       </p:sp>
       <p:pic>
         <p:nvPicPr>
-          <p:cNvPr id="6" name="Picture 5" descr="illust_copyright.png"/>
+          <p:cNvPr id="6" name="Picture 5" descr="image-5-4.png"/>
           <p:cNvPicPr>
             <a:picLocks noChangeAspect="1"/>
           </p:cNvPicPr>
@@ -21080,8 +21032,8 @@
         </p:blipFill>
         <p:spPr>
           <a:xfrm>
-            <a:off x="182880" y="1097280"/>
-            <a:ext cx="2468880" cy="2468880"/>
+            <a:off x="7132320" y="1188720"/>
+            <a:ext cx="1371600" cy="1371600"/>
           </a:xfrm>
           <a:prstGeom prst="rect">
             <a:avLst/>
@@ -23217,7 +23169,7 @@
       </p:sp>
       <p:pic>
         <p:nvPicPr>
-          <p:cNvPr id="51" name="Picture 50" descr="illust_copyright.png"/>
+          <p:cNvPr id="51" name="Picture 50" descr="image-1-3.png"/>
           <p:cNvPicPr>
             <a:picLocks noChangeAspect="1"/>
           </p:cNvPicPr>
@@ -23231,8 +23183,8 @@
         </p:blipFill>
         <p:spPr>
           <a:xfrm>
-            <a:off x="548640" y="1051560"/>
-            <a:ext cx="2103120" cy="1920240"/>
+            <a:off x="914400" y="1097280"/>
+            <a:ext cx="1371600" cy="1371600"/>
           </a:xfrm>
           <a:prstGeom prst="rect">
             <a:avLst/>
@@ -23247,7 +23199,7 @@
         </p:nvSpPr>
         <p:spPr>
           <a:xfrm>
-            <a:off x="365760" y="3017520"/>
+            <a:off x="365760" y="2834640"/>
             <a:ext cx="640080" cy="640080"/>
           </a:xfrm>
           <a:prstGeom prst="roundRect">
@@ -23290,7 +23242,7 @@
         </p:nvSpPr>
         <p:spPr>
           <a:xfrm>
-            <a:off x="365760" y="3049524"/>
+            <a:off x="365760" y="2866644"/>
             <a:ext cx="640080" cy="576072"/>
           </a:xfrm>
           <a:prstGeom prst="rect">
@@ -23325,7 +23277,7 @@
         </p:nvSpPr>
         <p:spPr>
           <a:xfrm>
-            <a:off x="320040" y="3749039"/>
+            <a:off x="320040" y="3611880"/>
             <a:ext cx="2560320" cy="594360"/>
           </a:xfrm>
           <a:prstGeom prst="rect">
@@ -23360,7 +23312,7 @@
         </p:nvSpPr>
         <p:spPr>
           <a:xfrm>
-            <a:off x="320040" y="4370832"/>
+            <a:off x="320040" y="4251960"/>
             <a:ext cx="2560320" cy="594360"/>
           </a:xfrm>
           <a:prstGeom prst="rect">
@@ -23434,7 +23386,7 @@
       </p:sp>
       <p:pic>
         <p:nvPicPr>
-          <p:cNvPr id="57" name="Picture 56" descr="illust_music.png"/>
+          <p:cNvPr id="57" name="Picture 56" descr="image-1-1.png"/>
           <p:cNvPicPr>
             <a:picLocks noChangeAspect="1"/>
           </p:cNvPicPr>
@@ -23448,8 +23400,8 @@
         </p:blipFill>
         <p:spPr>
           <a:xfrm>
-            <a:off x="3520440" y="1051560"/>
-            <a:ext cx="2103120" cy="1920240"/>
+            <a:off x="3886200" y="1097280"/>
+            <a:ext cx="1371600" cy="1371600"/>
           </a:xfrm>
           <a:prstGeom prst="rect">
             <a:avLst/>
@@ -23464,7 +23416,7 @@
         </p:nvSpPr>
         <p:spPr>
           <a:xfrm>
-            <a:off x="3337560" y="3017520"/>
+            <a:off x="3337560" y="2834640"/>
             <a:ext cx="640080" cy="640080"/>
           </a:xfrm>
           <a:prstGeom prst="roundRect">
@@ -23507,7 +23459,7 @@
         </p:nvSpPr>
         <p:spPr>
           <a:xfrm>
-            <a:off x="3337560" y="3049524"/>
+            <a:off x="3337560" y="2866644"/>
             <a:ext cx="640080" cy="576072"/>
           </a:xfrm>
           <a:prstGeom prst="rect">
@@ -23542,7 +23494,7 @@
         </p:nvSpPr>
         <p:spPr>
           <a:xfrm>
-            <a:off x="3291840" y="3749039"/>
+            <a:off x="3291840" y="3611880"/>
             <a:ext cx="2560320" cy="594360"/>
           </a:xfrm>
           <a:prstGeom prst="rect">
@@ -23577,7 +23529,7 @@
         </p:nvSpPr>
         <p:spPr>
           <a:xfrm>
-            <a:off x="3291840" y="4370832"/>
+            <a:off x="3291840" y="4251960"/>
             <a:ext cx="2560320" cy="594360"/>
           </a:xfrm>
           <a:prstGeom prst="rect">
@@ -23651,7 +23603,7 @@
       </p:sp>
       <p:pic>
         <p:nvPicPr>
-          <p:cNvPr id="63" name="Picture 62" descr="illust_tieup.png"/>
+          <p:cNvPr id="63" name="Picture 62" descr="image-5-4.png"/>
           <p:cNvPicPr>
             <a:picLocks noChangeAspect="1"/>
           </p:cNvPicPr>
@@ -23665,8 +23617,8 @@
         </p:blipFill>
         <p:spPr>
           <a:xfrm>
-            <a:off x="6492240" y="1051560"/>
-            <a:ext cx="2103120" cy="1920240"/>
+            <a:off x="6858000" y="1097280"/>
+            <a:ext cx="1371600" cy="1371600"/>
           </a:xfrm>
           <a:prstGeom prst="rect">
             <a:avLst/>
@@ -23681,7 +23633,7 @@
         </p:nvSpPr>
         <p:spPr>
           <a:xfrm>
-            <a:off x="6309360" y="3017520"/>
+            <a:off x="6309360" y="2834640"/>
             <a:ext cx="640080" cy="640080"/>
           </a:xfrm>
           <a:prstGeom prst="roundRect">
@@ -23724,7 +23676,7 @@
         </p:nvSpPr>
         <p:spPr>
           <a:xfrm>
-            <a:off x="6309360" y="3049524"/>
+            <a:off x="6309360" y="2866644"/>
             <a:ext cx="640080" cy="576072"/>
           </a:xfrm>
           <a:prstGeom prst="rect">
@@ -23759,7 +23711,7 @@
         </p:nvSpPr>
         <p:spPr>
           <a:xfrm>
-            <a:off x="6263640" y="3749039"/>
+            <a:off x="6263640" y="3611880"/>
             <a:ext cx="2560320" cy="594360"/>
           </a:xfrm>
           <a:prstGeom prst="rect">
@@ -23794,7 +23746,7 @@
         </p:nvSpPr>
         <p:spPr>
           <a:xfrm>
-            <a:off x="6263640" y="4370832"/>
+            <a:off x="6263640" y="4251960"/>
             <a:ext cx="2560320" cy="594360"/>
           </a:xfrm>
           <a:prstGeom prst="rect">
@@ -25912,7 +25864,7 @@
         <p:spPr>
           <a:xfrm>
             <a:off x="274320" y="914400"/>
-            <a:ext cx="6217920" cy="868680"/>
+            <a:ext cx="8595360" cy="822960"/>
           </a:xfrm>
           <a:prstGeom prst="roundRect">
             <a:avLst/>
@@ -25957,7 +25909,7 @@
         <p:spPr>
           <a:xfrm>
             <a:off x="438912" y="1078992"/>
-            <a:ext cx="5943600" cy="594360"/>
+            <a:ext cx="8321040" cy="548640"/>
           </a:xfrm>
           <a:prstGeom prst="rect">
             <a:avLst/>
@@ -25987,40 +25939,16 @@
           </a:p>
         </p:txBody>
       </p:sp>
-      <p:pic>
-        <p:nvPicPr>
-          <p:cNvPr id="52" name="Picture 51" descr="illust_copyright.png"/>
-          <p:cNvPicPr>
-            <a:picLocks noChangeAspect="1"/>
-          </p:cNvPicPr>
-          <p:nvPr/>
-        </p:nvPicPr>
-        <p:blipFill>
-          <a:blip r:embed="rId2"/>
-          <a:stretch>
-            <a:fillRect/>
-          </a:stretch>
-        </p:blipFill>
-        <p:spPr>
-          <a:xfrm>
-            <a:off x="6583680" y="822960"/>
-            <a:ext cx="2286000" cy="2286000"/>
-          </a:xfrm>
-          <a:prstGeom prst="rect">
-            <a:avLst/>
-          </a:prstGeom>
-        </p:spPr>
-      </p:pic>
-      <p:sp>
-        <p:nvSpPr>
-          <p:cNvPr id="53" name="Rounded Rectangle 52"/>
-          <p:cNvSpPr/>
-          <p:nvPr/>
-        </p:nvSpPr>
-        <p:spPr>
-          <a:xfrm>
-            <a:off x="274320" y="1874519"/>
-            <a:ext cx="8595360" cy="1554480"/>
+      <p:sp>
+        <p:nvSpPr>
+          <p:cNvPr id="52" name="Rounded Rectangle 51"/>
+          <p:cNvSpPr/>
+          <p:nvPr/>
+        </p:nvSpPr>
+        <p:spPr>
+          <a:xfrm>
+            <a:off x="274320" y="1828800"/>
+            <a:ext cx="8595360" cy="1600200"/>
           </a:xfrm>
           <a:prstGeom prst="roundRect">
             <a:avLst/>
@@ -26058,13 +25986,13 @@
       </p:sp>
       <p:sp>
         <p:nvSpPr>
-          <p:cNvPr id="54" name="Rectangle 53"/>
-          <p:cNvSpPr/>
-          <p:nvPr/>
-        </p:nvSpPr>
-        <p:spPr>
-          <a:xfrm>
-            <a:off x="274320" y="1874519"/>
+          <p:cNvPr id="53" name="Rectangle 52"/>
+          <p:cNvSpPr/>
+          <p:nvPr/>
+        </p:nvSpPr>
+        <p:spPr>
+          <a:xfrm>
+            <a:off x="274320" y="1828800"/>
             <a:ext cx="8595360" cy="384048"/>
           </a:xfrm>
           <a:prstGeom prst="rect">
@@ -26101,13 +26029,13 @@
       </p:sp>
       <p:sp>
         <p:nvSpPr>
-          <p:cNvPr id="55" name="TextBox 54"/>
+          <p:cNvPr id="54" name="TextBox 53"/>
           <p:cNvSpPr txBox="1"/>
           <p:nvPr/>
         </p:nvSpPr>
         <p:spPr>
           <a:xfrm>
-            <a:off x="411479" y="1901951"/>
+            <a:off x="411479" y="1856231"/>
             <a:ext cx="8321040" cy="347472"/>
           </a:xfrm>
           <a:prstGeom prst="rect">
@@ -26136,14 +26064,14 @@
       </p:sp>
       <p:sp>
         <p:nvSpPr>
-          <p:cNvPr id="56" name="TextBox 55"/>
+          <p:cNvPr id="55" name="TextBox 54"/>
           <p:cNvSpPr txBox="1"/>
           <p:nvPr/>
         </p:nvSpPr>
         <p:spPr>
           <a:xfrm>
-            <a:off x="438912" y="2331720"/>
-            <a:ext cx="8321040" cy="987552"/>
+            <a:off x="438912" y="2286000"/>
+            <a:ext cx="8321040" cy="1033271"/>
           </a:xfrm>
           <a:prstGeom prst="rect">
             <a:avLst/>
@@ -26231,7 +26159,7 @@
       </p:sp>
       <p:sp>
         <p:nvSpPr>
-          <p:cNvPr id="57" name="Rounded Rectangle 56"/>
+          <p:cNvPr id="56" name="Rounded Rectangle 55"/>
           <p:cNvSpPr/>
           <p:nvPr/>
         </p:nvSpPr>
@@ -26276,7 +26204,7 @@
       </p:sp>
       <p:sp>
         <p:nvSpPr>
-          <p:cNvPr id="58" name="TextBox 57"/>
+          <p:cNvPr id="57" name="TextBox 56"/>
           <p:cNvSpPr txBox="1"/>
           <p:nvPr/>
         </p:nvSpPr>
@@ -28400,7 +28328,7 @@
         <p:spPr>
           <a:xfrm>
             <a:off x="274320" y="914400"/>
-            <a:ext cx="6858000" cy="1005840"/>
+            <a:ext cx="8595360" cy="1005840"/>
           </a:xfrm>
           <a:prstGeom prst="roundRect">
             <a:avLst/>
@@ -28445,7 +28373,7 @@
         <p:spPr>
           <a:xfrm>
             <a:off x="438912" y="1078992"/>
-            <a:ext cx="6583680" cy="731520"/>
+            <a:ext cx="8321040" cy="731520"/>
           </a:xfrm>
           <a:prstGeom prst="rect">
             <a:avLst/>
@@ -28500,33 +28428,9 @@
           </a:p>
         </p:txBody>
       </p:sp>
-      <p:pic>
-        <p:nvPicPr>
-          <p:cNvPr id="52" name="Picture 51" descr="illust_music.png"/>
-          <p:cNvPicPr>
-            <a:picLocks noChangeAspect="1"/>
-          </p:cNvPicPr>
-          <p:nvPr/>
-        </p:nvPicPr>
-        <p:blipFill>
-          <a:blip r:embed="rId2"/>
-          <a:stretch>
-            <a:fillRect/>
-          </a:stretch>
-        </p:blipFill>
-        <p:spPr>
-          <a:xfrm>
-            <a:off x="6949440" y="841248"/>
-            <a:ext cx="1920240" cy="2560320"/>
-          </a:xfrm>
-          <a:prstGeom prst="rect">
-            <a:avLst/>
-          </a:prstGeom>
-        </p:spPr>
-      </p:pic>
-      <p:sp>
-        <p:nvSpPr>
-          <p:cNvPr id="53" name="Rounded Rectangle 52"/>
+      <p:sp>
+        <p:nvSpPr>
+          <p:cNvPr id="52" name="Rounded Rectangle 51"/>
           <p:cNvSpPr/>
           <p:nvPr/>
         </p:nvSpPr>
@@ -28571,7 +28475,7 @@
       </p:sp>
       <p:sp>
         <p:nvSpPr>
-          <p:cNvPr id="54" name="Rectangle 53"/>
+          <p:cNvPr id="53" name="Rectangle 52"/>
           <p:cNvSpPr/>
           <p:nvPr/>
         </p:nvSpPr>
@@ -28614,7 +28518,7 @@
       </p:sp>
       <p:sp>
         <p:nvSpPr>
-          <p:cNvPr id="55" name="TextBox 54"/>
+          <p:cNvPr id="54" name="TextBox 53"/>
           <p:cNvSpPr txBox="1"/>
           <p:nvPr/>
         </p:nvSpPr>
@@ -28649,7 +28553,7 @@
       </p:sp>
       <p:sp>
         <p:nvSpPr>
-          <p:cNvPr id="56" name="TextBox 55"/>
+          <p:cNvPr id="55" name="TextBox 54"/>
           <p:cNvSpPr txBox="1"/>
           <p:nvPr/>
         </p:nvSpPr>
@@ -28722,7 +28626,7 @@
       </p:sp>
       <p:sp>
         <p:nvSpPr>
-          <p:cNvPr id="57" name="Rounded Rectangle 56"/>
+          <p:cNvPr id="56" name="Rounded Rectangle 55"/>
           <p:cNvSpPr/>
           <p:nvPr/>
         </p:nvSpPr>
@@ -28767,7 +28671,7 @@
       </p:sp>
       <p:sp>
         <p:nvSpPr>
-          <p:cNvPr id="58" name="Rectangle 57"/>
+          <p:cNvPr id="57" name="Rectangle 56"/>
           <p:cNvSpPr/>
           <p:nvPr/>
         </p:nvSpPr>
@@ -28810,7 +28714,7 @@
       </p:sp>
       <p:sp>
         <p:nvSpPr>
-          <p:cNvPr id="59" name="TextBox 58"/>
+          <p:cNvPr id="58" name="TextBox 57"/>
           <p:cNvSpPr txBox="1"/>
           <p:nvPr/>
         </p:nvSpPr>
@@ -28845,7 +28749,7 @@
       </p:sp>
       <p:sp>
         <p:nvSpPr>
-          <p:cNvPr id="60" name="TextBox 59"/>
+          <p:cNvPr id="59" name="TextBox 58"/>
           <p:cNvSpPr txBox="1"/>
           <p:nvPr/>
         </p:nvSpPr>
@@ -29044,7 +28948,7 @@
         <p:spPr>
           <a:xfrm>
             <a:off x="3200400" y="1280160"/>
-            <a:ext cx="5303520" cy="1097280"/>
+            <a:ext cx="3840480" cy="1097280"/>
           </a:xfrm>
           <a:prstGeom prst="rect">
             <a:avLst/>
@@ -29079,7 +28983,7 @@
         <p:spPr>
           <a:xfrm>
             <a:off x="3200400" y="2468880"/>
-            <a:ext cx="5303520" cy="640080"/>
+            <a:ext cx="3840480" cy="640080"/>
           </a:xfrm>
           <a:prstGeom prst="rect">
             <a:avLst/>
@@ -29107,7 +29011,7 @@
       </p:sp>
       <p:pic>
         <p:nvPicPr>
-          <p:cNvPr id="6" name="Picture 5" descr="illust_stema.png"/>
+          <p:cNvPr id="6" name="Picture 5" descr="image-1-1.png"/>
           <p:cNvPicPr>
             <a:picLocks noChangeAspect="1"/>
           </p:cNvPicPr>
@@ -29121,8 +29025,8 @@
         </p:blipFill>
         <p:spPr>
           <a:xfrm>
-            <a:off x="182880" y="1097280"/>
-            <a:ext cx="2468880" cy="2468880"/>
+            <a:off x="7132320" y="1188720"/>
+            <a:ext cx="1371600" cy="1371600"/>
           </a:xfrm>
           <a:prstGeom prst="rect">
             <a:avLst/>
@@ -31220,7 +31124,7 @@
         <p:spPr>
           <a:xfrm>
             <a:off x="274320" y="914400"/>
-            <a:ext cx="6858000" cy="1005840"/>
+            <a:ext cx="8595360" cy="1005840"/>
           </a:xfrm>
           <a:prstGeom prst="roundRect">
             <a:avLst/>
@@ -31265,7 +31169,7 @@
         <p:spPr>
           <a:xfrm>
             <a:off x="438912" y="1078992"/>
-            <a:ext cx="6583680" cy="731520"/>
+            <a:ext cx="8321040" cy="731520"/>
           </a:xfrm>
           <a:prstGeom prst="rect">
             <a:avLst/>
@@ -31317,33 +31221,9 @@
           </a:p>
         </p:txBody>
       </p:sp>
-      <p:pic>
-        <p:nvPicPr>
-          <p:cNvPr id="52" name="Picture 51" descr="illust_tieup.png"/>
-          <p:cNvPicPr>
-            <a:picLocks noChangeAspect="1"/>
-          </p:cNvPicPr>
-          <p:nvPr/>
-        </p:nvPicPr>
-        <p:blipFill>
-          <a:blip r:embed="rId2"/>
-          <a:stretch>
-            <a:fillRect/>
-          </a:stretch>
-        </p:blipFill>
-        <p:spPr>
-          <a:xfrm>
-            <a:off x="6949440" y="841248"/>
-            <a:ext cx="1920240" cy="2560320"/>
-          </a:xfrm>
-          <a:prstGeom prst="rect">
-            <a:avLst/>
-          </a:prstGeom>
-        </p:spPr>
-      </p:pic>
-      <p:sp>
-        <p:nvSpPr>
-          <p:cNvPr id="53" name="Rounded Rectangle 52"/>
+      <p:sp>
+        <p:nvSpPr>
+          <p:cNvPr id="52" name="Rounded Rectangle 51"/>
           <p:cNvSpPr/>
           <p:nvPr/>
         </p:nvSpPr>
@@ -31388,7 +31268,7 @@
       </p:sp>
       <p:sp>
         <p:nvSpPr>
-          <p:cNvPr id="54" name="Rectangle 53"/>
+          <p:cNvPr id="53" name="Rectangle 52"/>
           <p:cNvSpPr/>
           <p:nvPr/>
         </p:nvSpPr>
@@ -31431,7 +31311,7 @@
       </p:sp>
       <p:sp>
         <p:nvSpPr>
-          <p:cNvPr id="55" name="TextBox 54"/>
+          <p:cNvPr id="54" name="TextBox 53"/>
           <p:cNvSpPr txBox="1"/>
           <p:nvPr/>
         </p:nvSpPr>
@@ -31466,7 +31346,7 @@
       </p:sp>
       <p:sp>
         <p:nvSpPr>
-          <p:cNvPr id="56" name="TextBox 55"/>
+          <p:cNvPr id="55" name="TextBox 54"/>
           <p:cNvSpPr txBox="1"/>
           <p:nvPr/>
         </p:nvSpPr>
@@ -31539,7 +31419,7 @@
       </p:sp>
       <p:sp>
         <p:nvSpPr>
-          <p:cNvPr id="57" name="Rounded Rectangle 56"/>
+          <p:cNvPr id="56" name="Rounded Rectangle 55"/>
           <p:cNvSpPr/>
           <p:nvPr/>
         </p:nvSpPr>
@@ -31584,7 +31464,7 @@
       </p:sp>
       <p:sp>
         <p:nvSpPr>
-          <p:cNvPr id="58" name="TextBox 57"/>
+          <p:cNvPr id="57" name="TextBox 56"/>
           <p:cNvSpPr txBox="1"/>
           <p:nvPr/>
         </p:nvSpPr>
@@ -33798,7 +33678,7 @@
         <p:spPr>
           <a:xfrm>
             <a:off x="274320" y="1920240"/>
-            <a:ext cx="6858000" cy="2240280"/>
+            <a:ext cx="8595360" cy="2240280"/>
           </a:xfrm>
           <a:prstGeom prst="roundRect">
             <a:avLst/>
@@ -33843,7 +33723,7 @@
         <p:spPr>
           <a:xfrm>
             <a:off x="274320" y="1920240"/>
-            <a:ext cx="6858000" cy="384048"/>
+            <a:ext cx="8595360" cy="384048"/>
           </a:xfrm>
           <a:prstGeom prst="rect">
             <a:avLst/>
@@ -33886,7 +33766,7 @@
         <p:spPr>
           <a:xfrm>
             <a:off x="411479" y="1947672"/>
-            <a:ext cx="6583680" cy="347472"/>
+            <a:ext cx="8321040" cy="347472"/>
           </a:xfrm>
           <a:prstGeom prst="rect">
             <a:avLst/>
@@ -33921,7 +33801,7 @@
         <p:spPr>
           <a:xfrm>
             <a:off x="438912" y="2377440"/>
-            <a:ext cx="6583680" cy="1673352"/>
+            <a:ext cx="8321040" cy="1673352"/>
           </a:xfrm>
           <a:prstGeom prst="rect">
             <a:avLst/>
@@ -34035,33 +33915,9 @@
           </a:p>
         </p:txBody>
       </p:sp>
-      <p:pic>
-        <p:nvPicPr>
-          <p:cNvPr id="56" name="Picture 55" descr="illust_risk.png"/>
-          <p:cNvPicPr>
-            <a:picLocks noChangeAspect="1"/>
-          </p:cNvPicPr>
-          <p:nvPr/>
-        </p:nvPicPr>
-        <p:blipFill>
-          <a:blip r:embed="rId2"/>
-          <a:stretch>
-            <a:fillRect/>
-          </a:stretch>
-        </p:blipFill>
-        <p:spPr>
-          <a:xfrm>
-            <a:off x="6949440" y="1920240"/>
-            <a:ext cx="1920240" cy="1920240"/>
-          </a:xfrm>
-          <a:prstGeom prst="rect">
-            <a:avLst/>
-          </a:prstGeom>
-        </p:spPr>
-      </p:pic>
-      <p:sp>
-        <p:nvSpPr>
-          <p:cNvPr id="57" name="Rounded Rectangle 56"/>
+      <p:sp>
+        <p:nvSpPr>
+          <p:cNvPr id="56" name="Rounded Rectangle 55"/>
           <p:cNvSpPr/>
           <p:nvPr/>
         </p:nvSpPr>
@@ -34106,7 +33962,7 @@
       </p:sp>
       <p:sp>
         <p:nvSpPr>
-          <p:cNvPr id="58" name="TextBox 57"/>
+          <p:cNvPr id="57" name="TextBox 56"/>
           <p:cNvSpPr txBox="1"/>
           <p:nvPr/>
         </p:nvSpPr>
@@ -36195,7 +36051,7 @@
         <p:spPr>
           <a:xfrm>
             <a:off x="320040" y="91440"/>
-            <a:ext cx="5486400" cy="502920"/>
+            <a:ext cx="7315200" cy="502920"/>
           </a:xfrm>
           <a:prstGeom prst="rect">
             <a:avLst/>
@@ -36890,7 +36746,7 @@
         <p:spPr>
           <a:xfrm>
             <a:off x="3200400" y="1280160"/>
-            <a:ext cx="5303520" cy="1097280"/>
+            <a:ext cx="3840480" cy="1097280"/>
           </a:xfrm>
           <a:prstGeom prst="rect">
             <a:avLst/>
@@ -36925,7 +36781,7 @@
         <p:spPr>
           <a:xfrm>
             <a:off x="3200400" y="2468880"/>
-            <a:ext cx="5303520" cy="640080"/>
+            <a:ext cx="3840480" cy="640080"/>
           </a:xfrm>
           <a:prstGeom prst="rect">
             <a:avLst/>
@@ -36953,7 +36809,7 @@
       </p:sp>
       <p:pic>
         <p:nvPicPr>
-          <p:cNvPr id="6" name="Picture 5" descr="illust_kyogai.png"/>
+          <p:cNvPr id="6" name="Picture 5" descr="image-2-1.png"/>
           <p:cNvPicPr>
             <a:picLocks noChangeAspect="1"/>
           </p:cNvPicPr>
@@ -36967,8 +36823,8 @@
         </p:blipFill>
         <p:spPr>
           <a:xfrm>
-            <a:off x="182880" y="1097280"/>
-            <a:ext cx="2468880" cy="2468880"/>
+            <a:off x="7132320" y="1188720"/>
+            <a:ext cx="1371600" cy="1371600"/>
           </a:xfrm>
           <a:prstGeom prst="rect">
             <a:avLst/>
@@ -39104,7 +38960,7 @@
       </p:sp>
       <p:pic>
         <p:nvPicPr>
-          <p:cNvPr id="51" name="Picture 50" descr="illust_stema.png"/>
+          <p:cNvPr id="51" name="Picture 50" descr="image-5-1.png"/>
           <p:cNvPicPr>
             <a:picLocks noChangeAspect="1"/>
           </p:cNvPicPr>
@@ -39118,8 +38974,8 @@
         </p:blipFill>
         <p:spPr>
           <a:xfrm>
-            <a:off x="548640" y="1051560"/>
-            <a:ext cx="2103120" cy="1920240"/>
+            <a:off x="914400" y="1097280"/>
+            <a:ext cx="1371600" cy="1371600"/>
           </a:xfrm>
           <a:prstGeom prst="rect">
             <a:avLst/>
@@ -39134,7 +38990,7 @@
         </p:nvSpPr>
         <p:spPr>
           <a:xfrm>
-            <a:off x="365760" y="3017520"/>
+            <a:off x="365760" y="2834640"/>
             <a:ext cx="640080" cy="640080"/>
           </a:xfrm>
           <a:prstGeom prst="roundRect">
@@ -39177,7 +39033,7 @@
         </p:nvSpPr>
         <p:spPr>
           <a:xfrm>
-            <a:off x="365760" y="3049524"/>
+            <a:off x="365760" y="2866644"/>
             <a:ext cx="640080" cy="576072"/>
           </a:xfrm>
           <a:prstGeom prst="rect">
@@ -39212,7 +39068,7 @@
         </p:nvSpPr>
         <p:spPr>
           <a:xfrm>
-            <a:off x="320040" y="3749039"/>
+            <a:off x="320040" y="3611880"/>
             <a:ext cx="2560320" cy="594360"/>
           </a:xfrm>
           <a:prstGeom prst="rect">
@@ -39247,7 +39103,7 @@
         </p:nvSpPr>
         <p:spPr>
           <a:xfrm>
-            <a:off x="320040" y="4370832"/>
+            <a:off x="320040" y="4251960"/>
             <a:ext cx="2560320" cy="594360"/>
           </a:xfrm>
           <a:prstGeom prst="rect">
@@ -39321,22 +39177,22 @@
       </p:sp>
       <p:pic>
         <p:nvPicPr>
-          <p:cNvPr id="57" name="Picture 56" descr="illust_kyogai.png"/>
+          <p:cNvPr id="57" name="Picture 56" descr="image-5-1.png"/>
           <p:cNvPicPr>
             <a:picLocks noChangeAspect="1"/>
           </p:cNvPicPr>
           <p:nvPr/>
         </p:nvPicPr>
         <p:blipFill>
-          <a:blip r:embed="rId3"/>
+          <a:blip r:embed="rId2"/>
           <a:stretch>
             <a:fillRect/>
           </a:stretch>
         </p:blipFill>
         <p:spPr>
           <a:xfrm>
-            <a:off x="3520440" y="1051560"/>
-            <a:ext cx="2103120" cy="1920240"/>
+            <a:off x="3886200" y="1097280"/>
+            <a:ext cx="1371600" cy="1371600"/>
           </a:xfrm>
           <a:prstGeom prst="rect">
             <a:avLst/>
@@ -39351,7 +39207,7 @@
         </p:nvSpPr>
         <p:spPr>
           <a:xfrm>
-            <a:off x="3337560" y="3017520"/>
+            <a:off x="3337560" y="2834640"/>
             <a:ext cx="640080" cy="640080"/>
           </a:xfrm>
           <a:prstGeom prst="roundRect">
@@ -39394,7 +39250,7 @@
         </p:nvSpPr>
         <p:spPr>
           <a:xfrm>
-            <a:off x="3337560" y="3049524"/>
+            <a:off x="3337560" y="2866644"/>
             <a:ext cx="640080" cy="576072"/>
           </a:xfrm>
           <a:prstGeom prst="rect">
@@ -39429,7 +39285,7 @@
         </p:nvSpPr>
         <p:spPr>
           <a:xfrm>
-            <a:off x="3291840" y="3749039"/>
+            <a:off x="3291840" y="3611880"/>
             <a:ext cx="2560320" cy="594360"/>
           </a:xfrm>
           <a:prstGeom prst="rect">
@@ -39464,7 +39320,7 @@
         </p:nvSpPr>
         <p:spPr>
           <a:xfrm>
-            <a:off x="3291840" y="4370832"/>
+            <a:off x="3291840" y="4251960"/>
             <a:ext cx="2560320" cy="594360"/>
           </a:xfrm>
           <a:prstGeom prst="rect">
@@ -39538,22 +39394,22 @@
       </p:sp>
       <p:pic>
         <p:nvPicPr>
-          <p:cNvPr id="63" name="Picture 62" descr="illust_shield.png"/>
+          <p:cNvPr id="63" name="Picture 62" descr="image-6-1.png"/>
           <p:cNvPicPr>
             <a:picLocks noChangeAspect="1"/>
           </p:cNvPicPr>
           <p:nvPr/>
         </p:nvPicPr>
         <p:blipFill>
-          <a:blip r:embed="rId4"/>
+          <a:blip r:embed="rId3"/>
           <a:stretch>
             <a:fillRect/>
           </a:stretch>
         </p:blipFill>
         <p:spPr>
           <a:xfrm>
-            <a:off x="6492240" y="1051560"/>
-            <a:ext cx="2103120" cy="1920240"/>
+            <a:off x="6858000" y="1097280"/>
+            <a:ext cx="1371600" cy="1371600"/>
           </a:xfrm>
           <a:prstGeom prst="rect">
             <a:avLst/>
@@ -39568,7 +39424,7 @@
         </p:nvSpPr>
         <p:spPr>
           <a:xfrm>
-            <a:off x="6309360" y="3017520"/>
+            <a:off x="6309360" y="2834640"/>
             <a:ext cx="640080" cy="640080"/>
           </a:xfrm>
           <a:prstGeom prst="roundRect">
@@ -39611,7 +39467,7 @@
         </p:nvSpPr>
         <p:spPr>
           <a:xfrm>
-            <a:off x="6309360" y="3049524"/>
+            <a:off x="6309360" y="2866644"/>
             <a:ext cx="640080" cy="576072"/>
           </a:xfrm>
           <a:prstGeom prst="rect">
@@ -39646,7 +39502,7 @@
         </p:nvSpPr>
         <p:spPr>
           <a:xfrm>
-            <a:off x="6263640" y="3749039"/>
+            <a:off x="6263640" y="3611880"/>
             <a:ext cx="2560320" cy="594360"/>
           </a:xfrm>
           <a:prstGeom prst="rect">
@@ -39681,7 +39537,7 @@
         </p:nvSpPr>
         <p:spPr>
           <a:xfrm>
-            <a:off x="6263640" y="4370832"/>
+            <a:off x="6263640" y="4251960"/>
             <a:ext cx="2560320" cy="594360"/>
           </a:xfrm>
           <a:prstGeom prst="rect">
@@ -41799,7 +41655,7 @@
         <p:spPr>
           <a:xfrm>
             <a:off x="274320" y="914400"/>
-            <a:ext cx="6858000" cy="3246120"/>
+            <a:ext cx="8595360" cy="3246120"/>
           </a:xfrm>
           <a:prstGeom prst="roundRect">
             <a:avLst/>
@@ -41844,7 +41700,7 @@
         <p:spPr>
           <a:xfrm>
             <a:off x="438912" y="1078992"/>
-            <a:ext cx="6583680" cy="2971800"/>
+            <a:ext cx="8321040" cy="2971800"/>
           </a:xfrm>
           <a:prstGeom prst="rect">
             <a:avLst/>
@@ -41974,30 +41830,6 @@
           </a:p>
         </p:txBody>
       </p:sp>
-      <p:pic>
-        <p:nvPicPr>
-          <p:cNvPr id="52" name="Picture 51" descr="illust_stema.png"/>
-          <p:cNvPicPr>
-            <a:picLocks noChangeAspect="1"/>
-          </p:cNvPicPr>
-          <p:nvPr/>
-        </p:nvPicPr>
-        <p:blipFill>
-          <a:blip r:embed="rId2"/>
-          <a:stretch>
-            <a:fillRect/>
-          </a:stretch>
-        </p:blipFill>
-        <p:spPr>
-          <a:xfrm>
-            <a:off x="6949440" y="914400"/>
-            <a:ext cx="1920240" cy="2286000"/>
-          </a:xfrm>
-          <a:prstGeom prst="rect">
-            <a:avLst/>
-          </a:prstGeom>
-        </p:spPr>
-      </p:pic>
     </p:spTree>
   </p:cSld>
   <p:clrMapOvr>
@@ -44089,7 +43921,7 @@
         <p:spPr>
           <a:xfrm>
             <a:off x="274320" y="914400"/>
-            <a:ext cx="6400800" cy="1325880"/>
+            <a:ext cx="8595360" cy="1325880"/>
           </a:xfrm>
           <a:prstGeom prst="roundRect">
             <a:avLst/>
@@ -44134,7 +43966,7 @@
         <p:spPr>
           <a:xfrm>
             <a:off x="438912" y="1078992"/>
-            <a:ext cx="6126480" cy="1051560"/>
+            <a:ext cx="8321040" cy="1051560"/>
           </a:xfrm>
           <a:prstGeom prst="rect">
             <a:avLst/>
@@ -44180,40 +44012,16 @@
           </a:p>
         </p:txBody>
       </p:sp>
-      <p:pic>
-        <p:nvPicPr>
-          <p:cNvPr id="52" name="Picture 51" descr="illust_kyogai.png"/>
-          <p:cNvPicPr>
-            <a:picLocks noChangeAspect="1"/>
-          </p:cNvPicPr>
-          <p:nvPr/>
-        </p:nvPicPr>
-        <p:blipFill>
-          <a:blip r:embed="rId2"/>
-          <a:stretch>
-            <a:fillRect/>
-          </a:stretch>
-        </p:blipFill>
-        <p:spPr>
-          <a:xfrm>
-            <a:off x="6492240" y="841248"/>
-            <a:ext cx="2377440" cy="3200400"/>
-          </a:xfrm>
-          <a:prstGeom prst="rect">
-            <a:avLst/>
-          </a:prstGeom>
-        </p:spPr>
-      </p:pic>
-      <p:sp>
-        <p:nvSpPr>
-          <p:cNvPr id="53" name="Rounded Rectangle 52"/>
+      <p:sp>
+        <p:nvSpPr>
+          <p:cNvPr id="52" name="Rounded Rectangle 51"/>
           <p:cNvSpPr/>
           <p:nvPr/>
         </p:nvSpPr>
         <p:spPr>
           <a:xfrm>
             <a:off x="274320" y="2331720"/>
-            <a:ext cx="6217920" cy="1645920"/>
+            <a:ext cx="8595360" cy="1645920"/>
           </a:xfrm>
           <a:prstGeom prst="roundRect">
             <a:avLst/>
@@ -44251,14 +44059,14 @@
       </p:sp>
       <p:sp>
         <p:nvSpPr>
-          <p:cNvPr id="54" name="Rectangle 53"/>
+          <p:cNvPr id="53" name="Rectangle 52"/>
           <p:cNvSpPr/>
           <p:nvPr/>
         </p:nvSpPr>
         <p:spPr>
           <a:xfrm>
             <a:off x="274320" y="2331720"/>
-            <a:ext cx="6217920" cy="384048"/>
+            <a:ext cx="8595360" cy="384048"/>
           </a:xfrm>
           <a:prstGeom prst="rect">
             <a:avLst/>
@@ -44294,14 +44102,14 @@
       </p:sp>
       <p:sp>
         <p:nvSpPr>
-          <p:cNvPr id="55" name="TextBox 54"/>
+          <p:cNvPr id="54" name="TextBox 53"/>
           <p:cNvSpPr txBox="1"/>
           <p:nvPr/>
         </p:nvSpPr>
         <p:spPr>
           <a:xfrm>
             <a:off x="411479" y="2359151"/>
-            <a:ext cx="5943600" cy="347472"/>
+            <a:ext cx="8321040" cy="347472"/>
           </a:xfrm>
           <a:prstGeom prst="rect">
             <a:avLst/>
@@ -44329,14 +44137,14 @@
       </p:sp>
       <p:sp>
         <p:nvSpPr>
-          <p:cNvPr id="56" name="TextBox 55"/>
+          <p:cNvPr id="55" name="TextBox 54"/>
           <p:cNvSpPr txBox="1"/>
           <p:nvPr/>
         </p:nvSpPr>
         <p:spPr>
           <a:xfrm>
             <a:off x="438912" y="2788920"/>
-            <a:ext cx="5943600" cy="1078992"/>
+            <a:ext cx="8321040" cy="1078992"/>
           </a:xfrm>
           <a:prstGeom prst="rect">
             <a:avLst/>
@@ -44452,7 +44260,7 @@
       </p:sp>
       <p:sp>
         <p:nvSpPr>
-          <p:cNvPr id="57" name="Rounded Rectangle 56"/>
+          <p:cNvPr id="56" name="Rounded Rectangle 55"/>
           <p:cNvSpPr/>
           <p:nvPr/>
         </p:nvSpPr>
@@ -44497,7 +44305,7 @@
       </p:sp>
       <p:sp>
         <p:nvSpPr>
-          <p:cNvPr id="58" name="TextBox 57"/>
+          <p:cNvPr id="57" name="TextBox 56"/>
           <p:cNvSpPr txBox="1"/>
           <p:nvPr/>
         </p:nvSpPr>
@@ -46649,7 +46457,7 @@
       </p:sp>
       <p:pic>
         <p:nvPicPr>
-          <p:cNvPr id="51" name="Picture 50" descr="illust_stema.png"/>
+          <p:cNvPr id="51" name="Picture 50" descr="image-2-1.png"/>
           <p:cNvPicPr>
             <a:picLocks noChangeAspect="1"/>
           </p:cNvPicPr>
@@ -46663,7 +46471,7 @@
         </p:blipFill>
         <p:spPr>
           <a:xfrm>
-            <a:off x="91440" y="1188720"/>
+            <a:off x="274320" y="1234440"/>
             <a:ext cx="1371600" cy="1371600"/>
           </a:xfrm>
           <a:prstGeom prst="rect">
@@ -46673,7 +46481,7 @@
       </p:pic>
       <p:pic>
         <p:nvPicPr>
-          <p:cNvPr id="52" name="Picture 51" descr="illust_shield.png"/>
+          <p:cNvPr id="52" name="Picture 51" descr="image-6-1.png"/>
           <p:cNvPicPr>
             <a:picLocks noChangeAspect="1"/>
           </p:cNvPicPr>
@@ -46687,7 +46495,7 @@
         </p:blipFill>
         <p:spPr>
           <a:xfrm>
-            <a:off x="3886200" y="1188720"/>
+            <a:off x="3886200" y="1234440"/>
             <a:ext cx="1371600" cy="1371600"/>
           </a:xfrm>
           <a:prstGeom prst="rect">
@@ -46697,7 +46505,7 @@
       </p:pic>
       <p:pic>
         <p:nvPicPr>
-          <p:cNvPr id="53" name="Picture 52" descr="illust_kyogai.png"/>
+          <p:cNvPr id="53" name="Picture 52" descr="image-1-2.png"/>
           <p:cNvPicPr>
             <a:picLocks noChangeAspect="1"/>
           </p:cNvPicPr>
@@ -46711,7 +46519,7 @@
         </p:blipFill>
         <p:spPr>
           <a:xfrm>
-            <a:off x="7589520" y="1188720"/>
+            <a:off x="7498079" y="1234440"/>
             <a:ext cx="1371600" cy="1371600"/>
           </a:xfrm>
           <a:prstGeom prst="rect">
@@ -46727,7 +46535,7 @@
         </p:nvSpPr>
         <p:spPr>
           <a:xfrm>
-            <a:off x="502920" y="2697480"/>
+            <a:off x="502920" y="2788920"/>
             <a:ext cx="8138160" cy="566928"/>
           </a:xfrm>
           <a:prstGeom prst="roundRect">
@@ -46772,7 +46580,7 @@
         </p:nvSpPr>
         <p:spPr>
           <a:xfrm>
-            <a:off x="548640" y="2752344"/>
+            <a:off x="548640" y="2843784"/>
             <a:ext cx="457200" cy="457200"/>
           </a:xfrm>
           <a:prstGeom prst="roundRect">
@@ -46815,7 +46623,7 @@
         </p:nvSpPr>
         <p:spPr>
           <a:xfrm>
-            <a:off x="548640" y="2775204"/>
+            <a:off x="548640" y="2866644"/>
             <a:ext cx="457200" cy="411480"/>
           </a:xfrm>
           <a:prstGeom prst="rect">
@@ -46850,7 +46658,7 @@
         </p:nvSpPr>
         <p:spPr>
           <a:xfrm>
-            <a:off x="1143000" y="2788920"/>
+            <a:off x="1143000" y="2880360"/>
             <a:ext cx="7406640" cy="411480"/>
           </a:xfrm>
           <a:prstGeom prst="rect">
@@ -46885,7 +46693,7 @@
         </p:nvSpPr>
         <p:spPr>
           <a:xfrm>
-            <a:off x="502920" y="3383280"/>
+            <a:off x="502920" y="3474720"/>
             <a:ext cx="8138160" cy="566928"/>
           </a:xfrm>
           <a:prstGeom prst="roundRect">
@@ -46930,7 +46738,7 @@
         </p:nvSpPr>
         <p:spPr>
           <a:xfrm>
-            <a:off x="548640" y="3438144"/>
+            <a:off x="548640" y="3529584"/>
             <a:ext cx="457200" cy="457200"/>
           </a:xfrm>
           <a:prstGeom prst="roundRect">
@@ -46973,7 +46781,7 @@
         </p:nvSpPr>
         <p:spPr>
           <a:xfrm>
-            <a:off x="548640" y="3461004"/>
+            <a:off x="548640" y="3552444"/>
             <a:ext cx="457200" cy="411480"/>
           </a:xfrm>
           <a:prstGeom prst="rect">
@@ -47008,7 +46816,7 @@
         </p:nvSpPr>
         <p:spPr>
           <a:xfrm>
-            <a:off x="1143000" y="3474720"/>
+            <a:off x="1143000" y="3566160"/>
             <a:ext cx="7406640" cy="411480"/>
           </a:xfrm>
           <a:prstGeom prst="rect">
@@ -47043,7 +46851,7 @@
         </p:nvSpPr>
         <p:spPr>
           <a:xfrm>
-            <a:off x="502920" y="4069080"/>
+            <a:off x="502920" y="4160520"/>
             <a:ext cx="8138160" cy="566928"/>
           </a:xfrm>
           <a:prstGeom prst="roundRect">
@@ -47088,7 +46896,7 @@
         </p:nvSpPr>
         <p:spPr>
           <a:xfrm>
-            <a:off x="548640" y="4123944"/>
+            <a:off x="548640" y="4215383"/>
             <a:ext cx="457200" cy="457200"/>
           </a:xfrm>
           <a:prstGeom prst="roundRect">
@@ -47131,7 +46939,7 @@
         </p:nvSpPr>
         <p:spPr>
           <a:xfrm>
-            <a:off x="548640" y="4146804"/>
+            <a:off x="548640" y="4238244"/>
             <a:ext cx="457200" cy="411480"/>
           </a:xfrm>
           <a:prstGeom prst="rect">
@@ -47166,7 +46974,7 @@
         </p:nvSpPr>
         <p:spPr>
           <a:xfrm>
-            <a:off x="1143000" y="4160520"/>
+            <a:off x="1143000" y="4251959"/>
             <a:ext cx="7406640" cy="411480"/>
           </a:xfrm>
           <a:prstGeom prst="rect">
@@ -47202,7 +47010,7 @@
         <p:spPr>
           <a:xfrm>
             <a:off x="320040" y="4681728"/>
-            <a:ext cx="8503920" cy="320040"/>
+            <a:ext cx="8503920" cy="329184"/>
           </a:xfrm>
           <a:prstGeom prst="roundRect">
             <a:avLst/>
@@ -47244,8 +47052,8 @@
         </p:nvSpPr>
         <p:spPr>
           <a:xfrm>
-            <a:off x="457200" y="4690872"/>
-            <a:ext cx="8229600" cy="292608"/>
+            <a:off x="457200" y="4700016"/>
+            <a:ext cx="8229600" cy="274320"/>
           </a:xfrm>
           <a:prstGeom prst="rect">
             <a:avLst/>
@@ -47260,7 +47068,7 @@
           <a:p>
             <a:pPr algn="ctr"/>
             <a:r>
-              <a:rPr sz="1200" b="1" i="1">
+              <a:rPr sz="1100" b="1" i="1">
                 <a:solidFill>
                   <a:srgbClr val="1A1A1A"/>
                 </a:solidFill>
@@ -49400,7 +49208,7 @@
       </p:sp>
       <p:pic>
         <p:nvPicPr>
-          <p:cNvPr id="51" name="Picture 50" descr="illust_stema.png"/>
+          <p:cNvPr id="51" name="Picture 50" descr="image-1-3.png"/>
           <p:cNvPicPr>
             <a:picLocks noChangeAspect="1"/>
           </p:cNvPicPr>
@@ -49414,8 +49222,8 @@
         </p:blipFill>
         <p:spPr>
           <a:xfrm>
-            <a:off x="548640" y="1051560"/>
-            <a:ext cx="2103120" cy="1920240"/>
+            <a:off x="914400" y="1097280"/>
+            <a:ext cx="1371600" cy="1371600"/>
           </a:xfrm>
           <a:prstGeom prst="rect">
             <a:avLst/>
@@ -49430,7 +49238,7 @@
         </p:nvSpPr>
         <p:spPr>
           <a:xfrm>
-            <a:off x="365760" y="3017520"/>
+            <a:off x="365760" y="2834640"/>
             <a:ext cx="640080" cy="640080"/>
           </a:xfrm>
           <a:prstGeom prst="roundRect">
@@ -49473,7 +49281,7 @@
         </p:nvSpPr>
         <p:spPr>
           <a:xfrm>
-            <a:off x="365760" y="3049524"/>
+            <a:off x="365760" y="2866644"/>
             <a:ext cx="640080" cy="576072"/>
           </a:xfrm>
           <a:prstGeom prst="rect">
@@ -49508,7 +49316,7 @@
         </p:nvSpPr>
         <p:spPr>
           <a:xfrm>
-            <a:off x="320040" y="3749039"/>
+            <a:off x="320040" y="3611880"/>
             <a:ext cx="2560320" cy="594360"/>
           </a:xfrm>
           <a:prstGeom prst="rect">
@@ -49543,7 +49351,7 @@
         </p:nvSpPr>
         <p:spPr>
           <a:xfrm>
-            <a:off x="320040" y="4370832"/>
+            <a:off x="320040" y="4251960"/>
             <a:ext cx="2560320" cy="594360"/>
           </a:xfrm>
           <a:prstGeom prst="rect">
@@ -49617,7 +49425,7 @@
       </p:sp>
       <p:pic>
         <p:nvPicPr>
-          <p:cNvPr id="57" name="Picture 56" descr="illust_pr_hyoki.png"/>
+          <p:cNvPr id="57" name="Picture 56" descr="image-1-1.png"/>
           <p:cNvPicPr>
             <a:picLocks noChangeAspect="1"/>
           </p:cNvPicPr>
@@ -49631,8 +49439,8 @@
         </p:blipFill>
         <p:spPr>
           <a:xfrm>
-            <a:off x="3520440" y="1051560"/>
-            <a:ext cx="2103120" cy="1920240"/>
+            <a:off x="3886200" y="1097280"/>
+            <a:ext cx="1371600" cy="1371600"/>
           </a:xfrm>
           <a:prstGeom prst="rect">
             <a:avLst/>
@@ -49647,7 +49455,7 @@
         </p:nvSpPr>
         <p:spPr>
           <a:xfrm>
-            <a:off x="3337560" y="3017520"/>
+            <a:off x="3337560" y="2834640"/>
             <a:ext cx="640080" cy="640080"/>
           </a:xfrm>
           <a:prstGeom prst="roundRect">
@@ -49690,7 +49498,7 @@
         </p:nvSpPr>
         <p:spPr>
           <a:xfrm>
-            <a:off x="3337560" y="3049524"/>
+            <a:off x="3337560" y="2866644"/>
             <a:ext cx="640080" cy="576072"/>
           </a:xfrm>
           <a:prstGeom prst="rect">
@@ -49725,7 +49533,7 @@
         </p:nvSpPr>
         <p:spPr>
           <a:xfrm>
-            <a:off x="3291840" y="3749039"/>
+            <a:off x="3291840" y="3611880"/>
             <a:ext cx="2560320" cy="594360"/>
           </a:xfrm>
           <a:prstGeom prst="rect">
@@ -49760,7 +49568,7 @@
         </p:nvSpPr>
         <p:spPr>
           <a:xfrm>
-            <a:off x="3291840" y="4370832"/>
+            <a:off x="3291840" y="4251960"/>
             <a:ext cx="2560320" cy="594360"/>
           </a:xfrm>
           <a:prstGeom prst="rect">
@@ -49834,7 +49642,7 @@
       </p:sp>
       <p:pic>
         <p:nvPicPr>
-          <p:cNvPr id="63" name="Picture 62" descr="illust_risk.png"/>
+          <p:cNvPr id="63" name="Picture 62" descr="image-6-1.png"/>
           <p:cNvPicPr>
             <a:picLocks noChangeAspect="1"/>
           </p:cNvPicPr>
@@ -49848,8 +49656,8 @@
         </p:blipFill>
         <p:spPr>
           <a:xfrm>
-            <a:off x="6492240" y="1051560"/>
-            <a:ext cx="2103120" cy="1920240"/>
+            <a:off x="6858000" y="1097280"/>
+            <a:ext cx="1371600" cy="1371600"/>
           </a:xfrm>
           <a:prstGeom prst="rect">
             <a:avLst/>
@@ -49864,7 +49672,7 @@
         </p:nvSpPr>
         <p:spPr>
           <a:xfrm>
-            <a:off x="6309360" y="3017520"/>
+            <a:off x="6309360" y="2834640"/>
             <a:ext cx="640080" cy="640080"/>
           </a:xfrm>
           <a:prstGeom prst="roundRect">
@@ -49907,7 +49715,7 @@
         </p:nvSpPr>
         <p:spPr>
           <a:xfrm>
-            <a:off x="6309360" y="3049524"/>
+            <a:off x="6309360" y="2866644"/>
             <a:ext cx="640080" cy="576072"/>
           </a:xfrm>
           <a:prstGeom prst="rect">
@@ -49942,7 +49750,7 @@
         </p:nvSpPr>
         <p:spPr>
           <a:xfrm>
-            <a:off x="6263640" y="3749039"/>
+            <a:off x="6263640" y="3611880"/>
             <a:ext cx="2560320" cy="594360"/>
           </a:xfrm>
           <a:prstGeom prst="rect">
@@ -49977,7 +49785,7 @@
         </p:nvSpPr>
         <p:spPr>
           <a:xfrm>
-            <a:off x="6263640" y="4370832"/>
+            <a:off x="6263640" y="4251960"/>
             <a:ext cx="2560320" cy="594360"/>
           </a:xfrm>
           <a:prstGeom prst="rect">
@@ -52095,7 +51903,7 @@
         <p:spPr>
           <a:xfrm>
             <a:off x="274320" y="914400"/>
-            <a:ext cx="5486400" cy="2377440"/>
+            <a:ext cx="8595360" cy="2377440"/>
           </a:xfrm>
           <a:prstGeom prst="roundRect">
             <a:avLst/>
@@ -52140,7 +51948,7 @@
         <p:spPr>
           <a:xfrm>
             <a:off x="438912" y="1078992"/>
-            <a:ext cx="5212080" cy="2103120"/>
+            <a:ext cx="8321040" cy="2103120"/>
           </a:xfrm>
           <a:prstGeom prst="rect">
             <a:avLst/>
@@ -52202,33 +52010,9 @@
           </a:p>
         </p:txBody>
       </p:sp>
-      <p:pic>
-        <p:nvPicPr>
-          <p:cNvPr id="52" name="Picture 51" descr="illust_stema.png"/>
-          <p:cNvPicPr>
-            <a:picLocks noChangeAspect="1"/>
-          </p:cNvPicPr>
-          <p:nvPr/>
-        </p:nvPicPr>
-        <p:blipFill>
-          <a:blip r:embed="rId2"/>
-          <a:stretch>
-            <a:fillRect/>
-          </a:stretch>
-        </p:blipFill>
-        <p:spPr>
-          <a:xfrm>
-            <a:off x="5852160" y="868680"/>
-            <a:ext cx="3017520" cy="3017520"/>
-          </a:xfrm>
-          <a:prstGeom prst="rect">
-            <a:avLst/>
-          </a:prstGeom>
-        </p:spPr>
-      </p:pic>
-      <p:sp>
-        <p:nvSpPr>
-          <p:cNvPr id="53" name="Rounded Rectangle 52"/>
+      <p:sp>
+        <p:nvSpPr>
+          <p:cNvPr id="52" name="Rounded Rectangle 51"/>
           <p:cNvSpPr/>
           <p:nvPr/>
         </p:nvSpPr>
@@ -52273,7 +52057,7 @@
       </p:sp>
       <p:sp>
         <p:nvSpPr>
-          <p:cNvPr id="54" name="TextBox 53"/>
+          <p:cNvPr id="53" name="TextBox 52"/>
           <p:cNvSpPr txBox="1"/>
           <p:nvPr/>
         </p:nvSpPr>
@@ -52301,7 +52085,7 @@
                 </a:solidFill>
                 <a:latin typeface="Hiragino Kaku Gothic ProN"/>
               </a:rPr>
-              <a:t>【重要】フォロワーを騙す違法行為。「知らなかった」では済まされない。</a:t>
+              <a:t>【重要】企業から報酬を受け取りながら自腹で買ったように装う行為＝ステマ。フォロワーを騙す違法行為であり「知らなかった」では済まされない。</a:t>
             </a:r>
           </a:p>
         </p:txBody>
@@ -54830,33 +54614,9 @@
           </a:p>
         </p:txBody>
       </p:sp>
-      <p:pic>
-        <p:nvPicPr>
-          <p:cNvPr id="58" name="Picture 57" descr="illust_pr_hyoki.png"/>
-          <p:cNvPicPr>
-            <a:picLocks noChangeAspect="1"/>
-          </p:cNvPicPr>
-          <p:nvPr/>
-        </p:nvPicPr>
-        <p:blipFill>
-          <a:blip r:embed="rId2"/>
-          <a:stretch>
-            <a:fillRect/>
-          </a:stretch>
-        </p:blipFill>
-        <p:spPr>
-          <a:xfrm>
-            <a:off x="3566160" y="914400"/>
-            <a:ext cx="1005840" cy="1005840"/>
-          </a:xfrm>
-          <a:prstGeom prst="rect">
-            <a:avLst/>
-          </a:prstGeom>
-        </p:spPr>
-      </p:pic>
-      <p:sp>
-        <p:nvSpPr>
-          <p:cNvPr id="59" name="Rounded Rectangle 58"/>
+      <p:sp>
+        <p:nvSpPr>
+          <p:cNvPr id="58" name="Rounded Rectangle 57"/>
           <p:cNvSpPr/>
           <p:nvPr/>
         </p:nvSpPr>
@@ -54901,7 +54661,7 @@
       </p:sp>
       <p:sp>
         <p:nvSpPr>
-          <p:cNvPr id="60" name="TextBox 59"/>
+          <p:cNvPr id="59" name="TextBox 58"/>
           <p:cNvSpPr txBox="1"/>
           <p:nvPr/>
         </p:nvSpPr>
@@ -57025,7 +56785,7 @@
         <p:spPr>
           <a:xfrm>
             <a:off x="274320" y="914400"/>
-            <a:ext cx="5943600" cy="1645920"/>
+            <a:ext cx="8595360" cy="1645920"/>
           </a:xfrm>
           <a:prstGeom prst="roundRect">
             <a:avLst/>
@@ -57070,7 +56830,7 @@
         <p:spPr>
           <a:xfrm>
             <a:off x="438912" y="1078992"/>
-            <a:ext cx="5669280" cy="1371600"/>
+            <a:ext cx="8321040" cy="1371600"/>
           </a:xfrm>
           <a:prstGeom prst="rect">
             <a:avLst/>
@@ -57150,33 +56910,9 @@
           </a:p>
         </p:txBody>
       </p:sp>
-      <p:pic>
-        <p:nvPicPr>
-          <p:cNvPr id="52" name="Picture 51" descr="illust_tieup.png"/>
-          <p:cNvPicPr>
-            <a:picLocks noChangeAspect="1"/>
-          </p:cNvPicPr>
-          <p:nvPr/>
-        </p:nvPicPr>
-        <p:blipFill>
-          <a:blip r:embed="rId2"/>
-          <a:stretch>
-            <a:fillRect/>
-          </a:stretch>
-        </p:blipFill>
-        <p:spPr>
-          <a:xfrm>
-            <a:off x="6309360" y="841248"/>
-            <a:ext cx="2560320" cy="2560320"/>
-          </a:xfrm>
-          <a:prstGeom prst="rect">
-            <a:avLst/>
-          </a:prstGeom>
-        </p:spPr>
-      </p:pic>
-      <p:sp>
-        <p:nvSpPr>
-          <p:cNvPr id="53" name="Rounded Rectangle 52"/>
+      <p:sp>
+        <p:nvSpPr>
+          <p:cNvPr id="52" name="Rounded Rectangle 51"/>
           <p:cNvSpPr/>
           <p:nvPr/>
         </p:nvSpPr>
@@ -57221,7 +56957,7 @@
       </p:sp>
       <p:sp>
         <p:nvSpPr>
-          <p:cNvPr id="54" name="Rectangle 53"/>
+          <p:cNvPr id="53" name="Rectangle 52"/>
           <p:cNvSpPr/>
           <p:nvPr/>
         </p:nvSpPr>
@@ -57264,7 +57000,7 @@
       </p:sp>
       <p:sp>
         <p:nvSpPr>
-          <p:cNvPr id="55" name="TextBox 54"/>
+          <p:cNvPr id="54" name="TextBox 53"/>
           <p:cNvSpPr txBox="1"/>
           <p:nvPr/>
         </p:nvSpPr>
@@ -57299,7 +57035,7 @@
       </p:sp>
       <p:sp>
         <p:nvSpPr>
-          <p:cNvPr id="56" name="TextBox 55"/>
+          <p:cNvPr id="55" name="TextBox 54"/>
           <p:cNvSpPr txBox="1"/>
           <p:nvPr/>
         </p:nvSpPr>
@@ -57340,7 +57076,7 @@
                 </a:solidFill>
                 <a:latin typeface="Hiragino Kaku Gothic ProN"/>
               </a:rPr>
-              <a:t>設定しないとシャドウバン（表示回数激減）の対象に</a:t>
+              <a:t>設定しないとシャドウバン（表示回数激減）の対象になる可能性</a:t>
             </a:r>
           </a:p>
           <a:p>
@@ -57372,7 +57108,7 @@
       </p:sp>
       <p:sp>
         <p:nvSpPr>
-          <p:cNvPr id="57" name="Rounded Rectangle 56"/>
+          <p:cNvPr id="56" name="Rounded Rectangle 55"/>
           <p:cNvSpPr/>
           <p:nvPr/>
         </p:nvSpPr>
@@ -57417,7 +57153,7 @@
       </p:sp>
       <p:sp>
         <p:nvSpPr>
-          <p:cNvPr id="58" name="TextBox 57"/>
+          <p:cNvPr id="57" name="TextBox 56"/>
           <p:cNvSpPr txBox="1"/>
           <p:nvPr/>
         </p:nvSpPr>
@@ -59541,7 +59277,7 @@
         <p:spPr>
           <a:xfrm>
             <a:off x="274320" y="914400"/>
-            <a:ext cx="3931920" cy="3246120"/>
+            <a:ext cx="4114800" cy="3246120"/>
           </a:xfrm>
           <a:prstGeom prst="roundRect">
             <a:avLst/>
@@ -59586,7 +59322,7 @@
         <p:spPr>
           <a:xfrm>
             <a:off x="274320" y="914400"/>
-            <a:ext cx="3931920" cy="384048"/>
+            <a:ext cx="4114800" cy="384048"/>
           </a:xfrm>
           <a:prstGeom prst="rect">
             <a:avLst/>
@@ -59629,7 +59365,7 @@
         <p:spPr>
           <a:xfrm>
             <a:off x="411479" y="941832"/>
-            <a:ext cx="3657600" cy="347472"/>
+            <a:ext cx="3840480" cy="347472"/>
           </a:xfrm>
           <a:prstGeom prst="rect">
             <a:avLst/>
@@ -59664,7 +59400,7 @@
         <p:spPr>
           <a:xfrm>
             <a:off x="438912" y="1371600"/>
-            <a:ext cx="3657600" cy="2679191"/>
+            <a:ext cx="3840480" cy="2679191"/>
           </a:xfrm>
           <a:prstGeom prst="rect">
             <a:avLst/>
@@ -59718,8 +59454,8 @@
         </p:nvSpPr>
         <p:spPr>
           <a:xfrm>
-            <a:off x="4389120" y="914400"/>
-            <a:ext cx="4480560" cy="3246120"/>
+            <a:off x="4572000" y="914400"/>
+            <a:ext cx="4297680" cy="3246120"/>
           </a:xfrm>
           <a:prstGeom prst="roundRect">
             <a:avLst/>
@@ -59763,8 +59499,8 @@
         </p:nvSpPr>
         <p:spPr>
           <a:xfrm>
-            <a:off x="4389120" y="914400"/>
-            <a:ext cx="4480560" cy="384048"/>
+            <a:off x="4572000" y="914400"/>
+            <a:ext cx="4297680" cy="384048"/>
           </a:xfrm>
           <a:prstGeom prst="rect">
             <a:avLst/>
@@ -59806,8 +59542,8 @@
         </p:nvSpPr>
         <p:spPr>
           <a:xfrm>
-            <a:off x="4526280" y="941832"/>
-            <a:ext cx="4206240" cy="347472"/>
+            <a:off x="4709160" y="941832"/>
+            <a:ext cx="4023360" cy="347472"/>
           </a:xfrm>
           <a:prstGeom prst="rect">
             <a:avLst/>
@@ -59841,8 +59577,8 @@
         </p:nvSpPr>
         <p:spPr>
           <a:xfrm>
-            <a:off x="4553712" y="1371600"/>
-            <a:ext cx="4206240" cy="2679191"/>
+            <a:off x="4736592" y="1371600"/>
+            <a:ext cx="4023360" cy="2679191"/>
           </a:xfrm>
           <a:prstGeom prst="rect">
             <a:avLst/>
@@ -59931,33 +59667,9 @@
           </a:p>
         </p:txBody>
       </p:sp>
-      <p:pic>
-        <p:nvPicPr>
-          <p:cNvPr id="58" name="Picture 57" descr="illust_risk.png"/>
-          <p:cNvPicPr>
-            <a:picLocks noChangeAspect="1"/>
-          </p:cNvPicPr>
-          <p:nvPr/>
-        </p:nvPicPr>
-        <p:blipFill>
-          <a:blip r:embed="rId2"/>
-          <a:stretch>
-            <a:fillRect/>
-          </a:stretch>
-        </p:blipFill>
-        <p:spPr>
-          <a:xfrm>
-            <a:off x="3200400" y="960120"/>
-            <a:ext cx="1097280" cy="1097280"/>
-          </a:xfrm>
-          <a:prstGeom prst="rect">
-            <a:avLst/>
-          </a:prstGeom>
-        </p:spPr>
-      </p:pic>
-      <p:sp>
-        <p:nvSpPr>
-          <p:cNvPr id="59" name="Rounded Rectangle 58"/>
+      <p:sp>
+        <p:nvSpPr>
+          <p:cNvPr id="58" name="Rounded Rectangle 57"/>
           <p:cNvSpPr/>
           <p:nvPr/>
         </p:nvSpPr>
@@ -60002,7 +59714,7 @@
       </p:sp>
       <p:sp>
         <p:nvSpPr>
-          <p:cNvPr id="60" name="TextBox 59"/>
+          <p:cNvPr id="59" name="TextBox 58"/>
           <p:cNvSpPr txBox="1"/>
           <p:nvPr/>
         </p:nvSpPr>
@@ -62091,7 +61803,7 @@
         <p:spPr>
           <a:xfrm>
             <a:off x="320040" y="91440"/>
-            <a:ext cx="5486400" cy="502920"/>
+            <a:ext cx="7315200" cy="502920"/>
           </a:xfrm>
           <a:prstGeom prst="rect">
             <a:avLst/>
@@ -62786,7 +62498,7 @@
         <p:spPr>
           <a:xfrm>
             <a:off x="3200400" y="1280160"/>
-            <a:ext cx="5303520" cy="1097280"/>
+            <a:ext cx="3840480" cy="1097280"/>
           </a:xfrm>
           <a:prstGeom prst="rect">
             <a:avLst/>
@@ -62821,7 +62533,7 @@
         <p:spPr>
           <a:xfrm>
             <a:off x="3200400" y="2468880"/>
-            <a:ext cx="5303520" cy="640080"/>
+            <a:ext cx="3840480" cy="640080"/>
           </a:xfrm>
           <a:prstGeom prst="rect">
             <a:avLst/>
@@ -62849,7 +62561,7 @@
       </p:sp>
       <p:pic>
         <p:nvPicPr>
-          <p:cNvPr id="6" name="Picture 5" descr="illust_yakuji.png"/>
+          <p:cNvPr id="6" name="Picture 5" descr="image-5-3.png"/>
           <p:cNvPicPr>
             <a:picLocks noChangeAspect="1"/>
           </p:cNvPicPr>
@@ -62863,8 +62575,8 @@
         </p:blipFill>
         <p:spPr>
           <a:xfrm>
-            <a:off x="182880" y="1097280"/>
-            <a:ext cx="2468880" cy="2468880"/>
+            <a:off x="7132320" y="1188720"/>
+            <a:ext cx="1371600" cy="1371600"/>
           </a:xfrm>
           <a:prstGeom prst="rect">
             <a:avLst/>

--- a/TORIHADA_第2週_研修資料.pptx
+++ b/TORIHADA_第2週_研修資料.pptx
@@ -10542,7 +10542,7 @@
         <p:spPr>
           <a:xfrm>
             <a:off x="274320" y="3447288"/>
-            <a:ext cx="8595360" cy="658368"/>
+            <a:ext cx="8595360" cy="777240"/>
           </a:xfrm>
           <a:prstGeom prst="roundRect">
             <a:avLst/>
@@ -10586,8 +10586,8 @@
         </p:nvSpPr>
         <p:spPr>
           <a:xfrm>
-            <a:off x="411479" y="3511296"/>
-            <a:ext cx="8321040" cy="566928"/>
+            <a:off x="411479" y="3520440"/>
+            <a:ext cx="8321040" cy="685800"/>
           </a:xfrm>
           <a:prstGeom prst="rect">
             <a:avLst/>
@@ -10596,13 +10596,12 @@
         </p:spPr>
         <p:txBody>
           <a:bodyPr wrap="square">
-            <a:spAutoFit/>
+            <a:noAutofit/>
           </a:bodyPr>
           <a:lstStyle/>
           <a:p>
-            <a:pPr algn="l"/>
             <a:r>
-              <a:rPr sz="1200" b="1" i="0">
+              <a:rPr sz="1300" b="1">
                 <a:solidFill>
                   <a:srgbClr val="FF3999"/>
                 </a:solidFill>
@@ -15512,7 +15511,7 @@
         <p:spPr>
           <a:xfrm>
             <a:off x="274320" y="3685032"/>
-            <a:ext cx="8595360" cy="621792"/>
+            <a:ext cx="8595360" cy="777240"/>
           </a:xfrm>
           <a:prstGeom prst="roundRect">
             <a:avLst/>
@@ -15556,8 +15555,8 @@
         </p:nvSpPr>
         <p:spPr>
           <a:xfrm>
-            <a:off x="411479" y="3749040"/>
-            <a:ext cx="8321040" cy="530352"/>
+            <a:off x="411479" y="3758184"/>
+            <a:ext cx="8321040" cy="685800"/>
           </a:xfrm>
           <a:prstGeom prst="rect">
             <a:avLst/>
@@ -15566,13 +15565,12 @@
         </p:spPr>
         <p:txBody>
           <a:bodyPr wrap="square">
-            <a:spAutoFit/>
+            <a:noAutofit/>
           </a:bodyPr>
           <a:lstStyle/>
           <a:p>
-            <a:pPr algn="l"/>
             <a:r>
-              <a:rPr sz="1200" b="1" i="0">
+              <a:rPr sz="1300" b="1">
                 <a:solidFill>
                   <a:srgbClr val="FF3999"/>
                 </a:solidFill>
@@ -26166,7 +26164,7 @@
         <p:spPr>
           <a:xfrm>
             <a:off x="274320" y="3538728"/>
-            <a:ext cx="8595360" cy="658368"/>
+            <a:ext cx="8595360" cy="777240"/>
           </a:xfrm>
           <a:prstGeom prst="roundRect">
             <a:avLst/>
@@ -26210,8 +26208,8 @@
         </p:nvSpPr>
         <p:spPr>
           <a:xfrm>
-            <a:off x="411479" y="3602736"/>
-            <a:ext cx="8321040" cy="566928"/>
+            <a:off x="411479" y="3611880"/>
+            <a:ext cx="8321040" cy="685800"/>
           </a:xfrm>
           <a:prstGeom prst="rect">
             <a:avLst/>
@@ -26220,13 +26218,12 @@
         </p:spPr>
         <p:txBody>
           <a:bodyPr wrap="square">
-            <a:spAutoFit/>
+            <a:noAutofit/>
           </a:bodyPr>
           <a:lstStyle/>
           <a:p>
-            <a:pPr algn="l"/>
             <a:r>
-              <a:rPr sz="1200" b="1" i="0">
+              <a:rPr sz="1300" b="1">
                 <a:solidFill>
                   <a:srgbClr val="FF3999"/>
                 </a:solidFill>
@@ -31426,7 +31423,7 @@
         <p:spPr>
           <a:xfrm>
             <a:off x="274320" y="3364992"/>
-            <a:ext cx="8595360" cy="658368"/>
+            <a:ext cx="8595360" cy="777240"/>
           </a:xfrm>
           <a:prstGeom prst="roundRect">
             <a:avLst/>
@@ -31470,8 +31467,8 @@
         </p:nvSpPr>
         <p:spPr>
           <a:xfrm>
-            <a:off x="411479" y="3429000"/>
-            <a:ext cx="8321040" cy="566928"/>
+            <a:off x="411479" y="3438144"/>
+            <a:ext cx="8321040" cy="685800"/>
           </a:xfrm>
           <a:prstGeom prst="rect">
             <a:avLst/>
@@ -31480,13 +31477,12 @@
         </p:spPr>
         <p:txBody>
           <a:bodyPr wrap="square">
-            <a:spAutoFit/>
+            <a:noAutofit/>
           </a:bodyPr>
           <a:lstStyle/>
           <a:p>
-            <a:pPr algn="l"/>
             <a:r>
-              <a:rPr sz="1200" b="1" i="0">
+              <a:rPr sz="1300" b="1">
                 <a:solidFill>
                   <a:srgbClr val="FF3999"/>
                 </a:solidFill>
@@ -33924,7 +33920,7 @@
         <p:spPr>
           <a:xfrm>
             <a:off x="274320" y="4270248"/>
-            <a:ext cx="8595360" cy="594360"/>
+            <a:ext cx="8595360" cy="777240"/>
           </a:xfrm>
           <a:prstGeom prst="roundRect">
             <a:avLst/>
@@ -33968,8 +33964,8 @@
         </p:nvSpPr>
         <p:spPr>
           <a:xfrm>
-            <a:off x="411479" y="4334256"/>
-            <a:ext cx="8321040" cy="502920"/>
+            <a:off x="411479" y="4343400"/>
+            <a:ext cx="8321040" cy="685800"/>
           </a:xfrm>
           <a:prstGeom prst="rect">
             <a:avLst/>
@@ -33978,13 +33974,12 @@
         </p:spPr>
         <p:txBody>
           <a:bodyPr wrap="square">
-            <a:spAutoFit/>
+            <a:noAutofit/>
           </a:bodyPr>
           <a:lstStyle/>
           <a:p>
-            <a:pPr algn="l"/>
             <a:r>
-              <a:rPr sz="1200" b="1" i="0">
+              <a:rPr sz="1300" b="1">
                 <a:solidFill>
                   <a:srgbClr val="FF3999"/>
                 </a:solidFill>
@@ -44267,7 +44262,7 @@
         <p:spPr>
           <a:xfrm>
             <a:off x="274320" y="4087368"/>
-            <a:ext cx="8595360" cy="621792"/>
+            <a:ext cx="8595360" cy="777240"/>
           </a:xfrm>
           <a:prstGeom prst="roundRect">
             <a:avLst/>
@@ -44311,8 +44306,8 @@
         </p:nvSpPr>
         <p:spPr>
           <a:xfrm>
-            <a:off x="411479" y="4151376"/>
-            <a:ext cx="8321040" cy="530352"/>
+            <a:off x="411479" y="4160520"/>
+            <a:ext cx="8321040" cy="685800"/>
           </a:xfrm>
           <a:prstGeom prst="rect">
             <a:avLst/>
@@ -44321,13 +44316,12 @@
         </p:spPr>
         <p:txBody>
           <a:bodyPr wrap="square">
-            <a:spAutoFit/>
+            <a:noAutofit/>
           </a:bodyPr>
           <a:lstStyle/>
           <a:p>
-            <a:pPr algn="l"/>
             <a:r>
-              <a:rPr sz="1200" b="1" i="0">
+              <a:rPr sz="1300" b="1">
                 <a:solidFill>
                   <a:srgbClr val="FF3999"/>
                 </a:solidFill>
@@ -52019,7 +52013,7 @@
         <p:spPr>
           <a:xfrm>
             <a:off x="274320" y="3429000"/>
-            <a:ext cx="8595360" cy="658368"/>
+            <a:ext cx="8595360" cy="777240"/>
           </a:xfrm>
           <a:prstGeom prst="roundRect">
             <a:avLst/>
@@ -52063,8 +52057,8 @@
         </p:nvSpPr>
         <p:spPr>
           <a:xfrm>
-            <a:off x="411479" y="3493008"/>
-            <a:ext cx="8321040" cy="566928"/>
+            <a:off x="411479" y="3502152"/>
+            <a:ext cx="8321040" cy="685800"/>
           </a:xfrm>
           <a:prstGeom prst="rect">
             <a:avLst/>
@@ -52073,13 +52067,12 @@
         </p:spPr>
         <p:txBody>
           <a:bodyPr wrap="square">
-            <a:spAutoFit/>
+            <a:noAutofit/>
           </a:bodyPr>
           <a:lstStyle/>
           <a:p>
-            <a:pPr algn="l"/>
             <a:r>
-              <a:rPr sz="1200" b="1" i="0">
+              <a:rPr sz="1300" b="1">
                 <a:solidFill>
                   <a:srgbClr val="FF3999"/>
                 </a:solidFill>
@@ -54623,7 +54616,7 @@
         <p:spPr>
           <a:xfrm>
             <a:off x="274320" y="3675887"/>
-            <a:ext cx="8595360" cy="621792"/>
+            <a:ext cx="8595360" cy="777240"/>
           </a:xfrm>
           <a:prstGeom prst="roundRect">
             <a:avLst/>
@@ -54667,8 +54660,8 @@
         </p:nvSpPr>
         <p:spPr>
           <a:xfrm>
-            <a:off x="411479" y="3739896"/>
-            <a:ext cx="8321040" cy="530352"/>
+            <a:off x="411479" y="3749039"/>
+            <a:ext cx="8321040" cy="685800"/>
           </a:xfrm>
           <a:prstGeom prst="rect">
             <a:avLst/>
@@ -54677,13 +54670,12 @@
         </p:spPr>
         <p:txBody>
           <a:bodyPr wrap="square">
-            <a:spAutoFit/>
+            <a:noAutofit/>
           </a:bodyPr>
           <a:lstStyle/>
           <a:p>
-            <a:pPr algn="l"/>
             <a:r>
-              <a:rPr sz="1200" b="1" i="0">
+              <a:rPr sz="1300" b="1">
                 <a:solidFill>
                   <a:srgbClr val="FF3999"/>
                 </a:solidFill>
@@ -57115,7 +57107,7 @@
         <p:spPr>
           <a:xfrm>
             <a:off x="274320" y="4059936"/>
-            <a:ext cx="8595360" cy="594360"/>
+            <a:ext cx="8595360" cy="777240"/>
           </a:xfrm>
           <a:prstGeom prst="roundRect">
             <a:avLst/>
@@ -57159,8 +57151,8 @@
         </p:nvSpPr>
         <p:spPr>
           <a:xfrm>
-            <a:off x="411479" y="4123944"/>
-            <a:ext cx="8321040" cy="502920"/>
+            <a:off x="411479" y="4133088"/>
+            <a:ext cx="8321040" cy="685800"/>
           </a:xfrm>
           <a:prstGeom prst="rect">
             <a:avLst/>
@@ -57169,13 +57161,12 @@
         </p:spPr>
         <p:txBody>
           <a:bodyPr wrap="square">
-            <a:spAutoFit/>
+            <a:noAutofit/>
           </a:bodyPr>
           <a:lstStyle/>
           <a:p>
-            <a:pPr algn="l"/>
             <a:r>
-              <a:rPr sz="1200" b="1" i="0">
+              <a:rPr sz="1300" b="1">
                 <a:solidFill>
                   <a:srgbClr val="FF3999"/>
                 </a:solidFill>
@@ -59676,7 +59667,7 @@
         <p:spPr>
           <a:xfrm>
             <a:off x="274320" y="4270248"/>
-            <a:ext cx="8595360" cy="594360"/>
+            <a:ext cx="8595360" cy="777240"/>
           </a:xfrm>
           <a:prstGeom prst="roundRect">
             <a:avLst/>
@@ -59720,8 +59711,8 @@
         </p:nvSpPr>
         <p:spPr>
           <a:xfrm>
-            <a:off x="411479" y="4334256"/>
-            <a:ext cx="8321040" cy="502920"/>
+            <a:off x="411479" y="4343400"/>
+            <a:ext cx="8321040" cy="685800"/>
           </a:xfrm>
           <a:prstGeom prst="rect">
             <a:avLst/>
@@ -59730,13 +59721,12 @@
         </p:spPr>
         <p:txBody>
           <a:bodyPr wrap="square">
-            <a:spAutoFit/>
+            <a:noAutofit/>
           </a:bodyPr>
           <a:lstStyle/>
           <a:p>
-            <a:pPr algn="l"/>
             <a:r>
-              <a:rPr sz="1200" b="1" i="0">
+              <a:rPr sz="1300" b="1">
                 <a:solidFill>
                   <a:srgbClr val="FF3999"/>
                 </a:solidFill>
